--- a/Molecular_Docking_Workshop.pptx
+++ b/Molecular_Docking_Workshop.pptx
@@ -3138,7 +3138,9 @@
           </a:fontRef>
         </p:style>
         <p:txBody>
-          <a:bodyPr rtlCol="0" anchor="ctr"/>
+          <a:bodyPr rtlCol="0" anchor="ctr">
+            <a:normAutofit/>
+          </a:bodyPr>
           <a:lstStyle/>
           <a:p>
             <a:pPr algn="ctr"/>
@@ -3163,7 +3165,7 @@
         </p:spPr>
         <p:txBody>
           <a:bodyPr wrap="square">
-            <a:spAutoFit/>
+            <a:normAutofit/>
           </a:bodyPr>
           <a:lstStyle/>
           <a:p>
@@ -3202,7 +3204,7 @@
         </p:spPr>
         <p:txBody>
           <a:bodyPr wrap="square">
-            <a:spAutoFit/>
+            <a:normAutofit/>
           </a:bodyPr>
           <a:lstStyle/>
           <a:p>
@@ -3241,7 +3243,7 @@
         </p:spPr>
         <p:txBody>
           <a:bodyPr wrap="square">
-            <a:spAutoFit/>
+            <a:normAutofit/>
           </a:bodyPr>
           <a:lstStyle/>
           <a:p>
@@ -3312,7 +3314,7 @@
         </p:spPr>
         <p:txBody>
           <a:bodyPr wrap="square">
-            <a:spAutoFit/>
+            <a:normAutofit/>
           </a:bodyPr>
           <a:lstStyle/>
           <a:p>
@@ -3387,7 +3389,9 @@
           </a:fontRef>
         </p:style>
         <p:txBody>
-          <a:bodyPr rtlCol="0" anchor="ctr"/>
+          <a:bodyPr rtlCol="0" anchor="ctr">
+            <a:normAutofit/>
+          </a:bodyPr>
           <a:lstStyle/>
           <a:p>
             <a:pPr algn="ctr"/>
@@ -3412,7 +3416,7 @@
         </p:spPr>
         <p:txBody>
           <a:bodyPr wrap="square">
-            <a:spAutoFit/>
+            <a:normAutofit/>
           </a:bodyPr>
           <a:lstStyle/>
           <a:p>
@@ -3451,7 +3455,7 @@
         </p:spPr>
         <p:txBody>
           <a:bodyPr wrap="square">
-            <a:spAutoFit/>
+            <a:normAutofit/>
           </a:bodyPr>
           <a:lstStyle/>
           <a:p>
@@ -3508,7 +3512,9 @@
           </a:fontRef>
         </p:style>
         <p:txBody>
-          <a:bodyPr rtlCol="0" anchor="ctr" wrap="square" lIns="177800" tIns="127000" rIns="177800" bIns="127000"/>
+          <a:bodyPr rtlCol="0" anchor="ctr" wrap="square" lIns="177800" tIns="127000" rIns="177800" bIns="127000">
+            <a:normAutofit/>
+          </a:bodyPr>
           <a:lstStyle/>
           <a:p>
             <a:pPr algn="ctr">
@@ -4010,7 +4016,9 @@
           </a:fontRef>
         </p:style>
         <p:txBody>
-          <a:bodyPr rtlCol="0" anchor="ctr" wrap="square" lIns="177800" tIns="127000" rIns="177800" bIns="127000"/>
+          <a:bodyPr rtlCol="0" anchor="ctr" wrap="square" lIns="177800" tIns="127000" rIns="177800" bIns="127000">
+            <a:normAutofit/>
+          </a:bodyPr>
           <a:lstStyle/>
           <a:p>
             <a:pPr algn="ctr">
@@ -4453,7 +4461,9 @@
           </a:fontRef>
         </p:style>
         <p:txBody>
-          <a:bodyPr rtlCol="0" anchor="ctr"/>
+          <a:bodyPr rtlCol="0" anchor="ctr">
+            <a:normAutofit/>
+          </a:bodyPr>
           <a:lstStyle/>
           <a:p>
             <a:pPr algn="ctr"/>
@@ -4478,7 +4488,7 @@
         </p:spPr>
         <p:txBody>
           <a:bodyPr wrap="square">
-            <a:spAutoFit/>
+            <a:normAutofit/>
           </a:bodyPr>
           <a:lstStyle/>
           <a:p>
@@ -4517,7 +4527,7 @@
         </p:spPr>
         <p:txBody>
           <a:bodyPr wrap="square">
-            <a:spAutoFit/>
+            <a:normAutofit/>
           </a:bodyPr>
           <a:lstStyle/>
           <a:p>
@@ -4556,7 +4566,7 @@
         </p:spPr>
         <p:txBody>
           <a:bodyPr wrap="square">
-            <a:spAutoFit/>
+            <a:normAutofit/>
           </a:bodyPr>
           <a:lstStyle/>
           <a:p>
@@ -4613,7 +4623,9 @@
           </a:fontRef>
         </p:style>
         <p:txBody>
-          <a:bodyPr rtlCol="0" anchor="ctr"/>
+          <a:bodyPr rtlCol="0" anchor="ctr">
+            <a:normAutofit/>
+          </a:bodyPr>
           <a:lstStyle/>
           <a:p>
             <a:pPr algn="ctr"/>
@@ -4638,7 +4650,7 @@
         </p:spPr>
         <p:txBody>
           <a:bodyPr wrap="square">
-            <a:spAutoFit/>
+            <a:normAutofit/>
           </a:bodyPr>
           <a:lstStyle/>
           <a:p>
@@ -4677,7 +4689,7 @@
         </p:spPr>
         <p:txBody>
           <a:bodyPr wrap="square">
-            <a:spAutoFit/>
+            <a:normAutofit/>
           </a:bodyPr>
           <a:lstStyle/>
           <a:p>
@@ -4734,7 +4746,9 @@
           </a:fontRef>
         </p:style>
         <p:txBody>
-          <a:bodyPr rtlCol="0" anchor="ctr"/>
+          <a:bodyPr rtlCol="0" anchor="ctr">
+            <a:normAutofit/>
+          </a:bodyPr>
           <a:lstStyle/>
           <a:p>
             <a:pPr algn="ctr"/>
@@ -4759,7 +4773,7 @@
         </p:spPr>
         <p:txBody>
           <a:bodyPr wrap="square">
-            <a:spAutoFit/>
+            <a:normAutofit/>
           </a:bodyPr>
           <a:lstStyle/>
           <a:p>
@@ -4798,7 +4812,7 @@
         </p:spPr>
         <p:txBody>
           <a:bodyPr wrap="square">
-            <a:spAutoFit/>
+            <a:normAutofit/>
           </a:bodyPr>
           <a:lstStyle/>
           <a:p>
@@ -4855,7 +4869,9 @@
           </a:fontRef>
         </p:style>
         <p:txBody>
-          <a:bodyPr rtlCol="0" anchor="ctr"/>
+          <a:bodyPr rtlCol="0" anchor="ctr">
+            <a:normAutofit/>
+          </a:bodyPr>
           <a:lstStyle/>
           <a:p>
             <a:pPr algn="ctr"/>
@@ -4880,7 +4896,7 @@
         </p:spPr>
         <p:txBody>
           <a:bodyPr wrap="square">
-            <a:spAutoFit/>
+            <a:normAutofit/>
           </a:bodyPr>
           <a:lstStyle/>
           <a:p>
@@ -4919,7 +4935,7 @@
         </p:spPr>
         <p:txBody>
           <a:bodyPr wrap="square">
-            <a:spAutoFit/>
+            <a:normAutofit/>
           </a:bodyPr>
           <a:lstStyle/>
           <a:p>
@@ -4976,7 +4992,9 @@
           </a:fontRef>
         </p:style>
         <p:txBody>
-          <a:bodyPr rtlCol="0" anchor="ctr"/>
+          <a:bodyPr rtlCol="0" anchor="ctr">
+            <a:normAutofit/>
+          </a:bodyPr>
           <a:lstStyle/>
           <a:p>
             <a:pPr algn="ctr"/>
@@ -5001,7 +5019,7 @@
         </p:spPr>
         <p:txBody>
           <a:bodyPr wrap="square">
-            <a:spAutoFit/>
+            <a:normAutofit/>
           </a:bodyPr>
           <a:lstStyle/>
           <a:p>
@@ -5040,7 +5058,7 @@
         </p:spPr>
         <p:txBody>
           <a:bodyPr wrap="square">
-            <a:spAutoFit/>
+            <a:normAutofit/>
           </a:bodyPr>
           <a:lstStyle/>
           <a:p>
@@ -5097,7 +5115,9 @@
           </a:fontRef>
         </p:style>
         <p:txBody>
-          <a:bodyPr rtlCol="0" anchor="ctr"/>
+          <a:bodyPr rtlCol="0" anchor="ctr">
+            <a:normAutofit/>
+          </a:bodyPr>
           <a:lstStyle/>
           <a:p>
             <a:pPr algn="ctr"/>
@@ -5122,7 +5142,7 @@
         </p:spPr>
         <p:txBody>
           <a:bodyPr wrap="square">
-            <a:spAutoFit/>
+            <a:normAutofit/>
           </a:bodyPr>
           <a:lstStyle/>
           <a:p>
@@ -5161,7 +5181,7 @@
         </p:spPr>
         <p:txBody>
           <a:bodyPr wrap="square">
-            <a:spAutoFit/>
+            <a:normAutofit/>
           </a:bodyPr>
           <a:lstStyle/>
           <a:p>
@@ -5218,7 +5238,9 @@
           </a:fontRef>
         </p:style>
         <p:txBody>
-          <a:bodyPr rtlCol="0" anchor="ctr"/>
+          <a:bodyPr rtlCol="0" anchor="ctr">
+            <a:normAutofit/>
+          </a:bodyPr>
           <a:lstStyle/>
           <a:p>
             <a:pPr algn="ctr"/>
@@ -5243,7 +5265,7 @@
         </p:spPr>
         <p:txBody>
           <a:bodyPr wrap="square">
-            <a:spAutoFit/>
+            <a:normAutofit/>
           </a:bodyPr>
           <a:lstStyle/>
           <a:p>
@@ -5282,7 +5304,7 @@
         </p:spPr>
         <p:txBody>
           <a:bodyPr wrap="square">
-            <a:spAutoFit/>
+            <a:normAutofit/>
           </a:bodyPr>
           <a:lstStyle/>
           <a:p>
@@ -5321,7 +5343,7 @@
         </p:spPr>
         <p:txBody>
           <a:bodyPr wrap="square">
-            <a:spAutoFit/>
+            <a:normAutofit/>
           </a:bodyPr>
           <a:lstStyle/>
           <a:p>
@@ -5378,7 +5400,9 @@
           </a:fontRef>
         </p:style>
         <p:txBody>
-          <a:bodyPr rtlCol="0" anchor="ctr" wrap="square" lIns="177800" tIns="127000" rIns="177800" bIns="127000"/>
+          <a:bodyPr rtlCol="0" anchor="ctr" wrap="square" lIns="177800" tIns="127000" rIns="177800" bIns="127000">
+            <a:normAutofit/>
+          </a:bodyPr>
           <a:lstStyle/>
           <a:p>
             <a:pPr algn="ctr">
@@ -5516,7 +5540,9 @@
           </a:fontRef>
         </p:style>
         <p:txBody>
-          <a:bodyPr rtlCol="0" anchor="ctr"/>
+          <a:bodyPr rtlCol="0" anchor="ctr">
+            <a:normAutofit/>
+          </a:bodyPr>
           <a:lstStyle/>
           <a:p>
             <a:pPr algn="ctr"/>
@@ -5541,7 +5567,7 @@
         </p:spPr>
         <p:txBody>
           <a:bodyPr wrap="square">
-            <a:spAutoFit/>
+            <a:normAutofit/>
           </a:bodyPr>
           <a:lstStyle/>
           <a:p>
@@ -5598,7 +5624,9 @@
           </a:fontRef>
         </p:style>
         <p:txBody>
-          <a:bodyPr rtlCol="0" anchor="ctr" wrap="square" lIns="177800" tIns="127000" rIns="177800" bIns="127000"/>
+          <a:bodyPr rtlCol="0" anchor="ctr" wrap="square" lIns="177800" tIns="127000" rIns="177800" bIns="127000">
+            <a:normAutofit/>
+          </a:bodyPr>
           <a:lstStyle/>
           <a:p>
             <a:pPr algn="ctr">
@@ -6041,7 +6069,9 @@
           </a:fontRef>
         </p:style>
         <p:txBody>
-          <a:bodyPr rtlCol="0" anchor="ctr"/>
+          <a:bodyPr rtlCol="0" anchor="ctr">
+            <a:normAutofit/>
+          </a:bodyPr>
           <a:lstStyle/>
           <a:p>
             <a:pPr algn="ctr"/>
@@ -6066,7 +6096,7 @@
         </p:spPr>
         <p:txBody>
           <a:bodyPr wrap="square">
-            <a:spAutoFit/>
+            <a:normAutofit/>
           </a:bodyPr>
           <a:lstStyle/>
           <a:p>
@@ -6105,7 +6135,7 @@
         </p:spPr>
         <p:txBody>
           <a:bodyPr wrap="square">
-            <a:spAutoFit/>
+            <a:normAutofit/>
           </a:bodyPr>
           <a:lstStyle/>
           <a:p>
@@ -6162,7 +6192,9 @@
           </a:fontRef>
         </p:style>
         <p:txBody>
-          <a:bodyPr rtlCol="0" anchor="ctr" wrap="square"/>
+          <a:bodyPr rtlCol="0" anchor="ctr" wrap="square">
+            <a:normAutofit/>
+          </a:bodyPr>
           <a:lstStyle/>
           <a:p>
             <a:pPr algn="ctr">
@@ -6214,7 +6246,9 @@
           </a:fontRef>
         </p:style>
         <p:txBody>
-          <a:bodyPr rtlCol="0" anchor="ctr" wrap="square"/>
+          <a:bodyPr rtlCol="0" anchor="ctr" wrap="square">
+            <a:normAutofit/>
+          </a:bodyPr>
           <a:lstStyle/>
           <a:p>
             <a:pPr algn="ctr">
@@ -6266,7 +6300,9 @@
           </a:fontRef>
         </p:style>
         <p:txBody>
-          <a:bodyPr rtlCol="0" anchor="ctr" wrap="square"/>
+          <a:bodyPr rtlCol="0" anchor="ctr" wrap="square">
+            <a:normAutofit/>
+          </a:bodyPr>
           <a:lstStyle/>
           <a:p>
             <a:pPr algn="ctr">
@@ -6318,7 +6354,9 @@
           </a:fontRef>
         </p:style>
         <p:txBody>
-          <a:bodyPr rtlCol="0" anchor="ctr" wrap="square"/>
+          <a:bodyPr rtlCol="0" anchor="ctr" wrap="square">
+            <a:normAutofit/>
+          </a:bodyPr>
           <a:lstStyle/>
           <a:p>
             <a:pPr algn="ctr">
@@ -6370,7 +6408,9 @@
           </a:fontRef>
         </p:style>
         <p:txBody>
-          <a:bodyPr rtlCol="0" anchor="ctr" wrap="square"/>
+          <a:bodyPr rtlCol="0" anchor="ctr" wrap="square">
+            <a:normAutofit/>
+          </a:bodyPr>
           <a:lstStyle/>
           <a:p>
             <a:pPr algn="ctr">
@@ -6424,7 +6464,9 @@
           </a:fontRef>
         </p:style>
         <p:txBody>
-          <a:bodyPr rtlCol="0" anchor="ctr"/>
+          <a:bodyPr rtlCol="0" anchor="ctr">
+            <a:normAutofit/>
+          </a:bodyPr>
           <a:lstStyle/>
           <a:p>
             <a:pPr algn="ctr">
@@ -6474,7 +6516,9 @@
           </a:fontRef>
         </p:style>
         <p:txBody>
-          <a:bodyPr rtlCol="0" anchor="ctr"/>
+          <a:bodyPr rtlCol="0" anchor="ctr">
+            <a:normAutofit/>
+          </a:bodyPr>
           <a:lstStyle/>
           <a:p>
             <a:pPr algn="ctr">
@@ -6524,7 +6568,9 @@
           </a:fontRef>
         </p:style>
         <p:txBody>
-          <a:bodyPr rtlCol="0" anchor="ctr"/>
+          <a:bodyPr rtlCol="0" anchor="ctr">
+            <a:normAutofit/>
+          </a:bodyPr>
           <a:lstStyle/>
           <a:p>
             <a:pPr algn="ctr">
@@ -6574,7 +6620,9 @@
           </a:fontRef>
         </p:style>
         <p:txBody>
-          <a:bodyPr rtlCol="0" anchor="ctr"/>
+          <a:bodyPr rtlCol="0" anchor="ctr">
+            <a:normAutofit/>
+          </a:bodyPr>
           <a:lstStyle/>
           <a:p>
             <a:pPr algn="ctr">
@@ -6624,7 +6672,9 @@
           </a:fontRef>
         </p:style>
         <p:txBody>
-          <a:bodyPr rtlCol="0" anchor="ctr"/>
+          <a:bodyPr rtlCol="0" anchor="ctr">
+            <a:normAutofit/>
+          </a:bodyPr>
           <a:lstStyle/>
           <a:p>
             <a:pPr algn="ctr">
@@ -6674,7 +6724,9 @@
           </a:fontRef>
         </p:style>
         <p:txBody>
-          <a:bodyPr rtlCol="0" anchor="ctr"/>
+          <a:bodyPr rtlCol="0" anchor="ctr">
+            <a:normAutofit/>
+          </a:bodyPr>
           <a:lstStyle/>
           <a:p>
             <a:pPr algn="ctr">
@@ -6724,7 +6776,9 @@
           </a:fontRef>
         </p:style>
         <p:txBody>
-          <a:bodyPr rtlCol="0" anchor="ctr"/>
+          <a:bodyPr rtlCol="0" anchor="ctr">
+            <a:normAutofit/>
+          </a:bodyPr>
           <a:lstStyle/>
           <a:p>
             <a:pPr algn="ctr">
@@ -6774,7 +6828,9 @@
           </a:fontRef>
         </p:style>
         <p:txBody>
-          <a:bodyPr rtlCol="0" anchor="ctr"/>
+          <a:bodyPr rtlCol="0" anchor="ctr">
+            <a:normAutofit/>
+          </a:bodyPr>
           <a:lstStyle/>
           <a:p>
             <a:pPr algn="ctr">
@@ -6824,7 +6880,9 @@
           </a:fontRef>
         </p:style>
         <p:txBody>
-          <a:bodyPr rtlCol="0" anchor="ctr"/>
+          <a:bodyPr rtlCol="0" anchor="ctr">
+            <a:normAutofit/>
+          </a:bodyPr>
           <a:lstStyle/>
           <a:p>
             <a:pPr algn="ctr">
@@ -6874,7 +6932,9 @@
           </a:fontRef>
         </p:style>
         <p:txBody>
-          <a:bodyPr rtlCol="0" anchor="ctr"/>
+          <a:bodyPr rtlCol="0" anchor="ctr">
+            <a:normAutofit/>
+          </a:bodyPr>
           <a:lstStyle/>
           <a:p>
             <a:pPr algn="ctr">
@@ -6924,7 +6984,9 @@
           </a:fontRef>
         </p:style>
         <p:txBody>
-          <a:bodyPr rtlCol="0" anchor="ctr"/>
+          <a:bodyPr rtlCol="0" anchor="ctr">
+            <a:normAutofit/>
+          </a:bodyPr>
           <a:lstStyle/>
           <a:p>
             <a:pPr algn="ctr">
@@ -6974,7 +7036,9 @@
           </a:fontRef>
         </p:style>
         <p:txBody>
-          <a:bodyPr rtlCol="0" anchor="ctr"/>
+          <a:bodyPr rtlCol="0" anchor="ctr">
+            <a:normAutofit/>
+          </a:bodyPr>
           <a:lstStyle/>
           <a:p>
             <a:pPr algn="ctr">
@@ -7024,7 +7088,9 @@
           </a:fontRef>
         </p:style>
         <p:txBody>
-          <a:bodyPr rtlCol="0" anchor="ctr"/>
+          <a:bodyPr rtlCol="0" anchor="ctr">
+            <a:normAutofit/>
+          </a:bodyPr>
           <a:lstStyle/>
           <a:p>
             <a:pPr algn="ctr">
@@ -7074,7 +7140,9 @@
           </a:fontRef>
         </p:style>
         <p:txBody>
-          <a:bodyPr rtlCol="0" anchor="ctr"/>
+          <a:bodyPr rtlCol="0" anchor="ctr">
+            <a:normAutofit/>
+          </a:bodyPr>
           <a:lstStyle/>
           <a:p>
             <a:pPr algn="ctr">
@@ -7124,7 +7192,9 @@
           </a:fontRef>
         </p:style>
         <p:txBody>
-          <a:bodyPr rtlCol="0" anchor="ctr"/>
+          <a:bodyPr rtlCol="0" anchor="ctr">
+            <a:normAutofit/>
+          </a:bodyPr>
           <a:lstStyle/>
           <a:p>
             <a:pPr algn="ctr">
@@ -7174,7 +7244,9 @@
           </a:fontRef>
         </p:style>
         <p:txBody>
-          <a:bodyPr rtlCol="0" anchor="ctr"/>
+          <a:bodyPr rtlCol="0" anchor="ctr">
+            <a:normAutofit/>
+          </a:bodyPr>
           <a:lstStyle/>
           <a:p>
             <a:pPr algn="ctr">
@@ -7224,7 +7296,9 @@
           </a:fontRef>
         </p:style>
         <p:txBody>
-          <a:bodyPr rtlCol="0" anchor="ctr"/>
+          <a:bodyPr rtlCol="0" anchor="ctr">
+            <a:normAutofit/>
+          </a:bodyPr>
           <a:lstStyle/>
           <a:p>
             <a:pPr algn="ctr">
@@ -7274,7 +7348,9 @@
           </a:fontRef>
         </p:style>
         <p:txBody>
-          <a:bodyPr rtlCol="0" anchor="ctr"/>
+          <a:bodyPr rtlCol="0" anchor="ctr">
+            <a:normAutofit/>
+          </a:bodyPr>
           <a:lstStyle/>
           <a:p>
             <a:pPr algn="ctr">
@@ -7324,7 +7400,9 @@
           </a:fontRef>
         </p:style>
         <p:txBody>
-          <a:bodyPr rtlCol="0" anchor="ctr"/>
+          <a:bodyPr rtlCol="0" anchor="ctr">
+            <a:normAutofit/>
+          </a:bodyPr>
           <a:lstStyle/>
           <a:p>
             <a:pPr algn="ctr">
@@ -7374,7 +7452,9 @@
           </a:fontRef>
         </p:style>
         <p:txBody>
-          <a:bodyPr rtlCol="0" anchor="ctr"/>
+          <a:bodyPr rtlCol="0" anchor="ctr">
+            <a:normAutofit/>
+          </a:bodyPr>
           <a:lstStyle/>
           <a:p>
             <a:pPr algn="ctr">
@@ -7424,7 +7504,9 @@
           </a:fontRef>
         </p:style>
         <p:txBody>
-          <a:bodyPr rtlCol="0" anchor="ctr"/>
+          <a:bodyPr rtlCol="0" anchor="ctr">
+            <a:normAutofit/>
+          </a:bodyPr>
           <a:lstStyle/>
           <a:p>
             <a:pPr algn="ctr">
@@ -7474,7 +7556,9 @@
           </a:fontRef>
         </p:style>
         <p:txBody>
-          <a:bodyPr rtlCol="0" anchor="ctr"/>
+          <a:bodyPr rtlCol="0" anchor="ctr">
+            <a:normAutofit/>
+          </a:bodyPr>
           <a:lstStyle/>
           <a:p>
             <a:pPr algn="ctr">
@@ -7524,7 +7608,9 @@
           </a:fontRef>
         </p:style>
         <p:txBody>
-          <a:bodyPr rtlCol="0" anchor="ctr"/>
+          <a:bodyPr rtlCol="0" anchor="ctr">
+            <a:normAutofit/>
+          </a:bodyPr>
           <a:lstStyle/>
           <a:p>
             <a:pPr algn="ctr">
@@ -7574,7 +7660,9 @@
           </a:fontRef>
         </p:style>
         <p:txBody>
-          <a:bodyPr rtlCol="0" anchor="ctr"/>
+          <a:bodyPr rtlCol="0" anchor="ctr">
+            <a:normAutofit/>
+          </a:bodyPr>
           <a:lstStyle/>
           <a:p>
             <a:pPr algn="ctr">
@@ -7624,7 +7712,9 @@
           </a:fontRef>
         </p:style>
         <p:txBody>
-          <a:bodyPr rtlCol="0" anchor="ctr"/>
+          <a:bodyPr rtlCol="0" anchor="ctr">
+            <a:normAutofit/>
+          </a:bodyPr>
           <a:lstStyle/>
           <a:p>
             <a:pPr algn="ctr">
@@ -7674,7 +7764,9 @@
           </a:fontRef>
         </p:style>
         <p:txBody>
-          <a:bodyPr rtlCol="0" anchor="ctr"/>
+          <a:bodyPr rtlCol="0" anchor="ctr">
+            <a:normAutofit/>
+          </a:bodyPr>
           <a:lstStyle/>
           <a:p>
             <a:pPr algn="ctr">
@@ -7724,7 +7816,9 @@
           </a:fontRef>
         </p:style>
         <p:txBody>
-          <a:bodyPr rtlCol="0" anchor="ctr"/>
+          <a:bodyPr rtlCol="0" anchor="ctr">
+            <a:normAutofit/>
+          </a:bodyPr>
           <a:lstStyle/>
           <a:p>
             <a:pPr algn="ctr">
@@ -7774,7 +7868,9 @@
           </a:fontRef>
         </p:style>
         <p:txBody>
-          <a:bodyPr rtlCol="0" anchor="ctr"/>
+          <a:bodyPr rtlCol="0" anchor="ctr">
+            <a:normAutofit/>
+          </a:bodyPr>
           <a:lstStyle/>
           <a:p>
             <a:pPr algn="ctr">
@@ -7824,7 +7920,9 @@
           </a:fontRef>
         </p:style>
         <p:txBody>
-          <a:bodyPr rtlCol="0" anchor="ctr"/>
+          <a:bodyPr rtlCol="0" anchor="ctr">
+            <a:normAutofit/>
+          </a:bodyPr>
           <a:lstStyle/>
           <a:p>
             <a:pPr algn="ctr">
@@ -7874,7 +7972,9 @@
           </a:fontRef>
         </p:style>
         <p:txBody>
-          <a:bodyPr rtlCol="0" anchor="ctr"/>
+          <a:bodyPr rtlCol="0" anchor="ctr">
+            <a:normAutofit/>
+          </a:bodyPr>
           <a:lstStyle/>
           <a:p>
             <a:pPr algn="ctr">
@@ -7924,7 +8024,9 @@
           </a:fontRef>
         </p:style>
         <p:txBody>
-          <a:bodyPr rtlCol="0" anchor="ctr"/>
+          <a:bodyPr rtlCol="0" anchor="ctr">
+            <a:normAutofit/>
+          </a:bodyPr>
           <a:lstStyle/>
           <a:p>
             <a:pPr algn="ctr">
@@ -7974,7 +8076,9 @@
           </a:fontRef>
         </p:style>
         <p:txBody>
-          <a:bodyPr rtlCol="0" anchor="ctr"/>
+          <a:bodyPr rtlCol="0" anchor="ctr">
+            <a:normAutofit/>
+          </a:bodyPr>
           <a:lstStyle/>
           <a:p>
             <a:pPr algn="ctr">
@@ -8024,7 +8128,9 @@
           </a:fontRef>
         </p:style>
         <p:txBody>
-          <a:bodyPr rtlCol="0" anchor="ctr"/>
+          <a:bodyPr rtlCol="0" anchor="ctr">
+            <a:normAutofit/>
+          </a:bodyPr>
           <a:lstStyle/>
           <a:p>
             <a:pPr algn="ctr">
@@ -8074,7 +8180,9 @@
           </a:fontRef>
         </p:style>
         <p:txBody>
-          <a:bodyPr rtlCol="0" anchor="ctr"/>
+          <a:bodyPr rtlCol="0" anchor="ctr">
+            <a:normAutofit/>
+          </a:bodyPr>
           <a:lstStyle/>
           <a:p>
             <a:pPr algn="ctr">
@@ -8124,7 +8232,9 @@
           </a:fontRef>
         </p:style>
         <p:txBody>
-          <a:bodyPr rtlCol="0" anchor="ctr"/>
+          <a:bodyPr rtlCol="0" anchor="ctr">
+            <a:normAutofit/>
+          </a:bodyPr>
           <a:lstStyle/>
           <a:p>
             <a:pPr algn="ctr">
@@ -8174,7 +8284,9 @@
           </a:fontRef>
         </p:style>
         <p:txBody>
-          <a:bodyPr rtlCol="0" anchor="ctr"/>
+          <a:bodyPr rtlCol="0" anchor="ctr">
+            <a:normAutofit/>
+          </a:bodyPr>
           <a:lstStyle/>
           <a:p>
             <a:pPr algn="ctr">
@@ -8224,7 +8336,9 @@
           </a:fontRef>
         </p:style>
         <p:txBody>
-          <a:bodyPr rtlCol="0" anchor="ctr"/>
+          <a:bodyPr rtlCol="0" anchor="ctr">
+            <a:normAutofit/>
+          </a:bodyPr>
           <a:lstStyle/>
           <a:p>
             <a:pPr algn="ctr">
@@ -8274,7 +8388,9 @@
           </a:fontRef>
         </p:style>
         <p:txBody>
-          <a:bodyPr rtlCol="0" anchor="ctr"/>
+          <a:bodyPr rtlCol="0" anchor="ctr">
+            <a:normAutofit/>
+          </a:bodyPr>
           <a:lstStyle/>
           <a:p>
             <a:pPr algn="ctr">
@@ -8324,7 +8440,9 @@
           </a:fontRef>
         </p:style>
         <p:txBody>
-          <a:bodyPr rtlCol="0" anchor="ctr"/>
+          <a:bodyPr rtlCol="0" anchor="ctr">
+            <a:normAutofit/>
+          </a:bodyPr>
           <a:lstStyle/>
           <a:p>
             <a:pPr algn="ctr">
@@ -8374,7 +8492,9 @@
           </a:fontRef>
         </p:style>
         <p:txBody>
-          <a:bodyPr rtlCol="0" anchor="ctr"/>
+          <a:bodyPr rtlCol="0" anchor="ctr">
+            <a:normAutofit/>
+          </a:bodyPr>
           <a:lstStyle/>
           <a:p>
             <a:pPr algn="ctr">
@@ -8424,7 +8544,9 @@
           </a:fontRef>
         </p:style>
         <p:txBody>
-          <a:bodyPr rtlCol="0" anchor="ctr"/>
+          <a:bodyPr rtlCol="0" anchor="ctr">
+            <a:normAutofit/>
+          </a:bodyPr>
           <a:lstStyle/>
           <a:p>
             <a:pPr algn="ctr">
@@ -8474,7 +8596,9 @@
           </a:fontRef>
         </p:style>
         <p:txBody>
-          <a:bodyPr rtlCol="0" anchor="ctr"/>
+          <a:bodyPr rtlCol="0" anchor="ctr">
+            <a:normAutofit/>
+          </a:bodyPr>
           <a:lstStyle/>
           <a:p>
             <a:pPr algn="ctr">
@@ -8524,7 +8648,9 @@
           </a:fontRef>
         </p:style>
         <p:txBody>
-          <a:bodyPr rtlCol="0" anchor="ctr"/>
+          <a:bodyPr rtlCol="0" anchor="ctr">
+            <a:normAutofit/>
+          </a:bodyPr>
           <a:lstStyle/>
           <a:p>
             <a:pPr algn="ctr">
@@ -8574,7 +8700,9 @@
           </a:fontRef>
         </p:style>
         <p:txBody>
-          <a:bodyPr rtlCol="0" anchor="ctr"/>
+          <a:bodyPr rtlCol="0" anchor="ctr">
+            <a:normAutofit/>
+          </a:bodyPr>
           <a:lstStyle/>
           <a:p>
             <a:pPr algn="ctr">
@@ -8624,7 +8752,9 @@
           </a:fontRef>
         </p:style>
         <p:txBody>
-          <a:bodyPr rtlCol="0" anchor="ctr"/>
+          <a:bodyPr rtlCol="0" anchor="ctr">
+            <a:normAutofit/>
+          </a:bodyPr>
           <a:lstStyle/>
           <a:p>
             <a:pPr algn="ctr">
@@ -8674,7 +8804,9 @@
           </a:fontRef>
         </p:style>
         <p:txBody>
-          <a:bodyPr rtlCol="0" anchor="ctr"/>
+          <a:bodyPr rtlCol="0" anchor="ctr">
+            <a:normAutofit/>
+          </a:bodyPr>
           <a:lstStyle/>
           <a:p>
             <a:pPr algn="ctr">
@@ -8724,7 +8856,9 @@
           </a:fontRef>
         </p:style>
         <p:txBody>
-          <a:bodyPr rtlCol="0" anchor="ctr"/>
+          <a:bodyPr rtlCol="0" anchor="ctr">
+            <a:normAutofit/>
+          </a:bodyPr>
           <a:lstStyle/>
           <a:p>
             <a:pPr algn="ctr">
@@ -8774,7 +8908,9 @@
           </a:fontRef>
         </p:style>
         <p:txBody>
-          <a:bodyPr rtlCol="0" anchor="ctr"/>
+          <a:bodyPr rtlCol="0" anchor="ctr">
+            <a:normAutofit/>
+          </a:bodyPr>
           <a:lstStyle/>
           <a:p>
             <a:pPr algn="ctr">
@@ -8824,7 +8960,9 @@
           </a:fontRef>
         </p:style>
         <p:txBody>
-          <a:bodyPr rtlCol="0" anchor="ctr"/>
+          <a:bodyPr rtlCol="0" anchor="ctr">
+            <a:normAutofit/>
+          </a:bodyPr>
           <a:lstStyle/>
           <a:p>
             <a:pPr algn="ctr">
@@ -8874,7 +9012,9 @@
           </a:fontRef>
         </p:style>
         <p:txBody>
-          <a:bodyPr rtlCol="0" anchor="ctr"/>
+          <a:bodyPr rtlCol="0" anchor="ctr">
+            <a:normAutofit/>
+          </a:bodyPr>
           <a:lstStyle/>
           <a:p>
             <a:pPr algn="ctr">
@@ -8924,7 +9064,9 @@
           </a:fontRef>
         </p:style>
         <p:txBody>
-          <a:bodyPr rtlCol="0" anchor="ctr"/>
+          <a:bodyPr rtlCol="0" anchor="ctr">
+            <a:normAutofit/>
+          </a:bodyPr>
           <a:lstStyle/>
           <a:p>
             <a:pPr algn="ctr"/>
@@ -8949,7 +9091,7 @@
         </p:spPr>
         <p:txBody>
           <a:bodyPr wrap="square">
-            <a:spAutoFit/>
+            <a:normAutofit/>
           </a:bodyPr>
           <a:lstStyle/>
           <a:p>
@@ -8988,7 +9130,7 @@
         </p:spPr>
         <p:txBody>
           <a:bodyPr wrap="square">
-            <a:spAutoFit/>
+            <a:normAutofit/>
           </a:bodyPr>
           <a:lstStyle/>
           <a:p>
@@ -9027,7 +9169,7 @@
         </p:spPr>
         <p:txBody>
           <a:bodyPr wrap="square">
-            <a:spAutoFit/>
+            <a:normAutofit/>
           </a:bodyPr>
           <a:lstStyle/>
           <a:p>
@@ -9066,7 +9208,7 @@
         </p:spPr>
         <p:txBody>
           <a:bodyPr wrap="square">
-            <a:spAutoFit/>
+            <a:normAutofit/>
           </a:bodyPr>
           <a:lstStyle/>
           <a:p>
@@ -9105,7 +9247,7 @@
         </p:spPr>
         <p:txBody>
           <a:bodyPr wrap="square">
-            <a:spAutoFit/>
+            <a:normAutofit/>
           </a:bodyPr>
           <a:lstStyle/>
           <a:p>
@@ -9144,7 +9286,7 @@
         </p:spPr>
         <p:txBody>
           <a:bodyPr wrap="square">
-            <a:spAutoFit/>
+            <a:normAutofit/>
           </a:bodyPr>
           <a:lstStyle/>
           <a:p>
@@ -9183,7 +9325,7 @@
         </p:spPr>
         <p:txBody>
           <a:bodyPr wrap="square">
-            <a:spAutoFit/>
+            <a:normAutofit/>
           </a:bodyPr>
           <a:lstStyle/>
           <a:p>
@@ -9222,7 +9364,7 @@
         </p:spPr>
         <p:txBody>
           <a:bodyPr wrap="square">
-            <a:spAutoFit/>
+            <a:normAutofit/>
           </a:bodyPr>
           <a:lstStyle/>
           <a:p>
@@ -9261,7 +9403,7 @@
         </p:spPr>
         <p:txBody>
           <a:bodyPr wrap="square">
-            <a:spAutoFit/>
+            <a:normAutofit/>
           </a:bodyPr>
           <a:lstStyle/>
           <a:p>
@@ -9352,7 +9494,9 @@
           </a:fontRef>
         </p:style>
         <p:txBody>
-          <a:bodyPr rtlCol="0" anchor="ctr"/>
+          <a:bodyPr rtlCol="0" anchor="ctr">
+            <a:normAutofit/>
+          </a:bodyPr>
           <a:lstStyle/>
           <a:p>
             <a:pPr algn="ctr"/>
@@ -9377,7 +9521,7 @@
         </p:spPr>
         <p:txBody>
           <a:bodyPr wrap="square">
-            <a:spAutoFit/>
+            <a:normAutofit/>
           </a:bodyPr>
           <a:lstStyle/>
           <a:p>
@@ -9416,7 +9560,7 @@
         </p:spPr>
         <p:txBody>
           <a:bodyPr wrap="square">
-            <a:spAutoFit/>
+            <a:normAutofit/>
           </a:bodyPr>
           <a:lstStyle/>
           <a:p>
@@ -9455,7 +9599,7 @@
         </p:spPr>
         <p:txBody>
           <a:bodyPr wrap="square">
-            <a:spAutoFit/>
+            <a:normAutofit/>
           </a:bodyPr>
           <a:lstStyle/>
           <a:p>
@@ -9512,7 +9656,9 @@
           </a:fontRef>
         </p:style>
         <p:txBody>
-          <a:bodyPr rtlCol="0" anchor="ctr"/>
+          <a:bodyPr rtlCol="0" anchor="ctr">
+            <a:normAutofit/>
+          </a:bodyPr>
           <a:lstStyle/>
           <a:p>
             <a:pPr algn="ctr"/>
@@ -9537,7 +9683,7 @@
         </p:spPr>
         <p:txBody>
           <a:bodyPr wrap="square">
-            <a:spAutoFit/>
+            <a:normAutofit/>
           </a:bodyPr>
           <a:lstStyle/>
           <a:p>
@@ -9576,7 +9722,7 @@
         </p:spPr>
         <p:txBody>
           <a:bodyPr wrap="square">
-            <a:spAutoFit/>
+            <a:normAutofit/>
           </a:bodyPr>
           <a:lstStyle/>
           <a:p>
@@ -9615,7 +9761,7 @@
         </p:spPr>
         <p:txBody>
           <a:bodyPr wrap="square">
-            <a:spAutoFit/>
+            <a:normAutofit/>
           </a:bodyPr>
           <a:lstStyle/>
           <a:p>
@@ -9672,7 +9818,9 @@
           </a:fontRef>
         </p:style>
         <p:txBody>
-          <a:bodyPr rtlCol="0" anchor="ctr"/>
+          <a:bodyPr rtlCol="0" anchor="ctr">
+            <a:normAutofit/>
+          </a:bodyPr>
           <a:lstStyle/>
           <a:p>
             <a:pPr algn="ctr"/>
@@ -9697,7 +9845,7 @@
         </p:spPr>
         <p:txBody>
           <a:bodyPr wrap="square">
-            <a:spAutoFit/>
+            <a:normAutofit/>
           </a:bodyPr>
           <a:lstStyle/>
           <a:p>
@@ -9736,7 +9884,7 @@
         </p:spPr>
         <p:txBody>
           <a:bodyPr wrap="square">
-            <a:spAutoFit/>
+            <a:normAutofit/>
           </a:bodyPr>
           <a:lstStyle/>
           <a:p>
@@ -9775,7 +9923,7 @@
         </p:spPr>
         <p:txBody>
           <a:bodyPr wrap="square">
-            <a:spAutoFit/>
+            <a:normAutofit/>
           </a:bodyPr>
           <a:lstStyle/>
           <a:p>
@@ -9832,7 +9980,9 @@
           </a:fontRef>
         </p:style>
         <p:txBody>
-          <a:bodyPr rtlCol="0" anchor="ctr"/>
+          <a:bodyPr rtlCol="0" anchor="ctr">
+            <a:normAutofit/>
+          </a:bodyPr>
           <a:lstStyle/>
           <a:p>
             <a:pPr algn="ctr"/>
@@ -9857,7 +10007,7 @@
         </p:spPr>
         <p:txBody>
           <a:bodyPr wrap="square">
-            <a:spAutoFit/>
+            <a:normAutofit/>
           </a:bodyPr>
           <a:lstStyle/>
           <a:p>
@@ -9896,7 +10046,7 @@
         </p:spPr>
         <p:txBody>
           <a:bodyPr wrap="square">
-            <a:spAutoFit/>
+            <a:normAutofit/>
           </a:bodyPr>
           <a:lstStyle/>
           <a:p>
@@ -9935,7 +10085,7 @@
         </p:spPr>
         <p:txBody>
           <a:bodyPr wrap="square">
-            <a:spAutoFit/>
+            <a:normAutofit/>
           </a:bodyPr>
           <a:lstStyle/>
           <a:p>
@@ -9992,7 +10142,9 @@
           </a:fontRef>
         </p:style>
         <p:txBody>
-          <a:bodyPr rtlCol="0" anchor="ctr"/>
+          <a:bodyPr rtlCol="0" anchor="ctr">
+            <a:normAutofit/>
+          </a:bodyPr>
           <a:lstStyle/>
           <a:p>
             <a:pPr algn="ctr"/>
@@ -10017,7 +10169,7 @@
         </p:spPr>
         <p:txBody>
           <a:bodyPr wrap="square">
-            <a:spAutoFit/>
+            <a:normAutofit/>
           </a:bodyPr>
           <a:lstStyle/>
           <a:p>
@@ -10056,7 +10208,7 @@
         </p:spPr>
         <p:txBody>
           <a:bodyPr wrap="square">
-            <a:spAutoFit/>
+            <a:normAutofit/>
           </a:bodyPr>
           <a:lstStyle/>
           <a:p>
@@ -10095,7 +10247,7 @@
         </p:spPr>
         <p:txBody>
           <a:bodyPr wrap="square">
-            <a:spAutoFit/>
+            <a:normAutofit/>
           </a:bodyPr>
           <a:lstStyle/>
           <a:p>
@@ -10134,7 +10286,7 @@
         </p:spPr>
         <p:txBody>
           <a:bodyPr wrap="square">
-            <a:spAutoFit/>
+            <a:normAutofit/>
           </a:bodyPr>
           <a:lstStyle/>
           <a:p>
@@ -10173,7 +10325,7 @@
         </p:spPr>
         <p:txBody>
           <a:bodyPr wrap="square">
-            <a:spAutoFit/>
+            <a:normAutofit/>
           </a:bodyPr>
           <a:lstStyle/>
           <a:p>
@@ -10212,7 +10364,7 @@
         </p:spPr>
         <p:txBody>
           <a:bodyPr wrap="square">
-            <a:spAutoFit/>
+            <a:normAutofit/>
           </a:bodyPr>
           <a:lstStyle/>
           <a:p>
@@ -10251,7 +10403,7 @@
         </p:spPr>
         <p:txBody>
           <a:bodyPr wrap="square">
-            <a:spAutoFit/>
+            <a:normAutofit/>
           </a:bodyPr>
           <a:lstStyle/>
           <a:p>
@@ -10290,7 +10442,7 @@
         </p:spPr>
         <p:txBody>
           <a:bodyPr wrap="square">
-            <a:spAutoFit/>
+            <a:normAutofit/>
           </a:bodyPr>
           <a:lstStyle/>
           <a:p>
@@ -10329,7 +10481,7 @@
         </p:spPr>
         <p:txBody>
           <a:bodyPr wrap="square">
-            <a:spAutoFit/>
+            <a:normAutofit/>
           </a:bodyPr>
           <a:lstStyle/>
           <a:p>
@@ -10368,7 +10520,7 @@
         </p:spPr>
         <p:txBody>
           <a:bodyPr wrap="square">
-            <a:spAutoFit/>
+            <a:normAutofit/>
           </a:bodyPr>
           <a:lstStyle/>
           <a:p>
@@ -10407,7 +10559,7 @@
         </p:spPr>
         <p:txBody>
           <a:bodyPr wrap="square">
-            <a:spAutoFit/>
+            <a:normAutofit/>
           </a:bodyPr>
           <a:lstStyle/>
           <a:p>
@@ -10446,7 +10598,7 @@
         </p:spPr>
         <p:txBody>
           <a:bodyPr wrap="square">
-            <a:spAutoFit/>
+            <a:normAutofit/>
           </a:bodyPr>
           <a:lstStyle/>
           <a:p>
@@ -10485,7 +10637,7 @@
         </p:spPr>
         <p:txBody>
           <a:bodyPr wrap="square">
-            <a:spAutoFit/>
+            <a:normAutofit/>
           </a:bodyPr>
           <a:lstStyle/>
           <a:p>
@@ -10524,7 +10676,7 @@
         </p:spPr>
         <p:txBody>
           <a:bodyPr wrap="square">
-            <a:spAutoFit/>
+            <a:normAutofit/>
           </a:bodyPr>
           <a:lstStyle/>
           <a:p>
@@ -10563,7 +10715,7 @@
         </p:spPr>
         <p:txBody>
           <a:bodyPr wrap="square">
-            <a:spAutoFit/>
+            <a:normAutofit/>
           </a:bodyPr>
           <a:lstStyle/>
           <a:p>
@@ -10602,7 +10754,7 @@
         </p:spPr>
         <p:txBody>
           <a:bodyPr wrap="square">
-            <a:spAutoFit/>
+            <a:normAutofit/>
           </a:bodyPr>
           <a:lstStyle/>
           <a:p>
@@ -10661,7 +10813,9 @@
           </a:fontRef>
         </p:style>
         <p:txBody>
-          <a:bodyPr rtlCol="0" anchor="ctr"/>
+          <a:bodyPr rtlCol="0" anchor="ctr">
+            <a:normAutofit/>
+          </a:bodyPr>
           <a:lstStyle/>
           <a:p>
             <a:pPr algn="ctr"/>
@@ -10686,7 +10840,7 @@
         </p:spPr>
         <p:txBody>
           <a:bodyPr wrap="square">
-            <a:spAutoFit/>
+            <a:normAutofit/>
           </a:bodyPr>
           <a:lstStyle/>
           <a:p>
@@ -10743,7 +10897,9 @@
           </a:fontRef>
         </p:style>
         <p:txBody>
-          <a:bodyPr rtlCol="0" anchor="ctr" wrap="square" lIns="177800" tIns="127000" rIns="177800" bIns="127000"/>
+          <a:bodyPr rtlCol="0" anchor="ctr" wrap="square" lIns="177800" tIns="127000" rIns="177800" bIns="127000">
+            <a:normAutofit/>
+          </a:bodyPr>
           <a:lstStyle/>
           <a:p>
             <a:pPr algn="ctr">
@@ -11096,7 +11252,9 @@
           </a:fontRef>
         </p:style>
         <p:txBody>
-          <a:bodyPr rtlCol="0" anchor="ctr"/>
+          <a:bodyPr rtlCol="0" anchor="ctr">
+            <a:normAutofit/>
+          </a:bodyPr>
           <a:lstStyle/>
           <a:p>
             <a:pPr algn="ctr"/>
@@ -11121,7 +11279,7 @@
         </p:spPr>
         <p:txBody>
           <a:bodyPr wrap="square">
-            <a:spAutoFit/>
+            <a:normAutofit/>
           </a:bodyPr>
           <a:lstStyle/>
           <a:p>
@@ -11160,7 +11318,7 @@
         </p:spPr>
         <p:txBody>
           <a:bodyPr wrap="square">
-            <a:spAutoFit/>
+            <a:normAutofit/>
           </a:bodyPr>
           <a:lstStyle/>
           <a:p>
@@ -11217,7 +11375,9 @@
           </a:fontRef>
         </p:style>
         <p:txBody>
-          <a:bodyPr rtlCol="0" anchor="ctr" lIns="127000"/>
+          <a:bodyPr rtlCol="0" anchor="ctr" lIns="127000">
+            <a:normAutofit/>
+          </a:bodyPr>
           <a:lstStyle/>
           <a:p>
             <a:pPr algn="ctr"/>
@@ -11278,7 +11438,9 @@
           </a:fontRef>
         </p:style>
         <p:txBody>
-          <a:bodyPr rtlCol="0" anchor="ctr" lIns="127000"/>
+          <a:bodyPr rtlCol="0" anchor="ctr" lIns="127000">
+            <a:normAutofit/>
+          </a:bodyPr>
           <a:lstStyle/>
           <a:p>
             <a:pPr algn="ctr"/>
@@ -11339,7 +11501,9 @@
           </a:fontRef>
         </p:style>
         <p:txBody>
-          <a:bodyPr rtlCol="0" anchor="ctr" lIns="127000"/>
+          <a:bodyPr rtlCol="0" anchor="ctr" lIns="127000">
+            <a:normAutofit/>
+          </a:bodyPr>
           <a:lstStyle/>
           <a:p>
             <a:pPr algn="ctr"/>
@@ -11400,7 +11564,9 @@
           </a:fontRef>
         </p:style>
         <p:txBody>
-          <a:bodyPr rtlCol="0" anchor="ctr" lIns="127000"/>
+          <a:bodyPr rtlCol="0" anchor="ctr" lIns="127000">
+            <a:normAutofit/>
+          </a:bodyPr>
           <a:lstStyle/>
           <a:p>
             <a:pPr algn="ctr"/>
@@ -11443,7 +11609,7 @@
         </p:spPr>
         <p:txBody>
           <a:bodyPr wrap="square">
-            <a:spAutoFit/>
+            <a:normAutofit/>
           </a:bodyPr>
           <a:lstStyle/>
           <a:p>
@@ -11500,7 +11666,9 @@
           </a:fontRef>
         </p:style>
         <p:txBody>
-          <a:bodyPr rtlCol="0" anchor="ctr" lIns="127000"/>
+          <a:bodyPr rtlCol="0" anchor="ctr" lIns="127000">
+            <a:normAutofit/>
+          </a:bodyPr>
           <a:lstStyle/>
           <a:p>
             <a:pPr algn="ctr"/>
@@ -11561,7 +11729,9 @@
           </a:fontRef>
         </p:style>
         <p:txBody>
-          <a:bodyPr rtlCol="0" anchor="ctr" lIns="127000"/>
+          <a:bodyPr rtlCol="0" anchor="ctr" lIns="127000">
+            <a:normAutofit/>
+          </a:bodyPr>
           <a:lstStyle/>
           <a:p>
             <a:pPr algn="ctr"/>
@@ -11622,7 +11792,9 @@
           </a:fontRef>
         </p:style>
         <p:txBody>
-          <a:bodyPr rtlCol="0" anchor="ctr" lIns="127000"/>
+          <a:bodyPr rtlCol="0" anchor="ctr" lIns="127000">
+            <a:normAutofit/>
+          </a:bodyPr>
           <a:lstStyle/>
           <a:p>
             <a:pPr algn="ctr"/>
@@ -11683,7 +11855,9 @@
           </a:fontRef>
         </p:style>
         <p:txBody>
-          <a:bodyPr rtlCol="0" anchor="ctr" lIns="127000"/>
+          <a:bodyPr rtlCol="0" anchor="ctr" lIns="127000">
+            <a:normAutofit/>
+          </a:bodyPr>
           <a:lstStyle/>
           <a:p>
             <a:pPr algn="ctr"/>
@@ -11726,7 +11900,7 @@
         </p:spPr>
         <p:txBody>
           <a:bodyPr wrap="square">
-            <a:spAutoFit/>
+            <a:normAutofit/>
           </a:bodyPr>
           <a:lstStyle/>
           <a:p>
@@ -11783,7 +11957,9 @@
           </a:fontRef>
         </p:style>
         <p:txBody>
-          <a:bodyPr rtlCol="0" anchor="ctr" lIns="127000"/>
+          <a:bodyPr rtlCol="0" anchor="ctr" lIns="127000">
+            <a:normAutofit/>
+          </a:bodyPr>
           <a:lstStyle/>
           <a:p>
             <a:pPr algn="ctr"/>
@@ -11844,7 +12020,9 @@
           </a:fontRef>
         </p:style>
         <p:txBody>
-          <a:bodyPr rtlCol="0" anchor="ctr" lIns="127000"/>
+          <a:bodyPr rtlCol="0" anchor="ctr" lIns="127000">
+            <a:normAutofit/>
+          </a:bodyPr>
           <a:lstStyle/>
           <a:p>
             <a:pPr algn="ctr"/>
@@ -11905,7 +12083,9 @@
           </a:fontRef>
         </p:style>
         <p:txBody>
-          <a:bodyPr rtlCol="0" anchor="ctr" lIns="127000"/>
+          <a:bodyPr rtlCol="0" anchor="ctr" lIns="127000">
+            <a:normAutofit/>
+          </a:bodyPr>
           <a:lstStyle/>
           <a:p>
             <a:pPr algn="ctr"/>
@@ -11966,7 +12146,9 @@
           </a:fontRef>
         </p:style>
         <p:txBody>
-          <a:bodyPr rtlCol="0" anchor="ctr" lIns="127000"/>
+          <a:bodyPr rtlCol="0" anchor="ctr" lIns="127000">
+            <a:normAutofit/>
+          </a:bodyPr>
           <a:lstStyle/>
           <a:p>
             <a:pPr algn="ctr"/>
@@ -12009,7 +12191,7 @@
         </p:spPr>
         <p:txBody>
           <a:bodyPr wrap="square">
-            <a:spAutoFit/>
+            <a:normAutofit/>
           </a:bodyPr>
           <a:lstStyle/>
           <a:p>
@@ -12066,7 +12248,9 @@
           </a:fontRef>
         </p:style>
         <p:txBody>
-          <a:bodyPr rtlCol="0" anchor="ctr" lIns="127000"/>
+          <a:bodyPr rtlCol="0" anchor="ctr" lIns="127000">
+            <a:normAutofit/>
+          </a:bodyPr>
           <a:lstStyle/>
           <a:p>
             <a:pPr algn="ctr"/>
@@ -12127,7 +12311,9 @@
           </a:fontRef>
         </p:style>
         <p:txBody>
-          <a:bodyPr rtlCol="0" anchor="ctr" lIns="127000"/>
+          <a:bodyPr rtlCol="0" anchor="ctr" lIns="127000">
+            <a:normAutofit/>
+          </a:bodyPr>
           <a:lstStyle/>
           <a:p>
             <a:pPr algn="ctr"/>
@@ -12188,7 +12374,9 @@
           </a:fontRef>
         </p:style>
         <p:txBody>
-          <a:bodyPr rtlCol="0" anchor="ctr" lIns="127000"/>
+          <a:bodyPr rtlCol="0" anchor="ctr" lIns="127000">
+            <a:normAutofit/>
+          </a:bodyPr>
           <a:lstStyle/>
           <a:p>
             <a:pPr algn="ctr"/>
@@ -12249,7 +12437,9 @@
           </a:fontRef>
         </p:style>
         <p:txBody>
-          <a:bodyPr rtlCol="0" anchor="ctr" lIns="127000"/>
+          <a:bodyPr rtlCol="0" anchor="ctr" lIns="127000">
+            <a:normAutofit/>
+          </a:bodyPr>
           <a:lstStyle/>
           <a:p>
             <a:pPr algn="ctr"/>
@@ -12328,7 +12518,9 @@
           </a:fontRef>
         </p:style>
         <p:txBody>
-          <a:bodyPr rtlCol="0" anchor="ctr"/>
+          <a:bodyPr rtlCol="0" anchor="ctr">
+            <a:normAutofit/>
+          </a:bodyPr>
           <a:lstStyle/>
           <a:p>
             <a:pPr algn="ctr"/>
@@ -12353,7 +12545,7 @@
         </p:spPr>
         <p:txBody>
           <a:bodyPr wrap="square">
-            <a:spAutoFit/>
+            <a:normAutofit/>
           </a:bodyPr>
           <a:lstStyle/>
           <a:p>
@@ -12410,7 +12602,9 @@
           </a:fontRef>
         </p:style>
         <p:txBody>
-          <a:bodyPr rtlCol="0" anchor="ctr"/>
+          <a:bodyPr rtlCol="0" anchor="ctr">
+            <a:normAutofit/>
+          </a:bodyPr>
           <a:lstStyle/>
           <a:p>
             <a:pPr algn="ctr"/>
@@ -12435,7 +12629,7 @@
         </p:spPr>
         <p:txBody>
           <a:bodyPr wrap="square">
-            <a:spAutoFit/>
+            <a:normAutofit/>
           </a:bodyPr>
           <a:lstStyle/>
           <a:p>
@@ -12474,7 +12668,7 @@
         </p:spPr>
         <p:txBody>
           <a:bodyPr wrap="square">
-            <a:spAutoFit/>
+            <a:normAutofit/>
           </a:bodyPr>
           <a:lstStyle/>
           <a:p>
@@ -12531,7 +12725,9 @@
           </a:fontRef>
         </p:style>
         <p:txBody>
-          <a:bodyPr rtlCol="0" anchor="ctr"/>
+          <a:bodyPr rtlCol="0" anchor="ctr">
+            <a:normAutofit/>
+          </a:bodyPr>
           <a:lstStyle/>
           <a:p>
             <a:pPr algn="ctr"/>
@@ -12556,7 +12752,7 @@
         </p:spPr>
         <p:txBody>
           <a:bodyPr wrap="square">
-            <a:spAutoFit/>
+            <a:normAutofit/>
           </a:bodyPr>
           <a:lstStyle/>
           <a:p>
@@ -12595,7 +12791,7 @@
         </p:spPr>
         <p:txBody>
           <a:bodyPr wrap="square">
-            <a:spAutoFit/>
+            <a:normAutofit/>
           </a:bodyPr>
           <a:lstStyle/>
           <a:p>
@@ -12652,7 +12848,9 @@
           </a:fontRef>
         </p:style>
         <p:txBody>
-          <a:bodyPr rtlCol="0" anchor="ctr"/>
+          <a:bodyPr rtlCol="0" anchor="ctr">
+            <a:normAutofit/>
+          </a:bodyPr>
           <a:lstStyle/>
           <a:p>
             <a:pPr algn="ctr"/>
@@ -12677,7 +12875,7 @@
         </p:spPr>
         <p:txBody>
           <a:bodyPr wrap="square">
-            <a:spAutoFit/>
+            <a:normAutofit/>
           </a:bodyPr>
           <a:lstStyle/>
           <a:p>
@@ -12716,7 +12914,7 @@
         </p:spPr>
         <p:txBody>
           <a:bodyPr wrap="square">
-            <a:spAutoFit/>
+            <a:normAutofit/>
           </a:bodyPr>
           <a:lstStyle/>
           <a:p>
@@ -12755,7 +12953,7 @@
         </p:spPr>
         <p:txBody>
           <a:bodyPr wrap="square">
-            <a:spAutoFit/>
+            <a:normAutofit/>
           </a:bodyPr>
           <a:lstStyle/>
           <a:p>
@@ -12794,7 +12992,7 @@
         </p:spPr>
         <p:txBody>
           <a:bodyPr wrap="square">
-            <a:spAutoFit/>
+            <a:normAutofit/>
           </a:bodyPr>
           <a:lstStyle/>
           <a:p>
@@ -12869,7 +13067,9 @@
           </a:fontRef>
         </p:style>
         <p:txBody>
-          <a:bodyPr rtlCol="0" anchor="ctr"/>
+          <a:bodyPr rtlCol="0" anchor="ctr">
+            <a:normAutofit/>
+          </a:bodyPr>
           <a:lstStyle/>
           <a:p>
             <a:pPr algn="ctr"/>
@@ -12894,7 +13094,7 @@
         </p:spPr>
         <p:txBody>
           <a:bodyPr wrap="square">
-            <a:spAutoFit/>
+            <a:normAutofit/>
           </a:bodyPr>
           <a:lstStyle/>
           <a:p>
@@ -12953,7 +13153,9 @@
           </a:fontRef>
         </p:style>
         <p:txBody>
-          <a:bodyPr rtlCol="0" anchor="ctr"/>
+          <a:bodyPr rtlCol="0" anchor="ctr">
+            <a:normAutofit/>
+          </a:bodyPr>
           <a:lstStyle/>
           <a:p>
             <a:pPr algn="ctr"/>
@@ -12996,7 +13198,9 @@
           </a:fontRef>
         </p:style>
         <p:txBody>
-          <a:bodyPr rtlCol="0" anchor="ctr" wrap="square"/>
+          <a:bodyPr rtlCol="0" anchor="ctr" wrap="square">
+            <a:normAutofit/>
+          </a:bodyPr>
           <a:lstStyle/>
           <a:p>
             <a:pPr algn="ctr">
@@ -13034,7 +13238,7 @@
         </p:spPr>
         <p:txBody>
           <a:bodyPr wrap="square">
-            <a:spAutoFit/>
+            <a:normAutofit/>
           </a:bodyPr>
           <a:lstStyle/>
           <a:p>
@@ -13089,7 +13293,7 @@
         </p:spPr>
         <p:txBody>
           <a:bodyPr wrap="square">
-            <a:spAutoFit/>
+            <a:normAutofit/>
           </a:bodyPr>
           <a:lstStyle/>
           <a:p>
@@ -13148,7 +13352,9 @@
           </a:fontRef>
         </p:style>
         <p:txBody>
-          <a:bodyPr rtlCol="0" anchor="ctr"/>
+          <a:bodyPr rtlCol="0" anchor="ctr">
+            <a:normAutofit/>
+          </a:bodyPr>
           <a:lstStyle/>
           <a:p>
             <a:pPr algn="ctr"/>
@@ -13191,7 +13397,9 @@
           </a:fontRef>
         </p:style>
         <p:txBody>
-          <a:bodyPr rtlCol="0" anchor="ctr" wrap="square"/>
+          <a:bodyPr rtlCol="0" anchor="ctr" wrap="square">
+            <a:normAutofit/>
+          </a:bodyPr>
           <a:lstStyle/>
           <a:p>
             <a:pPr algn="ctr">
@@ -13229,7 +13437,7 @@
         </p:spPr>
         <p:txBody>
           <a:bodyPr wrap="square">
-            <a:spAutoFit/>
+            <a:normAutofit/>
           </a:bodyPr>
           <a:lstStyle/>
           <a:p>
@@ -13284,7 +13492,7 @@
         </p:spPr>
         <p:txBody>
           <a:bodyPr wrap="square">
-            <a:spAutoFit/>
+            <a:normAutofit/>
           </a:bodyPr>
           <a:lstStyle/>
           <a:p>
@@ -13343,7 +13551,9 @@
           </a:fontRef>
         </p:style>
         <p:txBody>
-          <a:bodyPr rtlCol="0" anchor="ctr"/>
+          <a:bodyPr rtlCol="0" anchor="ctr">
+            <a:normAutofit/>
+          </a:bodyPr>
           <a:lstStyle/>
           <a:p>
             <a:pPr algn="ctr"/>
@@ -13386,7 +13596,9 @@
           </a:fontRef>
         </p:style>
         <p:txBody>
-          <a:bodyPr rtlCol="0" anchor="ctr" wrap="square"/>
+          <a:bodyPr rtlCol="0" anchor="ctr" wrap="square">
+            <a:normAutofit/>
+          </a:bodyPr>
           <a:lstStyle/>
           <a:p>
             <a:pPr algn="ctr">
@@ -13424,7 +13636,7 @@
         </p:spPr>
         <p:txBody>
           <a:bodyPr wrap="square">
-            <a:spAutoFit/>
+            <a:normAutofit/>
           </a:bodyPr>
           <a:lstStyle/>
           <a:p>
@@ -13479,7 +13691,7 @@
         </p:spPr>
         <p:txBody>
           <a:bodyPr wrap="square">
-            <a:spAutoFit/>
+            <a:normAutofit/>
           </a:bodyPr>
           <a:lstStyle/>
           <a:p>
@@ -13538,7 +13750,9 @@
           </a:fontRef>
         </p:style>
         <p:txBody>
-          <a:bodyPr rtlCol="0" anchor="ctr"/>
+          <a:bodyPr rtlCol="0" anchor="ctr">
+            <a:normAutofit/>
+          </a:bodyPr>
           <a:lstStyle/>
           <a:p>
             <a:pPr algn="ctr"/>
@@ -13581,7 +13795,9 @@
           </a:fontRef>
         </p:style>
         <p:txBody>
-          <a:bodyPr rtlCol="0" anchor="ctr" wrap="square"/>
+          <a:bodyPr rtlCol="0" anchor="ctr" wrap="square">
+            <a:normAutofit/>
+          </a:bodyPr>
           <a:lstStyle/>
           <a:p>
             <a:pPr algn="ctr">
@@ -13619,7 +13835,7 @@
         </p:spPr>
         <p:txBody>
           <a:bodyPr wrap="square">
-            <a:spAutoFit/>
+            <a:normAutofit/>
           </a:bodyPr>
           <a:lstStyle/>
           <a:p>
@@ -13710,7 +13926,9 @@
           </a:fontRef>
         </p:style>
         <p:txBody>
-          <a:bodyPr rtlCol="0" anchor="ctr"/>
+          <a:bodyPr rtlCol="0" anchor="ctr">
+            <a:normAutofit/>
+          </a:bodyPr>
           <a:lstStyle/>
           <a:p>
             <a:pPr algn="ctr"/>
@@ -13735,7 +13953,7 @@
         </p:spPr>
         <p:txBody>
           <a:bodyPr wrap="square">
-            <a:spAutoFit/>
+            <a:normAutofit/>
           </a:bodyPr>
           <a:lstStyle/>
           <a:p>
@@ -13774,7 +13992,7 @@
         </p:spPr>
         <p:txBody>
           <a:bodyPr wrap="square">
-            <a:spAutoFit/>
+            <a:normAutofit/>
           </a:bodyPr>
           <a:lstStyle/>
           <a:p>
@@ -13813,7 +14031,7 @@
         </p:spPr>
         <p:txBody>
           <a:bodyPr wrap="square">
-            <a:spAutoFit/>
+            <a:normAutofit/>
           </a:bodyPr>
           <a:lstStyle/>
           <a:p>
@@ -13870,7 +14088,9 @@
           </a:fontRef>
         </p:style>
         <p:txBody>
-          <a:bodyPr rtlCol="0" anchor="ctr" wrap="square" lIns="177800" tIns="127000" rIns="177800" bIns="127000"/>
+          <a:bodyPr rtlCol="0" anchor="ctr" wrap="square" lIns="177800" tIns="127000" rIns="177800" bIns="127000">
+            <a:normAutofit/>
+          </a:bodyPr>
           <a:lstStyle/>
           <a:p>
             <a:pPr algn="ctr">
@@ -14020,7 +14240,7 @@
         </p:spPr>
         <p:txBody>
           <a:bodyPr wrap="square">
-            <a:spAutoFit/>
+            <a:normAutofit/>
           </a:bodyPr>
           <a:lstStyle/>
           <a:p>
@@ -14079,7 +14299,9 @@
           </a:fontRef>
         </p:style>
         <p:txBody>
-          <a:bodyPr rtlCol="0" anchor="ctr"/>
+          <a:bodyPr rtlCol="0" anchor="ctr">
+            <a:normAutofit/>
+          </a:bodyPr>
           <a:lstStyle/>
           <a:p>
             <a:pPr algn="ctr"/>
@@ -14104,7 +14326,7 @@
         </p:spPr>
         <p:txBody>
           <a:bodyPr wrap="square">
-            <a:spAutoFit/>
+            <a:normAutofit/>
           </a:bodyPr>
           <a:lstStyle/>
           <a:p>
@@ -14163,7 +14385,9 @@
           </a:fontRef>
         </p:style>
         <p:txBody>
-          <a:bodyPr rtlCol="0" anchor="ctr"/>
+          <a:bodyPr rtlCol="0" anchor="ctr">
+            <a:normAutofit/>
+          </a:bodyPr>
           <a:lstStyle/>
           <a:p>
             <a:pPr algn="ctr"/>
@@ -14188,7 +14412,7 @@
         </p:spPr>
         <p:txBody>
           <a:bodyPr wrap="square">
-            <a:spAutoFit/>
+            <a:normAutofit/>
           </a:bodyPr>
           <a:lstStyle/>
           <a:p>
@@ -14247,7 +14471,9 @@
           </a:fontRef>
         </p:style>
         <p:txBody>
-          <a:bodyPr rtlCol="0" anchor="ctr"/>
+          <a:bodyPr rtlCol="0" anchor="ctr">
+            <a:normAutofit/>
+          </a:bodyPr>
           <a:lstStyle/>
           <a:p>
             <a:pPr algn="ctr"/>
@@ -14272,7 +14498,7 @@
         </p:spPr>
         <p:txBody>
           <a:bodyPr wrap="square">
-            <a:spAutoFit/>
+            <a:normAutofit/>
           </a:bodyPr>
           <a:lstStyle/>
           <a:p>
@@ -14331,7 +14557,9 @@
           </a:fontRef>
         </p:style>
         <p:txBody>
-          <a:bodyPr rtlCol="0" anchor="ctr"/>
+          <a:bodyPr rtlCol="0" anchor="ctr">
+            <a:normAutofit/>
+          </a:bodyPr>
           <a:lstStyle/>
           <a:p>
             <a:pPr algn="ctr"/>
@@ -14356,7 +14584,7 @@
         </p:spPr>
         <p:txBody>
           <a:bodyPr wrap="square">
-            <a:spAutoFit/>
+            <a:normAutofit/>
           </a:bodyPr>
           <a:lstStyle/>
           <a:p>
@@ -14415,7 +14643,9 @@
           </a:fontRef>
         </p:style>
         <p:txBody>
-          <a:bodyPr rtlCol="0" anchor="ctr"/>
+          <a:bodyPr rtlCol="0" anchor="ctr">
+            <a:normAutofit/>
+          </a:bodyPr>
           <a:lstStyle/>
           <a:p>
             <a:pPr algn="ctr"/>
@@ -14440,7 +14670,7 @@
         </p:spPr>
         <p:txBody>
           <a:bodyPr wrap="square">
-            <a:spAutoFit/>
+            <a:normAutofit/>
           </a:bodyPr>
           <a:lstStyle/>
           <a:p>
@@ -14499,7 +14729,9 @@
           </a:fontRef>
         </p:style>
         <p:txBody>
-          <a:bodyPr rtlCol="0" anchor="ctr"/>
+          <a:bodyPr rtlCol="0" anchor="ctr">
+            <a:normAutofit/>
+          </a:bodyPr>
           <a:lstStyle/>
           <a:p>
             <a:pPr algn="ctr"/>
@@ -14524,7 +14756,7 @@
         </p:spPr>
         <p:txBody>
           <a:bodyPr wrap="square">
-            <a:spAutoFit/>
+            <a:normAutofit/>
           </a:bodyPr>
           <a:lstStyle/>
           <a:p>
@@ -14599,7 +14831,9 @@
           </a:fontRef>
         </p:style>
         <p:txBody>
-          <a:bodyPr rtlCol="0" anchor="ctr"/>
+          <a:bodyPr rtlCol="0" anchor="ctr">
+            <a:normAutofit/>
+          </a:bodyPr>
           <a:lstStyle/>
           <a:p>
             <a:pPr algn="ctr"/>
@@ -14624,7 +14858,7 @@
         </p:spPr>
         <p:txBody>
           <a:bodyPr wrap="square">
-            <a:spAutoFit/>
+            <a:normAutofit/>
           </a:bodyPr>
           <a:lstStyle/>
           <a:p>
@@ -14663,7 +14897,7 @@
         </p:spPr>
         <p:txBody>
           <a:bodyPr wrap="square">
-            <a:spAutoFit/>
+            <a:normAutofit/>
           </a:bodyPr>
           <a:lstStyle/>
           <a:p>
@@ -14702,7 +14936,7 @@
         </p:spPr>
         <p:txBody>
           <a:bodyPr wrap="square">
-            <a:spAutoFit/>
+            <a:normAutofit/>
           </a:bodyPr>
           <a:lstStyle/>
           <a:p>
@@ -14759,7 +14993,9 @@
           </a:fontRef>
         </p:style>
         <p:txBody>
-          <a:bodyPr rtlCol="0" anchor="ctr" wrap="square" lIns="177800" tIns="127000" rIns="177800" bIns="127000"/>
+          <a:bodyPr rtlCol="0" anchor="ctr" wrap="square" lIns="177800" tIns="127000" rIns="177800" bIns="127000">
+            <a:normAutofit/>
+          </a:bodyPr>
           <a:lstStyle/>
           <a:p>
             <a:pPr algn="ctr">
@@ -14941,7 +15177,7 @@
         </p:spPr>
         <p:txBody>
           <a:bodyPr wrap="square">
-            <a:spAutoFit/>
+            <a:normAutofit/>
           </a:bodyPr>
           <a:lstStyle/>
           <a:p>
@@ -15000,7 +15236,9 @@
           </a:fontRef>
         </p:style>
         <p:txBody>
-          <a:bodyPr rtlCol="0" anchor="ctr"/>
+          <a:bodyPr rtlCol="0" anchor="ctr">
+            <a:normAutofit/>
+          </a:bodyPr>
           <a:lstStyle/>
           <a:p>
             <a:pPr algn="ctr"/>
@@ -15025,7 +15263,7 @@
         </p:spPr>
         <p:txBody>
           <a:bodyPr wrap="square">
-            <a:spAutoFit/>
+            <a:normAutofit/>
           </a:bodyPr>
           <a:lstStyle/>
           <a:p>
@@ -15084,7 +15322,9 @@
           </a:fontRef>
         </p:style>
         <p:txBody>
-          <a:bodyPr rtlCol="0" anchor="ctr"/>
+          <a:bodyPr rtlCol="0" anchor="ctr">
+            <a:normAutofit/>
+          </a:bodyPr>
           <a:lstStyle/>
           <a:p>
             <a:pPr algn="ctr"/>
@@ -15109,7 +15349,7 @@
         </p:spPr>
         <p:txBody>
           <a:bodyPr wrap="square">
-            <a:spAutoFit/>
+            <a:normAutofit/>
           </a:bodyPr>
           <a:lstStyle/>
           <a:p>
@@ -15168,7 +15408,9 @@
           </a:fontRef>
         </p:style>
         <p:txBody>
-          <a:bodyPr rtlCol="0" anchor="ctr"/>
+          <a:bodyPr rtlCol="0" anchor="ctr">
+            <a:normAutofit/>
+          </a:bodyPr>
           <a:lstStyle/>
           <a:p>
             <a:pPr algn="ctr"/>
@@ -15193,7 +15435,7 @@
         </p:spPr>
         <p:txBody>
           <a:bodyPr wrap="square">
-            <a:spAutoFit/>
+            <a:normAutofit/>
           </a:bodyPr>
           <a:lstStyle/>
           <a:p>
@@ -15252,7 +15494,9 @@
           </a:fontRef>
         </p:style>
         <p:txBody>
-          <a:bodyPr rtlCol="0" anchor="ctr"/>
+          <a:bodyPr rtlCol="0" anchor="ctr">
+            <a:normAutofit/>
+          </a:bodyPr>
           <a:lstStyle/>
           <a:p>
             <a:pPr algn="ctr"/>
@@ -15277,7 +15521,7 @@
         </p:spPr>
         <p:txBody>
           <a:bodyPr wrap="square">
-            <a:spAutoFit/>
+            <a:normAutofit/>
           </a:bodyPr>
           <a:lstStyle/>
           <a:p>
@@ -15336,7 +15580,9 @@
           </a:fontRef>
         </p:style>
         <p:txBody>
-          <a:bodyPr rtlCol="0" anchor="ctr"/>
+          <a:bodyPr rtlCol="0" anchor="ctr">
+            <a:normAutofit/>
+          </a:bodyPr>
           <a:lstStyle/>
           <a:p>
             <a:pPr algn="ctr"/>
@@ -15361,7 +15607,7 @@
         </p:spPr>
         <p:txBody>
           <a:bodyPr wrap="square">
-            <a:spAutoFit/>
+            <a:normAutofit/>
           </a:bodyPr>
           <a:lstStyle/>
           <a:p>
@@ -15418,7 +15664,9 @@
           </a:fontRef>
         </p:style>
         <p:txBody>
-          <a:bodyPr rtlCol="0" anchor="ctr" wrap="square" lIns="177800" tIns="127000" rIns="177800" bIns="127000"/>
+          <a:bodyPr rtlCol="0" anchor="ctr" wrap="square" lIns="177800" tIns="127000" rIns="177800" bIns="127000">
+            <a:normAutofit/>
+          </a:bodyPr>
           <a:lstStyle/>
           <a:p>
             <a:pPr algn="ctr">
@@ -15572,7 +15820,9 @@
           </a:fontRef>
         </p:style>
         <p:txBody>
-          <a:bodyPr rtlCol="0" anchor="ctr"/>
+          <a:bodyPr rtlCol="0" anchor="ctr">
+            <a:normAutofit/>
+          </a:bodyPr>
           <a:lstStyle/>
           <a:p>
             <a:pPr algn="ctr"/>
@@ -15597,7 +15847,7 @@
         </p:spPr>
         <p:txBody>
           <a:bodyPr wrap="square">
-            <a:spAutoFit/>
+            <a:normAutofit/>
           </a:bodyPr>
           <a:lstStyle/>
           <a:p>
@@ -15636,7 +15886,7 @@
         </p:spPr>
         <p:txBody>
           <a:bodyPr wrap="square">
-            <a:spAutoFit/>
+            <a:normAutofit/>
           </a:bodyPr>
           <a:lstStyle/>
           <a:p>
@@ -15695,7 +15945,9 @@
           </a:fontRef>
         </p:style>
         <p:txBody>
-          <a:bodyPr rtlCol="0" anchor="ctr"/>
+          <a:bodyPr rtlCol="0" anchor="ctr">
+            <a:normAutofit/>
+          </a:bodyPr>
           <a:lstStyle/>
           <a:p>
             <a:pPr algn="ctr"/>
@@ -15738,7 +15990,9 @@
           </a:fontRef>
         </p:style>
         <p:txBody>
-          <a:bodyPr rtlCol="0" anchor="ctr" wrap="square"/>
+          <a:bodyPr rtlCol="0" anchor="ctr" wrap="square">
+            <a:normAutofit/>
+          </a:bodyPr>
           <a:lstStyle/>
           <a:p>
             <a:pPr algn="ctr">
@@ -15772,7 +16026,7 @@
         </p:spPr>
         <p:txBody>
           <a:bodyPr wrap="square">
-            <a:spAutoFit/>
+            <a:normAutofit/>
           </a:bodyPr>
           <a:lstStyle/>
           <a:p>
@@ -15811,7 +16065,7 @@
         </p:spPr>
         <p:txBody>
           <a:bodyPr wrap="square">
-            <a:spAutoFit/>
+            <a:normAutofit/>
           </a:bodyPr>
           <a:lstStyle/>
           <a:p>
@@ -15884,7 +16138,9 @@
           </a:fontRef>
         </p:style>
         <p:txBody>
-          <a:bodyPr rtlCol="0" anchor="ctr" wrap="square" lIns="177800" tIns="127000" rIns="177800" bIns="127000"/>
+          <a:bodyPr rtlCol="0" anchor="ctr" wrap="square" lIns="177800" tIns="127000" rIns="177800" bIns="127000">
+            <a:normAutofit/>
+          </a:bodyPr>
           <a:lstStyle/>
           <a:p>
             <a:pPr algn="ctr">
@@ -15990,7 +16246,9 @@
           </a:fontRef>
         </p:style>
         <p:txBody>
-          <a:bodyPr rtlCol="0" anchor="ctr"/>
+          <a:bodyPr rtlCol="0" anchor="ctr">
+            <a:normAutofit/>
+          </a:bodyPr>
           <a:lstStyle/>
           <a:p>
             <a:pPr algn="ctr"/>
@@ -16033,7 +16291,9 @@
           </a:fontRef>
         </p:style>
         <p:txBody>
-          <a:bodyPr rtlCol="0" anchor="ctr" wrap="square"/>
+          <a:bodyPr rtlCol="0" anchor="ctr" wrap="square">
+            <a:normAutofit/>
+          </a:bodyPr>
           <a:lstStyle/>
           <a:p>
             <a:pPr algn="ctr">
@@ -16067,7 +16327,7 @@
         </p:spPr>
         <p:txBody>
           <a:bodyPr wrap="square">
-            <a:spAutoFit/>
+            <a:normAutofit/>
           </a:bodyPr>
           <a:lstStyle/>
           <a:p>
@@ -16106,7 +16366,7 @@
         </p:spPr>
         <p:txBody>
           <a:bodyPr wrap="square">
-            <a:spAutoFit/>
+            <a:normAutofit/>
           </a:bodyPr>
           <a:lstStyle/>
           <a:p>
@@ -16179,7 +16439,9 @@
           </a:fontRef>
         </p:style>
         <p:txBody>
-          <a:bodyPr rtlCol="0" anchor="ctr" wrap="square" lIns="177800" tIns="127000" rIns="177800" bIns="127000"/>
+          <a:bodyPr rtlCol="0" anchor="ctr" wrap="square" lIns="177800" tIns="127000" rIns="177800" bIns="127000">
+            <a:normAutofit/>
+          </a:bodyPr>
           <a:lstStyle/>
           <a:p>
             <a:pPr algn="ctr">
@@ -16301,7 +16563,9 @@
           </a:fontRef>
         </p:style>
         <p:txBody>
-          <a:bodyPr rtlCol="0" anchor="ctr"/>
+          <a:bodyPr rtlCol="0" anchor="ctr">
+            <a:normAutofit/>
+          </a:bodyPr>
           <a:lstStyle/>
           <a:p>
             <a:pPr algn="ctr"/>
@@ -16344,7 +16608,9 @@
           </a:fontRef>
         </p:style>
         <p:txBody>
-          <a:bodyPr rtlCol="0" anchor="ctr" wrap="square"/>
+          <a:bodyPr rtlCol="0" anchor="ctr" wrap="square">
+            <a:normAutofit/>
+          </a:bodyPr>
           <a:lstStyle/>
           <a:p>
             <a:pPr algn="ctr">
@@ -16378,7 +16644,7 @@
         </p:spPr>
         <p:txBody>
           <a:bodyPr wrap="square">
-            <a:spAutoFit/>
+            <a:normAutofit/>
           </a:bodyPr>
           <a:lstStyle/>
           <a:p>
@@ -16417,7 +16683,7 @@
         </p:spPr>
         <p:txBody>
           <a:bodyPr wrap="square">
-            <a:spAutoFit/>
+            <a:normAutofit/>
           </a:bodyPr>
           <a:lstStyle/>
           <a:p>
@@ -16490,7 +16756,9 @@
           </a:fontRef>
         </p:style>
         <p:txBody>
-          <a:bodyPr rtlCol="0" anchor="ctr" wrap="square" lIns="177800" tIns="127000" rIns="177800" bIns="127000"/>
+          <a:bodyPr rtlCol="0" anchor="ctr" wrap="square" lIns="177800" tIns="127000" rIns="177800" bIns="127000">
+            <a:normAutofit/>
+          </a:bodyPr>
           <a:lstStyle/>
           <a:p>
             <a:pPr algn="ctr">
@@ -16644,7 +16912,9 @@
           </a:fontRef>
         </p:style>
         <p:txBody>
-          <a:bodyPr rtlCol="0" anchor="ctr"/>
+          <a:bodyPr rtlCol="0" anchor="ctr">
+            <a:normAutofit/>
+          </a:bodyPr>
           <a:lstStyle/>
           <a:p>
             <a:pPr algn="ctr"/>
@@ -16669,7 +16939,7 @@
         </p:spPr>
         <p:txBody>
           <a:bodyPr wrap="square">
-            <a:spAutoFit/>
+            <a:normAutofit/>
           </a:bodyPr>
           <a:lstStyle/>
           <a:p>
@@ -16708,7 +16978,7 @@
         </p:spPr>
         <p:txBody>
           <a:bodyPr wrap="square">
-            <a:spAutoFit/>
+            <a:normAutofit/>
           </a:bodyPr>
           <a:lstStyle/>
           <a:p>
@@ -16747,7 +17017,7 @@
         </p:spPr>
         <p:txBody>
           <a:bodyPr wrap="square">
-            <a:spAutoFit/>
+            <a:normAutofit/>
           </a:bodyPr>
           <a:lstStyle/>
           <a:p>
@@ -16786,7 +17056,7 @@
         </p:spPr>
         <p:txBody>
           <a:bodyPr wrap="square">
-            <a:spAutoFit/>
+            <a:normAutofit/>
           </a:bodyPr>
           <a:lstStyle/>
           <a:p>
@@ -16891,7 +17161,9 @@
           </a:fontRef>
         </p:style>
         <p:txBody>
-          <a:bodyPr rtlCol="0" anchor="ctr" wrap="square" lIns="177800" tIns="127000" rIns="177800" bIns="127000"/>
+          <a:bodyPr rtlCol="0" anchor="ctr" wrap="square" lIns="177800" tIns="127000" rIns="177800" bIns="127000">
+            <a:normAutofit/>
+          </a:bodyPr>
           <a:lstStyle/>
           <a:p>
             <a:pPr algn="ctr">
@@ -17170,7 +17442,9 @@
           </a:fontRef>
         </p:style>
         <p:txBody>
-          <a:bodyPr rtlCol="0" anchor="ctr"/>
+          <a:bodyPr rtlCol="0" anchor="ctr">
+            <a:normAutofit/>
+          </a:bodyPr>
           <a:lstStyle/>
           <a:p>
             <a:pPr algn="ctr"/>
@@ -17195,7 +17469,7 @@
         </p:spPr>
         <p:txBody>
           <a:bodyPr wrap="square">
-            <a:spAutoFit/>
+            <a:normAutofit/>
           </a:bodyPr>
           <a:lstStyle/>
           <a:p>
@@ -17252,7 +17526,9 @@
           </a:fontRef>
         </p:style>
         <p:txBody>
-          <a:bodyPr rtlCol="0" anchor="ctr" wrap="square" lIns="177800" tIns="127000" rIns="177800" bIns="127000"/>
+          <a:bodyPr rtlCol="0" anchor="ctr" wrap="square" lIns="177800" tIns="127000" rIns="177800" bIns="127000">
+            <a:normAutofit/>
+          </a:bodyPr>
           <a:lstStyle/>
           <a:p>
             <a:pPr algn="ctr">
@@ -17634,7 +17910,9 @@
           </a:fontRef>
         </p:style>
         <p:txBody>
-          <a:bodyPr rtlCol="0" anchor="ctr"/>
+          <a:bodyPr rtlCol="0" anchor="ctr">
+            <a:normAutofit/>
+          </a:bodyPr>
           <a:lstStyle/>
           <a:p>
             <a:pPr algn="ctr"/>
@@ -17659,7 +17937,7 @@
         </p:spPr>
         <p:txBody>
           <a:bodyPr wrap="square">
-            <a:spAutoFit/>
+            <a:normAutofit/>
           </a:bodyPr>
           <a:lstStyle/>
           <a:p>
@@ -17698,7 +17976,7 @@
         </p:spPr>
         <p:txBody>
           <a:bodyPr wrap="square">
-            <a:spAutoFit/>
+            <a:normAutofit/>
           </a:bodyPr>
           <a:lstStyle/>
           <a:p>
@@ -17757,7 +18035,9 @@
           </a:fontRef>
         </p:style>
         <p:txBody>
-          <a:bodyPr rtlCol="0" anchor="ctr"/>
+          <a:bodyPr rtlCol="0" anchor="ctr">
+            <a:normAutofit/>
+          </a:bodyPr>
           <a:lstStyle/>
           <a:p>
             <a:pPr algn="ctr"/>
@@ -17800,7 +18080,9 @@
           </a:fontRef>
         </p:style>
         <p:txBody>
-          <a:bodyPr rtlCol="0" anchor="ctr" wrap="square"/>
+          <a:bodyPr rtlCol="0" anchor="ctr" wrap="square">
+            <a:normAutofit/>
+          </a:bodyPr>
           <a:lstStyle/>
           <a:p>
             <a:pPr algn="ctr">
@@ -17834,7 +18116,7 @@
         </p:spPr>
         <p:txBody>
           <a:bodyPr wrap="square">
-            <a:spAutoFit/>
+            <a:normAutofit/>
           </a:bodyPr>
           <a:lstStyle/>
           <a:p>
@@ -17923,7 +18205,9 @@
           </a:fontRef>
         </p:style>
         <p:txBody>
-          <a:bodyPr rtlCol="0" anchor="ctr" wrap="square" lIns="177800" tIns="127000" rIns="177800" bIns="127000"/>
+          <a:bodyPr rtlCol="0" anchor="ctr" wrap="square" lIns="177800" tIns="127000" rIns="177800" bIns="127000">
+            <a:normAutofit/>
+          </a:bodyPr>
           <a:lstStyle/>
           <a:p>
             <a:pPr algn="ctr">
@@ -18167,7 +18451,9 @@
           </a:fontRef>
         </p:style>
         <p:txBody>
-          <a:bodyPr rtlCol="0" anchor="ctr"/>
+          <a:bodyPr rtlCol="0" anchor="ctr">
+            <a:normAutofit/>
+          </a:bodyPr>
           <a:lstStyle/>
           <a:p>
             <a:pPr algn="ctr"/>
@@ -18210,7 +18496,9 @@
           </a:fontRef>
         </p:style>
         <p:txBody>
-          <a:bodyPr rtlCol="0" anchor="ctr" wrap="square"/>
+          <a:bodyPr rtlCol="0" anchor="ctr" wrap="square">
+            <a:normAutofit/>
+          </a:bodyPr>
           <a:lstStyle/>
           <a:p>
             <a:pPr algn="ctr">
@@ -18244,7 +18532,7 @@
         </p:spPr>
         <p:txBody>
           <a:bodyPr wrap="square">
-            <a:spAutoFit/>
+            <a:normAutofit/>
           </a:bodyPr>
           <a:lstStyle/>
           <a:p>
@@ -18333,7 +18621,9 @@
           </a:fontRef>
         </p:style>
         <p:txBody>
-          <a:bodyPr rtlCol="0" anchor="ctr" wrap="square" lIns="177800" tIns="127000" rIns="177800" bIns="127000"/>
+          <a:bodyPr rtlCol="0" anchor="ctr" wrap="square" lIns="177800" tIns="127000" rIns="177800" bIns="127000">
+            <a:normAutofit/>
+          </a:bodyPr>
           <a:lstStyle/>
           <a:p>
             <a:pPr algn="ctr">
@@ -18599,7 +18889,9 @@
           </a:fontRef>
         </p:style>
         <p:txBody>
-          <a:bodyPr rtlCol="0" anchor="ctr"/>
+          <a:bodyPr rtlCol="0" anchor="ctr">
+            <a:normAutofit/>
+          </a:bodyPr>
           <a:lstStyle/>
           <a:p>
             <a:pPr algn="ctr"/>
@@ -18624,7 +18916,7 @@
         </p:spPr>
         <p:txBody>
           <a:bodyPr wrap="square">
-            <a:spAutoFit/>
+            <a:normAutofit/>
           </a:bodyPr>
           <a:lstStyle/>
           <a:p>
@@ -18683,7 +18975,9 @@
           </a:fontRef>
         </p:style>
         <p:txBody>
-          <a:bodyPr rtlCol="0" anchor="ctr"/>
+          <a:bodyPr rtlCol="0" anchor="ctr">
+            <a:normAutofit/>
+          </a:bodyPr>
           <a:lstStyle/>
           <a:p>
             <a:pPr algn="ctr"/>
@@ -18726,7 +19020,9 @@
           </a:fontRef>
         </p:style>
         <p:txBody>
-          <a:bodyPr rtlCol="0" anchor="ctr"/>
+          <a:bodyPr rtlCol="0" anchor="ctr">
+            <a:normAutofit/>
+          </a:bodyPr>
           <a:lstStyle/>
           <a:p>
             <a:pPr algn="ctr"/>
@@ -18751,7 +19047,7 @@
         </p:spPr>
         <p:txBody>
           <a:bodyPr wrap="square">
-            <a:spAutoFit/>
+            <a:normAutofit/>
           </a:bodyPr>
           <a:lstStyle/>
           <a:p>
@@ -18790,7 +19086,7 @@
         </p:spPr>
         <p:txBody>
           <a:bodyPr wrap="square">
-            <a:spAutoFit/>
+            <a:normAutofit/>
           </a:bodyPr>
           <a:lstStyle/>
           <a:p>
@@ -18829,7 +19125,7 @@
         </p:spPr>
         <p:txBody>
           <a:bodyPr wrap="square">
-            <a:spAutoFit/>
+            <a:normAutofit/>
           </a:bodyPr>
           <a:lstStyle/>
           <a:p>
@@ -18888,7 +19184,9 @@
           </a:fontRef>
         </p:style>
         <p:txBody>
-          <a:bodyPr rtlCol="0" anchor="ctr"/>
+          <a:bodyPr rtlCol="0" anchor="ctr">
+            <a:normAutofit/>
+          </a:bodyPr>
           <a:lstStyle/>
           <a:p>
             <a:pPr algn="ctr"/>
@@ -18931,7 +19229,9 @@
           </a:fontRef>
         </p:style>
         <p:txBody>
-          <a:bodyPr rtlCol="0" anchor="ctr"/>
+          <a:bodyPr rtlCol="0" anchor="ctr">
+            <a:normAutofit/>
+          </a:bodyPr>
           <a:lstStyle/>
           <a:p>
             <a:pPr algn="ctr"/>
@@ -18956,7 +19256,7 @@
         </p:spPr>
         <p:txBody>
           <a:bodyPr wrap="square">
-            <a:spAutoFit/>
+            <a:normAutofit/>
           </a:bodyPr>
           <a:lstStyle/>
           <a:p>
@@ -18995,7 +19295,7 @@
         </p:spPr>
         <p:txBody>
           <a:bodyPr wrap="square">
-            <a:spAutoFit/>
+            <a:normAutofit/>
           </a:bodyPr>
           <a:lstStyle/>
           <a:p>
@@ -19034,7 +19334,7 @@
         </p:spPr>
         <p:txBody>
           <a:bodyPr wrap="square">
-            <a:spAutoFit/>
+            <a:normAutofit/>
           </a:bodyPr>
           <a:lstStyle/>
           <a:p>
@@ -19093,7 +19393,9 @@
           </a:fontRef>
         </p:style>
         <p:txBody>
-          <a:bodyPr rtlCol="0" anchor="ctr"/>
+          <a:bodyPr rtlCol="0" anchor="ctr">
+            <a:normAutofit/>
+          </a:bodyPr>
           <a:lstStyle/>
           <a:p>
             <a:pPr algn="ctr"/>
@@ -19136,7 +19438,9 @@
           </a:fontRef>
         </p:style>
         <p:txBody>
-          <a:bodyPr rtlCol="0" anchor="ctr"/>
+          <a:bodyPr rtlCol="0" anchor="ctr">
+            <a:normAutofit/>
+          </a:bodyPr>
           <a:lstStyle/>
           <a:p>
             <a:pPr algn="ctr"/>
@@ -19161,7 +19465,7 @@
         </p:spPr>
         <p:txBody>
           <a:bodyPr wrap="square">
-            <a:spAutoFit/>
+            <a:normAutofit/>
           </a:bodyPr>
           <a:lstStyle/>
           <a:p>
@@ -19200,7 +19504,7 @@
         </p:spPr>
         <p:txBody>
           <a:bodyPr wrap="square">
-            <a:spAutoFit/>
+            <a:normAutofit/>
           </a:bodyPr>
           <a:lstStyle/>
           <a:p>
@@ -19239,7 +19543,7 @@
         </p:spPr>
         <p:txBody>
           <a:bodyPr wrap="square">
-            <a:spAutoFit/>
+            <a:normAutofit/>
           </a:bodyPr>
           <a:lstStyle/>
           <a:p>
@@ -19298,7 +19602,9 @@
           </a:fontRef>
         </p:style>
         <p:txBody>
-          <a:bodyPr rtlCol="0" anchor="ctr"/>
+          <a:bodyPr rtlCol="0" anchor="ctr">
+            <a:normAutofit/>
+          </a:bodyPr>
           <a:lstStyle/>
           <a:p>
             <a:pPr algn="ctr"/>
@@ -19341,7 +19647,9 @@
           </a:fontRef>
         </p:style>
         <p:txBody>
-          <a:bodyPr rtlCol="0" anchor="ctr"/>
+          <a:bodyPr rtlCol="0" anchor="ctr">
+            <a:normAutofit/>
+          </a:bodyPr>
           <a:lstStyle/>
           <a:p>
             <a:pPr algn="ctr"/>
@@ -19366,7 +19674,7 @@
         </p:spPr>
         <p:txBody>
           <a:bodyPr wrap="square">
-            <a:spAutoFit/>
+            <a:normAutofit/>
           </a:bodyPr>
           <a:lstStyle/>
           <a:p>
@@ -19405,7 +19713,7 @@
         </p:spPr>
         <p:txBody>
           <a:bodyPr wrap="square">
-            <a:spAutoFit/>
+            <a:normAutofit/>
           </a:bodyPr>
           <a:lstStyle/>
           <a:p>
@@ -19444,7 +19752,7 @@
         </p:spPr>
         <p:txBody>
           <a:bodyPr wrap="square">
-            <a:spAutoFit/>
+            <a:normAutofit/>
           </a:bodyPr>
           <a:lstStyle/>
           <a:p>
@@ -19519,7 +19827,9 @@
           </a:fontRef>
         </p:style>
         <p:txBody>
-          <a:bodyPr rtlCol="0" anchor="ctr"/>
+          <a:bodyPr rtlCol="0" anchor="ctr">
+            <a:normAutofit/>
+          </a:bodyPr>
           <a:lstStyle/>
           <a:p>
             <a:pPr algn="ctr"/>
@@ -19544,7 +19854,7 @@
         </p:spPr>
         <p:txBody>
           <a:bodyPr wrap="square">
-            <a:spAutoFit/>
+            <a:normAutofit/>
           </a:bodyPr>
           <a:lstStyle/>
           <a:p>
@@ -19583,7 +19893,7 @@
         </p:spPr>
         <p:txBody>
           <a:bodyPr wrap="square">
-            <a:spAutoFit/>
+            <a:normAutofit/>
           </a:bodyPr>
           <a:lstStyle/>
           <a:p>
@@ -19622,7 +19932,7 @@
         </p:spPr>
         <p:txBody>
           <a:bodyPr wrap="square">
-            <a:spAutoFit/>
+            <a:normAutofit/>
           </a:bodyPr>
           <a:lstStyle/>
           <a:p>
@@ -19679,7 +19989,9 @@
           </a:fontRef>
         </p:style>
         <p:txBody>
-          <a:bodyPr rtlCol="0" anchor="ctr"/>
+          <a:bodyPr rtlCol="0" anchor="ctr">
+            <a:normAutofit/>
+          </a:bodyPr>
           <a:lstStyle/>
           <a:p>
             <a:pPr algn="ctr"/>
@@ -19704,7 +20016,7 @@
         </p:spPr>
         <p:txBody>
           <a:bodyPr wrap="square">
-            <a:spAutoFit/>
+            <a:normAutofit/>
           </a:bodyPr>
           <a:lstStyle/>
           <a:p>
@@ -19743,7 +20055,7 @@
         </p:spPr>
         <p:txBody>
           <a:bodyPr wrap="square">
-            <a:spAutoFit/>
+            <a:normAutofit/>
           </a:bodyPr>
           <a:lstStyle/>
           <a:p>
@@ -19800,7 +20112,9 @@
           </a:fontRef>
         </p:style>
         <p:txBody>
-          <a:bodyPr rtlCol="0" anchor="ctr"/>
+          <a:bodyPr rtlCol="0" anchor="ctr">
+            <a:normAutofit/>
+          </a:bodyPr>
           <a:lstStyle/>
           <a:p>
             <a:pPr algn="ctr"/>
@@ -19825,7 +20139,7 @@
         </p:spPr>
         <p:txBody>
           <a:bodyPr wrap="square">
-            <a:spAutoFit/>
+            <a:normAutofit/>
           </a:bodyPr>
           <a:lstStyle/>
           <a:p>
@@ -19864,7 +20178,7 @@
         </p:spPr>
         <p:txBody>
           <a:bodyPr wrap="square">
-            <a:spAutoFit/>
+            <a:normAutofit/>
           </a:bodyPr>
           <a:lstStyle/>
           <a:p>
@@ -19921,7 +20235,9 @@
           </a:fontRef>
         </p:style>
         <p:txBody>
-          <a:bodyPr rtlCol="0" anchor="ctr"/>
+          <a:bodyPr rtlCol="0" anchor="ctr">
+            <a:normAutofit/>
+          </a:bodyPr>
           <a:lstStyle/>
           <a:p>
             <a:pPr algn="ctr"/>
@@ -19946,7 +20262,7 @@
         </p:spPr>
         <p:txBody>
           <a:bodyPr wrap="square">
-            <a:spAutoFit/>
+            <a:normAutofit/>
           </a:bodyPr>
           <a:lstStyle/>
           <a:p>
@@ -19985,7 +20301,7 @@
         </p:spPr>
         <p:txBody>
           <a:bodyPr wrap="square">
-            <a:spAutoFit/>
+            <a:normAutofit/>
           </a:bodyPr>
           <a:lstStyle/>
           <a:p>
@@ -20042,7 +20358,9 @@
           </a:fontRef>
         </p:style>
         <p:txBody>
-          <a:bodyPr rtlCol="0" anchor="ctr"/>
+          <a:bodyPr rtlCol="0" anchor="ctr">
+            <a:normAutofit/>
+          </a:bodyPr>
           <a:lstStyle/>
           <a:p>
             <a:pPr algn="ctr"/>
@@ -20067,7 +20385,7 @@
         </p:spPr>
         <p:txBody>
           <a:bodyPr wrap="square">
-            <a:spAutoFit/>
+            <a:normAutofit/>
           </a:bodyPr>
           <a:lstStyle/>
           <a:p>
@@ -20106,7 +20424,7 @@
         </p:spPr>
         <p:txBody>
           <a:bodyPr wrap="square">
-            <a:spAutoFit/>
+            <a:normAutofit/>
           </a:bodyPr>
           <a:lstStyle/>
           <a:p>
@@ -20145,7 +20463,7 @@
         </p:spPr>
         <p:txBody>
           <a:bodyPr wrap="square">
-            <a:spAutoFit/>
+            <a:normAutofit/>
           </a:bodyPr>
           <a:lstStyle/>
           <a:p>
@@ -20202,7 +20520,9 @@
           </a:fontRef>
         </p:style>
         <p:txBody>
-          <a:bodyPr rtlCol="0" anchor="ctr" wrap="square" lIns="177800" tIns="127000" rIns="177800" bIns="127000"/>
+          <a:bodyPr rtlCol="0" anchor="ctr" wrap="square" lIns="177800" tIns="127000" rIns="177800" bIns="127000">
+            <a:normAutofit/>
+          </a:bodyPr>
           <a:lstStyle/>
           <a:p>
             <a:pPr algn="ctr">
@@ -20349,7 +20669,7 @@
         </p:spPr>
         <p:txBody>
           <a:bodyPr wrap="square">
-            <a:spAutoFit/>
+            <a:normAutofit/>
           </a:bodyPr>
           <a:lstStyle/>
           <a:p>
@@ -20406,7 +20726,9 @@
           </a:fontRef>
         </p:style>
         <p:txBody>
-          <a:bodyPr rtlCol="0" anchor="ctr" wrap="square" lIns="177800" tIns="127000" rIns="177800" bIns="127000"/>
+          <a:bodyPr rtlCol="0" anchor="ctr" wrap="square" lIns="177800" tIns="127000" rIns="177800" bIns="127000">
+            <a:normAutofit/>
+          </a:bodyPr>
           <a:lstStyle/>
           <a:p>
             <a:pPr algn="ctr">

--- a/Molecular_Docking_Workshop.pptx
+++ b/Molecular_Docking_Workshop.pptx
@@ -11805,7 +11805,7 @@
                 </a:solidFill>
                 <a:latin typeface="Consolas"/>
               </a:rPr>
-              <a:t>select site, prot w. 5 of lig</a:t>
+              <a:t>select site, prot within 5 of lig</a:t>
             </a:r>
             <a:r>
               <a:rPr sz="1100">
@@ -14220,6 +14220,55 @@
               <a:t>!pip install -q seaborn pandas matplotlib</a:t>
             </a:r>
           </a:p>
+          <a:p>
+            <a:pPr>
+              <a:defRPr sz="1400">
+                <a:solidFill>
+                  <a:srgbClr val="6A9955"/>
+                </a:solidFill>
+                <a:latin typeface="Consolas"/>
+              </a:defRPr>
+            </a:pPr>
+          </a:p>
+          <a:p>
+            <a:pPr>
+              <a:defRPr sz="1400">
+                <a:solidFill>
+                  <a:srgbClr val="6A9955"/>
+                </a:solidFill>
+                <a:latin typeface="Consolas"/>
+              </a:defRPr>
+            </a:pPr>
+            <a:r>
+              <a:t># Binary tools (Cell 1-2에서 자동 설치됨)</a:t>
+            </a:r>
+          </a:p>
+          <a:p>
+            <a:pPr>
+              <a:defRPr sz="1400">
+                <a:solidFill>
+                  <a:srgbClr val="6A9955"/>
+                </a:solidFill>
+                <a:latin typeface="Consolas"/>
+              </a:defRPr>
+            </a:pPr>
+            <a:r>
+              <a:t># smina: sourceforge에서 다운로드</a:t>
+            </a:r>
+          </a:p>
+          <a:p>
+            <a:pPr>
+              <a:defRPr sz="1400">
+                <a:solidFill>
+                  <a:srgbClr val="6A9955"/>
+                </a:solidFill>
+                <a:latin typeface="Consolas"/>
+              </a:defRPr>
+            </a:pPr>
+            <a:r>
+              <a:t># ADFRsuite: Scripps에서 다운로드</a:t>
+            </a:r>
+          </a:p>
         </p:txBody>
       </p:sp>
       <p:sp>
@@ -18411,6 +18460,42 @@
               <a:t>v.write_poses('vina_out.pdbqt', n_poses=30)</a:t>
             </a:r>
           </a:p>
+          <a:p>
+            <a:pPr>
+              <a:defRPr sz="1200">
+                <a:solidFill>
+                  <a:srgbClr val="ABB2BF"/>
+                </a:solidFill>
+                <a:latin typeface="Consolas"/>
+              </a:defRPr>
+            </a:pPr>
+          </a:p>
+          <a:p>
+            <a:pPr>
+              <a:defRPr sz="1200">
+                <a:solidFill>
+                  <a:srgbClr val="6A9955"/>
+                </a:solidFill>
+                <a:latin typeface="Consolas"/>
+              </a:defRPr>
+            </a:pPr>
+            <a:r>
+              <a:t># PDBQT → SDF 변환 (Open Babel)</a:t>
+            </a:r>
+          </a:p>
+          <a:p>
+            <a:pPr>
+              <a:defRPr sz="1200">
+                <a:solidFill>
+                  <a:srgbClr val="ABB2BF"/>
+                </a:solidFill>
+                <a:latin typeface="Consolas"/>
+              </a:defRPr>
+            </a:pPr>
+            <a:r>
+              <a:t>pdbqt_to_sdf('vina_out.pdbqt', 'vina_out.sdf')</a:t>
+            </a:r>
+          </a:p>
         </p:txBody>
       </p:sp>
       <p:sp>
@@ -19141,7 +19226,7 @@
               </a:defRPr>
             </a:pPr>
             <a:r>
-              <a:t>탐색 철저성. Monte Carlo 반복 횟수. 높을수록 정확하지만 시간 증가.</a:t>
+              <a:t>탐색 철저성. 독립 탐색 실행 횟수 (ILS runs). 높을수록 정확하지만 시간 증가.</a:t>
             </a:r>
           </a:p>
         </p:txBody>
@@ -20569,7 +20654,7 @@
               </a:defRPr>
             </a:pPr>
             <a:r>
-              <a:t>BEI = -score / (MW / 1000)</a:t>
+              <a:t>BEI ≈ -score / (MW / 1000)</a:t>
             </a:r>
           </a:p>
           <a:p>

--- a/Molecular_Docking_Workshop.pptx
+++ b/Molecular_Docking_Workshop.pptx
@@ -18,6 +18,9 @@
     <p:sldId id="266" r:id="rId17"/>
     <p:sldId id="267" r:id="rId18"/>
     <p:sldId id="268" r:id="rId19"/>
+    <p:sldId id="271" r:id="rId22"/>
+    <p:sldId id="272" r:id="rId23"/>
+    <p:sldId id="273" r:id="rId24"/>
     <p:sldId id="269" r:id="rId20"/>
     <p:sldId id="270" r:id="rId21"/>
   </p:sldIdLst>
@@ -13009,6 +13012,6769 @@
             </a:pPr>
             <a:r>
               <a:t>도킹 = "정적 스냅샷"  →  분자 동역학(MD) = "동적 영화"  →  FEP = "정량적 자유 에너지"</a:t>
+            </a:r>
+          </a:p>
+        </p:txBody>
+      </p:sp>
+    </p:spTree>
+  </p:cSld>
+  <p:clrMapOvr>
+    <a:masterClrMapping/>
+  </p:clrMapOvr>
+</p:sld>
+</file>
+
+<file path=ppt/slides/slide16.xml><?xml version="1.0" encoding="utf-8"?>
+<p:sld xmlns:a="http://schemas.openxmlformats.org/drawingml/2006/main" xmlns:p="http://schemas.openxmlformats.org/presentationml/2006/main" xmlns:r="http://schemas.openxmlformats.org/officeDocument/2006/relationships">
+  <p:cSld>
+    <p:spTree>
+      <p:nvGrpSpPr>
+        <p:cNvPr id="1" name=""/>
+        <p:cNvGrpSpPr/>
+        <p:nvPr/>
+      </p:nvGrpSpPr>
+      <p:grpSpPr/>
+      <p:sp>
+        <p:nvSpPr>
+          <p:cNvPr id="2" name="Rectangle 1"/>
+          <p:cNvSpPr/>
+          <p:nvPr/>
+        </p:nvSpPr>
+        <p:spPr>
+          <a:xfrm>
+            <a:off x="0" y="0"/>
+            <a:ext cx="12191695" cy="6858000"/>
+          </a:xfrm>
+          <a:prstGeom prst="rect">
+            <a:avLst/>
+          </a:prstGeom>
+          <a:solidFill>
+            <a:srgbClr val="FAFAF8"/>
+          </a:solidFill>
+          <a:ln>
+            <a:noFill/>
+          </a:ln>
+        </p:spPr>
+        <p:style>
+          <a:lnRef idx="1">
+            <a:schemeClr val="accent1"/>
+          </a:lnRef>
+          <a:fillRef idx="3">
+            <a:schemeClr val="accent1"/>
+          </a:fillRef>
+          <a:effectRef idx="2">
+            <a:schemeClr val="accent1"/>
+          </a:effectRef>
+          <a:fontRef idx="minor">
+            <a:schemeClr val="lt1"/>
+          </a:fontRef>
+        </p:style>
+        <p:txBody>
+          <a:bodyPr rtlCol="0" anchor="ctr"/>
+          <a:lstStyle/>
+          <a:p>
+            <a:pPr algn="ctr"/>
+          </a:p>
+        </p:txBody>
+      </p:sp>
+      <p:sp>
+        <p:nvSpPr>
+          <p:cNvPr id="3" name="TextBox 2"/>
+          <p:cNvSpPr txBox="1"/>
+          <p:nvPr/>
+        </p:nvSpPr>
+        <p:spPr>
+          <a:xfrm>
+            <a:off x="731520" y="365760"/>
+            <a:ext cx="10058400" cy="640080"/>
+          </a:xfrm>
+          <a:prstGeom prst="rect">
+            <a:avLst/>
+          </a:prstGeom>
+          <a:noFill/>
+        </p:spPr>
+        <p:txBody>
+          <a:bodyPr wrap="square">
+            <a:normAutofit/>
+          </a:bodyPr>
+          <a:lstStyle/>
+          <a:p>
+            <a:pPr algn="l">
+              <a:spcAft>
+                <a:spcPts val="200"/>
+              </a:spcAft>
+              <a:defRPr sz="3200" b="1">
+                <a:solidFill>
+                  <a:srgbClr val="212121"/>
+                </a:solidFill>
+                <a:latin typeface="맑은 고딕"/>
+              </a:defRPr>
+            </a:pPr>
+            <a:r>
+              <a:t>Step 5: SAR Table — 리간드 시리즈 자동 도킹</a:t>
+            </a:r>
+          </a:p>
+        </p:txBody>
+      </p:sp>
+      <p:sp>
+        <p:nvSpPr>
+          <p:cNvPr id="4" name="TextBox 3"/>
+          <p:cNvSpPr txBox="1"/>
+          <p:nvPr/>
+        </p:nvSpPr>
+        <p:spPr>
+          <a:xfrm>
+            <a:off x="731520" y="914400"/>
+            <a:ext cx="10058400" cy="320040"/>
+          </a:xfrm>
+          <a:prstGeom prst="rect">
+            <a:avLst/>
+          </a:prstGeom>
+          <a:noFill/>
+        </p:spPr>
+        <p:txBody>
+          <a:bodyPr wrap="square">
+            <a:normAutofit/>
+          </a:bodyPr>
+          <a:lstStyle/>
+          <a:p>
+            <a:pPr algn="l">
+              <a:spcAft>
+                <a:spcPts val="200"/>
+              </a:spcAft>
+              <a:defRPr sz="1300" b="0">
+                <a:solidFill>
+                  <a:srgbClr val="00897B"/>
+                </a:solidFill>
+                <a:latin typeface="맑은 고딕"/>
+              </a:defRPr>
+            </a:pPr>
+            <a:r>
+              <a:t>SAR_Docking_Analysis.ipynb  |  구조-활성 관계(SAR) 자동 분석</a:t>
+            </a:r>
+          </a:p>
+        </p:txBody>
+      </p:sp>
+      <p:sp>
+        <p:nvSpPr>
+          <p:cNvPr id="5" name="TextBox 4"/>
+          <p:cNvSpPr txBox="1"/>
+          <p:nvPr/>
+        </p:nvSpPr>
+        <p:spPr>
+          <a:xfrm>
+            <a:off x="731520" y="1417320"/>
+            <a:ext cx="5029200" cy="320040"/>
+          </a:xfrm>
+          <a:prstGeom prst="rect">
+            <a:avLst/>
+          </a:prstGeom>
+          <a:noFill/>
+        </p:spPr>
+        <p:txBody>
+          <a:bodyPr wrap="square">
+            <a:normAutofit/>
+          </a:bodyPr>
+          <a:lstStyle/>
+          <a:p>
+            <a:pPr algn="l">
+              <a:spcAft>
+                <a:spcPts val="200"/>
+              </a:spcAft>
+              <a:defRPr sz="1800" b="1">
+                <a:solidFill>
+                  <a:srgbClr val="212121"/>
+                </a:solidFill>
+                <a:latin typeface="맑은 고딕"/>
+              </a:defRPr>
+            </a:pPr>
+            <a:r>
+              <a:t>리간드 시리즈 정의</a:t>
+            </a:r>
+          </a:p>
+        </p:txBody>
+      </p:sp>
+      <p:sp>
+        <p:nvSpPr>
+          <p:cNvPr id="6" name="Rounded Rectangle 5"/>
+          <p:cNvSpPr/>
+          <p:nvPr/>
+        </p:nvSpPr>
+        <p:spPr>
+          <a:xfrm>
+            <a:off x="731520" y="1783080"/>
+            <a:ext cx="5303520" cy="4572000"/>
+          </a:xfrm>
+          <a:prstGeom prst="roundRect">
+            <a:avLst/>
+          </a:prstGeom>
+          <a:solidFill>
+            <a:srgbClr val="282C34"/>
+          </a:solidFill>
+          <a:ln>
+            <a:noFill/>
+          </a:ln>
+        </p:spPr>
+        <p:style>
+          <a:lnRef idx="1">
+            <a:schemeClr val="accent1"/>
+          </a:lnRef>
+          <a:fillRef idx="3">
+            <a:schemeClr val="accent1"/>
+          </a:fillRef>
+          <a:effectRef idx="2">
+            <a:schemeClr val="accent1"/>
+          </a:effectRef>
+          <a:fontRef idx="minor">
+            <a:schemeClr val="lt1"/>
+          </a:fontRef>
+        </p:style>
+        <p:txBody>
+          <a:bodyPr rtlCol="0" anchor="ctr" wrap="square" lIns="152400" tIns="101600" rIns="152400" bIns="101600">
+            <a:normAutofit/>
+          </a:bodyPr>
+          <a:lstStyle/>
+          <a:p>
+            <a:pPr algn="ctr">
+              <a:spcAft>
+                <a:spcPts val="0"/>
+              </a:spcAft>
+              <a:defRPr sz="1100">
+                <a:solidFill>
+                  <a:srgbClr val="6A9955"/>
+                </a:solidFill>
+                <a:latin typeface="Consolas"/>
+              </a:defRPr>
+            </a:pPr>
+            <a:r>
+              <a:t># Core scaffold + R-group 치환체 정의</a:t>
+            </a:r>
+          </a:p>
+          <a:p>
+            <a:pPr>
+              <a:spcAft>
+                <a:spcPts val="0"/>
+              </a:spcAft>
+              <a:defRPr sz="1100">
+                <a:solidFill>
+                  <a:srgbClr val="ABB2BF"/>
+                </a:solidFill>
+                <a:latin typeface="Consolas"/>
+              </a:defRPr>
+            </a:pPr>
+            <a:r>
+              <a:t>CORE_NAME = "4-Anilinoquinazoline"</a:t>
+            </a:r>
+          </a:p>
+          <a:p>
+            <a:pPr>
+              <a:spcAft>
+                <a:spcPts val="0"/>
+              </a:spcAft>
+              <a:defRPr sz="1100">
+                <a:solidFill>
+                  <a:srgbClr val="ABB2BF"/>
+                </a:solidFill>
+                <a:latin typeface="Consolas"/>
+              </a:defRPr>
+            </a:pPr>
+          </a:p>
+          <a:p>
+            <a:pPr>
+              <a:spcAft>
+                <a:spcPts val="0"/>
+              </a:spcAft>
+              <a:defRPr sz="1100">
+                <a:solidFill>
+                  <a:srgbClr val="ABB2BF"/>
+                </a:solidFill>
+                <a:latin typeface="Consolas"/>
+              </a:defRPr>
+            </a:pPr>
+            <a:r>
+              <a:t>LIGANDS = [</a:t>
+            </a:r>
+          </a:p>
+          <a:p>
+            <a:pPr>
+              <a:spcAft>
+                <a:spcPts val="0"/>
+              </a:spcAft>
+              <a:defRPr sz="1100">
+                <a:solidFill>
+                  <a:srgbClr val="6A9955"/>
+                </a:solidFill>
+                <a:latin typeface="Consolas"/>
+              </a:defRPr>
+            </a:pPr>
+            <a:r>
+              <a:t>  # R1 scan (para 위치 변화)</a:t>
+            </a:r>
+          </a:p>
+          <a:p>
+            <a:pPr>
+              <a:spcAft>
+                <a:spcPts val="0"/>
+              </a:spcAft>
+              <a:defRPr sz="1100">
+                <a:solidFill>
+                  <a:srgbClr val="ABB2BF"/>
+                </a:solidFill>
+                <a:latin typeface="Consolas"/>
+              </a:defRPr>
+            </a:pPr>
+            <a:r>
+              <a:t>  {"name": "Cpd_01", "R1": "—H",</a:t>
+            </a:r>
+          </a:p>
+          <a:p>
+            <a:pPr>
+              <a:spcAft>
+                <a:spcPts val="0"/>
+              </a:spcAft>
+              <a:defRPr sz="1100">
+                <a:solidFill>
+                  <a:srgbClr val="ABB2BF"/>
+                </a:solidFill>
+                <a:latin typeface="Consolas"/>
+              </a:defRPr>
+            </a:pPr>
+            <a:r>
+              <a:t>   "smiles": "c1ccc2ncnc(Nc3ccccc3)c2c1"},</a:t>
+            </a:r>
+          </a:p>
+          <a:p>
+            <a:pPr>
+              <a:spcAft>
+                <a:spcPts val="0"/>
+              </a:spcAft>
+              <a:defRPr sz="1100">
+                <a:solidFill>
+                  <a:srgbClr val="ABB2BF"/>
+                </a:solidFill>
+                <a:latin typeface="Consolas"/>
+              </a:defRPr>
+            </a:pPr>
+            <a:r>
+              <a:t>  {"name": "Cpd_02", "R1": "—F",</a:t>
+            </a:r>
+          </a:p>
+          <a:p>
+            <a:pPr>
+              <a:spcAft>
+                <a:spcPts val="0"/>
+              </a:spcAft>
+              <a:defRPr sz="1100">
+                <a:solidFill>
+                  <a:srgbClr val="ABB2BF"/>
+                </a:solidFill>
+                <a:latin typeface="Consolas"/>
+              </a:defRPr>
+            </a:pPr>
+            <a:r>
+              <a:t>   "smiles": "c1ccc2ncnc(Nc3ccc(F)cc3)c2c1"},</a:t>
+            </a:r>
+          </a:p>
+          <a:p>
+            <a:pPr>
+              <a:spcAft>
+                <a:spcPts val="0"/>
+              </a:spcAft>
+              <a:defRPr sz="1100">
+                <a:solidFill>
+                  <a:srgbClr val="ABB2BF"/>
+                </a:solidFill>
+                <a:latin typeface="Consolas"/>
+              </a:defRPr>
+            </a:pPr>
+            <a:r>
+              <a:t>  {"name": "Cpd_03", "R1": "—Cl",</a:t>
+            </a:r>
+          </a:p>
+          <a:p>
+            <a:pPr>
+              <a:spcAft>
+                <a:spcPts val="0"/>
+              </a:spcAft>
+              <a:defRPr sz="1100">
+                <a:solidFill>
+                  <a:srgbClr val="ABB2BF"/>
+                </a:solidFill>
+                <a:latin typeface="Consolas"/>
+              </a:defRPr>
+            </a:pPr>
+            <a:r>
+              <a:t>   "smiles": "c1ccc2ncnc(Nc3ccc(Cl)cc3)c2c1"},</a:t>
+            </a:r>
+          </a:p>
+          <a:p>
+            <a:pPr>
+              <a:spcAft>
+                <a:spcPts val="0"/>
+              </a:spcAft>
+              <a:defRPr sz="1100">
+                <a:solidFill>
+                  <a:srgbClr val="ABB2BF"/>
+                </a:solidFill>
+                <a:latin typeface="Consolas"/>
+              </a:defRPr>
+            </a:pPr>
+            <a:r>
+              <a:t>  {"name": "Cpd_04", "R1": "—CH3",</a:t>
+            </a:r>
+          </a:p>
+          <a:p>
+            <a:pPr>
+              <a:spcAft>
+                <a:spcPts val="0"/>
+              </a:spcAft>
+              <a:defRPr sz="1100">
+                <a:solidFill>
+                  <a:srgbClr val="ABB2BF"/>
+                </a:solidFill>
+                <a:latin typeface="Consolas"/>
+              </a:defRPr>
+            </a:pPr>
+            <a:r>
+              <a:t>   "smiles": "c1ccc2ncnc(Nc3ccc(C)cc3)c2c1"},</a:t>
+            </a:r>
+          </a:p>
+          <a:p>
+            <a:pPr>
+              <a:spcAft>
+                <a:spcPts val="0"/>
+              </a:spcAft>
+              <a:defRPr sz="1100">
+                <a:solidFill>
+                  <a:srgbClr val="ABB2BF"/>
+                </a:solidFill>
+                <a:latin typeface="Consolas"/>
+              </a:defRPr>
+            </a:pPr>
+            <a:r>
+              <a:t>  {"name": "Cpd_05", "R1": "—OCH3",</a:t>
+            </a:r>
+          </a:p>
+          <a:p>
+            <a:pPr>
+              <a:spcAft>
+                <a:spcPts val="0"/>
+              </a:spcAft>
+              <a:defRPr sz="1100">
+                <a:solidFill>
+                  <a:srgbClr val="ABB2BF"/>
+                </a:solidFill>
+                <a:latin typeface="Consolas"/>
+              </a:defRPr>
+            </a:pPr>
+            <a:r>
+              <a:t>   "smiles": "c1ccc2ncnc(Nc3ccc(OC)cc3)c2c1"},</a:t>
+            </a:r>
+          </a:p>
+          <a:p>
+            <a:pPr>
+              <a:spcAft>
+                <a:spcPts val="0"/>
+              </a:spcAft>
+              <a:defRPr sz="1100">
+                <a:solidFill>
+                  <a:srgbClr val="ABB2BF"/>
+                </a:solidFill>
+                <a:latin typeface="Consolas"/>
+              </a:defRPr>
+            </a:pPr>
+            <a:r>
+              <a:t>  {"name": "Cpd_06", "R1": "—CF3",</a:t>
+            </a:r>
+          </a:p>
+          <a:p>
+            <a:pPr>
+              <a:spcAft>
+                <a:spcPts val="0"/>
+              </a:spcAft>
+              <a:defRPr sz="1100">
+                <a:solidFill>
+                  <a:srgbClr val="ABB2BF"/>
+                </a:solidFill>
+                <a:latin typeface="Consolas"/>
+              </a:defRPr>
+            </a:pPr>
+            <a:r>
+              <a:t>   "smiles": "c1ccc2ncnc(Nc3ccc(C(F)(F)F)cc3)c2c1"},</a:t>
+            </a:r>
+          </a:p>
+          <a:p>
+            <a:pPr>
+              <a:spcAft>
+                <a:spcPts val="0"/>
+              </a:spcAft>
+              <a:defRPr sz="1100">
+                <a:solidFill>
+                  <a:srgbClr val="ABB2BF"/>
+                </a:solidFill>
+                <a:latin typeface="Consolas"/>
+              </a:defRPr>
+            </a:pPr>
+            <a:r>
+              <a:t>  {"name": "Cpd_07", "R1": "—NH2",</a:t>
+            </a:r>
+          </a:p>
+          <a:p>
+            <a:pPr>
+              <a:spcAft>
+                <a:spcPts val="0"/>
+              </a:spcAft>
+              <a:defRPr sz="1100">
+                <a:solidFill>
+                  <a:srgbClr val="ABB2BF"/>
+                </a:solidFill>
+                <a:latin typeface="Consolas"/>
+              </a:defRPr>
+            </a:pPr>
+            <a:r>
+              <a:t>   "smiles": "c1ccc2ncnc(Nc3ccc(N)cc3)c2c1"},</a:t>
+            </a:r>
+          </a:p>
+          <a:p>
+            <a:pPr>
+              <a:spcAft>
+                <a:spcPts val="0"/>
+              </a:spcAft>
+              <a:defRPr sz="1100">
+                <a:solidFill>
+                  <a:srgbClr val="ABB2BF"/>
+                </a:solidFill>
+                <a:latin typeface="Consolas"/>
+              </a:defRPr>
+            </a:pPr>
+            <a:r>
+              <a:t>]</a:t>
+            </a:r>
+          </a:p>
+          <a:p>
+            <a:pPr>
+              <a:spcAft>
+                <a:spcPts val="0"/>
+              </a:spcAft>
+              <a:defRPr sz="1100">
+                <a:solidFill>
+                  <a:srgbClr val="ABB2BF"/>
+                </a:solidFill>
+                <a:latin typeface="Consolas"/>
+              </a:defRPr>
+            </a:pPr>
+          </a:p>
+          <a:p>
+            <a:pPr>
+              <a:spcAft>
+                <a:spcPts val="0"/>
+              </a:spcAft>
+              <a:defRPr sz="1100">
+                <a:solidFill>
+                  <a:srgbClr val="ABB2BF"/>
+                </a:solidFill>
+                <a:latin typeface="Consolas"/>
+              </a:defRPr>
+            </a:pPr>
+            <a:r>
+              <a:t>TARGET_PDB = "6nzp"</a:t>
+            </a:r>
+          </a:p>
+          <a:p>
+            <a:pPr>
+              <a:spcAft>
+                <a:spcPts val="0"/>
+              </a:spcAft>
+              <a:defRPr sz="1100">
+                <a:solidFill>
+                  <a:srgbClr val="ABB2BF"/>
+                </a:solidFill>
+                <a:latin typeface="Consolas"/>
+              </a:defRPr>
+            </a:pPr>
+            <a:r>
+              <a:t>TARGET_CHAIN = "A"</a:t>
+            </a:r>
+          </a:p>
+        </p:txBody>
+      </p:sp>
+      <p:sp>
+        <p:nvSpPr>
+          <p:cNvPr id="7" name="Rounded Rectangle 6"/>
+          <p:cNvSpPr/>
+          <p:nvPr/>
+        </p:nvSpPr>
+        <p:spPr>
+          <a:xfrm>
+            <a:off x="6583680" y="1417320"/>
+            <a:ext cx="4846320" cy="2286000"/>
+          </a:xfrm>
+          <a:prstGeom prst="roundRect">
+            <a:avLst/>
+          </a:prstGeom>
+          <a:solidFill>
+            <a:srgbClr val="FFFFFF"/>
+          </a:solidFill>
+          <a:ln w="12700">
+            <a:solidFill>
+              <a:srgbClr val="E0E0E0"/>
+            </a:solidFill>
+          </a:ln>
+        </p:spPr>
+        <p:style>
+          <a:lnRef idx="1">
+            <a:schemeClr val="accent1"/>
+          </a:lnRef>
+          <a:fillRef idx="3">
+            <a:schemeClr val="accent1"/>
+          </a:fillRef>
+          <a:effectRef idx="2">
+            <a:schemeClr val="accent1"/>
+          </a:effectRef>
+          <a:fontRef idx="minor">
+            <a:schemeClr val="lt1"/>
+          </a:fontRef>
+        </p:style>
+        <p:txBody>
+          <a:bodyPr rtlCol="0" anchor="ctr"/>
+          <a:lstStyle/>
+          <a:p>
+            <a:pPr algn="ctr"/>
+          </a:p>
+        </p:txBody>
+      </p:sp>
+      <p:sp>
+        <p:nvSpPr>
+          <p:cNvPr id="8" name="TextBox 7"/>
+          <p:cNvSpPr txBox="1"/>
+          <p:nvPr/>
+        </p:nvSpPr>
+        <p:spPr>
+          <a:xfrm>
+            <a:off x="6858000" y="1554480"/>
+            <a:ext cx="4389120" cy="320040"/>
+          </a:xfrm>
+          <a:prstGeom prst="rect">
+            <a:avLst/>
+          </a:prstGeom>
+          <a:noFill/>
+        </p:spPr>
+        <p:txBody>
+          <a:bodyPr wrap="square">
+            <a:normAutofit/>
+          </a:bodyPr>
+          <a:lstStyle/>
+          <a:p>
+            <a:pPr algn="l">
+              <a:spcAft>
+                <a:spcPts val="200"/>
+              </a:spcAft>
+              <a:defRPr sz="1800" b="1">
+                <a:solidFill>
+                  <a:srgbClr val="212121"/>
+                </a:solidFill>
+                <a:latin typeface="맑은 고딕"/>
+              </a:defRPr>
+            </a:pPr>
+            <a:r>
+              <a:t>워크플로우</a:t>
+            </a:r>
+          </a:p>
+        </p:txBody>
+      </p:sp>
+      <p:sp>
+        <p:nvSpPr>
+          <p:cNvPr id="9" name="Rounded Rectangle 8"/>
+          <p:cNvSpPr/>
+          <p:nvPr/>
+        </p:nvSpPr>
+        <p:spPr>
+          <a:xfrm>
+            <a:off x="6858000" y="1965960"/>
+            <a:ext cx="320040" cy="274320"/>
+          </a:xfrm>
+          <a:prstGeom prst="roundRect">
+            <a:avLst/>
+          </a:prstGeom>
+          <a:solidFill>
+            <a:srgbClr val="1E88E5"/>
+          </a:solidFill>
+          <a:ln>
+            <a:noFill/>
+          </a:ln>
+        </p:spPr>
+        <p:style>
+          <a:lnRef idx="1">
+            <a:schemeClr val="accent1"/>
+          </a:lnRef>
+          <a:fillRef idx="3">
+            <a:schemeClr val="accent1"/>
+          </a:fillRef>
+          <a:effectRef idx="2">
+            <a:schemeClr val="accent1"/>
+          </a:effectRef>
+          <a:fontRef idx="minor">
+            <a:schemeClr val="lt1"/>
+          </a:fontRef>
+        </p:style>
+        <p:txBody>
+          <a:bodyPr rtlCol="0" anchor="ctr">
+            <a:normAutofit/>
+          </a:bodyPr>
+          <a:lstStyle/>
+          <a:p>
+            <a:pPr algn="ctr">
+              <a:defRPr sz="1000" b="1">
+                <a:solidFill>
+                  <a:srgbClr val="FFFFFF"/>
+                </a:solidFill>
+              </a:defRPr>
+            </a:pPr>
+            <a:r>
+              <a:t>1</a:t>
+            </a:r>
+          </a:p>
+        </p:txBody>
+      </p:sp>
+      <p:sp>
+        <p:nvSpPr>
+          <p:cNvPr id="10" name="TextBox 9"/>
+          <p:cNvSpPr txBox="1"/>
+          <p:nvPr/>
+        </p:nvSpPr>
+        <p:spPr>
+          <a:xfrm>
+            <a:off x="7315200" y="1965960"/>
+            <a:ext cx="3657600" cy="256032"/>
+          </a:xfrm>
+          <a:prstGeom prst="rect">
+            <a:avLst/>
+          </a:prstGeom>
+          <a:noFill/>
+        </p:spPr>
+        <p:txBody>
+          <a:bodyPr wrap="square">
+            <a:normAutofit/>
+          </a:bodyPr>
+          <a:lstStyle/>
+          <a:p>
+            <a:pPr algn="l">
+              <a:spcAft>
+                <a:spcPts val="200"/>
+              </a:spcAft>
+              <a:defRPr sz="1300" b="0">
+                <a:solidFill>
+                  <a:srgbClr val="212121"/>
+                </a:solidFill>
+                <a:latin typeface="맑은 고딕"/>
+              </a:defRPr>
+            </a:pPr>
+            <a:r>
+              <a:t>SMILES 시리즈 입력</a:t>
+            </a:r>
+          </a:p>
+        </p:txBody>
+      </p:sp>
+      <p:sp>
+        <p:nvSpPr>
+          <p:cNvPr id="11" name="Rounded Rectangle 10"/>
+          <p:cNvSpPr/>
+          <p:nvPr/>
+        </p:nvSpPr>
+        <p:spPr>
+          <a:xfrm>
+            <a:off x="6858000" y="2286000"/>
+            <a:ext cx="320040" cy="274320"/>
+          </a:xfrm>
+          <a:prstGeom prst="roundRect">
+            <a:avLst/>
+          </a:prstGeom>
+          <a:solidFill>
+            <a:srgbClr val="00897B"/>
+          </a:solidFill>
+          <a:ln>
+            <a:noFill/>
+          </a:ln>
+        </p:spPr>
+        <p:style>
+          <a:lnRef idx="1">
+            <a:schemeClr val="accent1"/>
+          </a:lnRef>
+          <a:fillRef idx="3">
+            <a:schemeClr val="accent1"/>
+          </a:fillRef>
+          <a:effectRef idx="2">
+            <a:schemeClr val="accent1"/>
+          </a:effectRef>
+          <a:fontRef idx="minor">
+            <a:schemeClr val="lt1"/>
+          </a:fontRef>
+        </p:style>
+        <p:txBody>
+          <a:bodyPr rtlCol="0" anchor="ctr">
+            <a:normAutofit/>
+          </a:bodyPr>
+          <a:lstStyle/>
+          <a:p>
+            <a:pPr algn="ctr">
+              <a:defRPr sz="1000" b="1">
+                <a:solidFill>
+                  <a:srgbClr val="FFFFFF"/>
+                </a:solidFill>
+              </a:defRPr>
+            </a:pPr>
+            <a:r>
+              <a:t>2</a:t>
+            </a:r>
+          </a:p>
+        </p:txBody>
+      </p:sp>
+      <p:sp>
+        <p:nvSpPr>
+          <p:cNvPr id="12" name="TextBox 11"/>
+          <p:cNvSpPr txBox="1"/>
+          <p:nvPr/>
+        </p:nvSpPr>
+        <p:spPr>
+          <a:xfrm>
+            <a:off x="7315200" y="2286000"/>
+            <a:ext cx="3657600" cy="256032"/>
+          </a:xfrm>
+          <a:prstGeom prst="rect">
+            <a:avLst/>
+          </a:prstGeom>
+          <a:noFill/>
+        </p:spPr>
+        <p:txBody>
+          <a:bodyPr wrap="square">
+            <a:normAutofit/>
+          </a:bodyPr>
+          <a:lstStyle/>
+          <a:p>
+            <a:pPr algn="l">
+              <a:spcAft>
+                <a:spcPts val="200"/>
+              </a:spcAft>
+              <a:defRPr sz="1300" b="0">
+                <a:solidFill>
+                  <a:srgbClr val="212121"/>
+                </a:solidFill>
+                <a:latin typeface="맑은 고딕"/>
+              </a:defRPr>
+            </a:pPr>
+            <a:r>
+              <a:t>3D 구조 자동 생성 (RDKit)</a:t>
+            </a:r>
+          </a:p>
+        </p:txBody>
+      </p:sp>
+      <p:sp>
+        <p:nvSpPr>
+          <p:cNvPr id="13" name="Rounded Rectangle 12"/>
+          <p:cNvSpPr/>
+          <p:nvPr/>
+        </p:nvSpPr>
+        <p:spPr>
+          <a:xfrm>
+            <a:off x="6858000" y="2606039"/>
+            <a:ext cx="320040" cy="274320"/>
+          </a:xfrm>
+          <a:prstGeom prst="roundRect">
+            <a:avLst/>
+          </a:prstGeom>
+          <a:solidFill>
+            <a:srgbClr val="FF8F00"/>
+          </a:solidFill>
+          <a:ln>
+            <a:noFill/>
+          </a:ln>
+        </p:spPr>
+        <p:style>
+          <a:lnRef idx="1">
+            <a:schemeClr val="accent1"/>
+          </a:lnRef>
+          <a:fillRef idx="3">
+            <a:schemeClr val="accent1"/>
+          </a:fillRef>
+          <a:effectRef idx="2">
+            <a:schemeClr val="accent1"/>
+          </a:effectRef>
+          <a:fontRef idx="minor">
+            <a:schemeClr val="lt1"/>
+          </a:fontRef>
+        </p:style>
+        <p:txBody>
+          <a:bodyPr rtlCol="0" anchor="ctr">
+            <a:normAutofit/>
+          </a:bodyPr>
+          <a:lstStyle/>
+          <a:p>
+            <a:pPr algn="ctr">
+              <a:defRPr sz="1000" b="1">
+                <a:solidFill>
+                  <a:srgbClr val="FFFFFF"/>
+                </a:solidFill>
+              </a:defRPr>
+            </a:pPr>
+            <a:r>
+              <a:t>3</a:t>
+            </a:r>
+          </a:p>
+        </p:txBody>
+      </p:sp>
+      <p:sp>
+        <p:nvSpPr>
+          <p:cNvPr id="14" name="TextBox 13"/>
+          <p:cNvSpPr txBox="1"/>
+          <p:nvPr/>
+        </p:nvSpPr>
+        <p:spPr>
+          <a:xfrm>
+            <a:off x="7315200" y="2606039"/>
+            <a:ext cx="3657600" cy="256032"/>
+          </a:xfrm>
+          <a:prstGeom prst="rect">
+            <a:avLst/>
+          </a:prstGeom>
+          <a:noFill/>
+        </p:spPr>
+        <p:txBody>
+          <a:bodyPr wrap="square">
+            <a:normAutofit/>
+          </a:bodyPr>
+          <a:lstStyle/>
+          <a:p>
+            <a:pPr algn="l">
+              <a:spcAft>
+                <a:spcPts val="200"/>
+              </a:spcAft>
+              <a:defRPr sz="1300" b="0">
+                <a:solidFill>
+                  <a:srgbClr val="212121"/>
+                </a:solidFill>
+                <a:latin typeface="맑은 고딕"/>
+              </a:defRPr>
+            </a:pPr>
+            <a:r>
+              <a:t>smina 일괄 도킹</a:t>
+            </a:r>
+          </a:p>
+        </p:txBody>
+      </p:sp>
+      <p:sp>
+        <p:nvSpPr>
+          <p:cNvPr id="15" name="Rounded Rectangle 14"/>
+          <p:cNvSpPr/>
+          <p:nvPr/>
+        </p:nvSpPr>
+        <p:spPr>
+          <a:xfrm>
+            <a:off x="6858000" y="2926080"/>
+            <a:ext cx="320040" cy="274320"/>
+          </a:xfrm>
+          <a:prstGeom prst="roundRect">
+            <a:avLst/>
+          </a:prstGeom>
+          <a:solidFill>
+            <a:srgbClr val="43A047"/>
+          </a:solidFill>
+          <a:ln>
+            <a:noFill/>
+          </a:ln>
+        </p:spPr>
+        <p:style>
+          <a:lnRef idx="1">
+            <a:schemeClr val="accent1"/>
+          </a:lnRef>
+          <a:fillRef idx="3">
+            <a:schemeClr val="accent1"/>
+          </a:fillRef>
+          <a:effectRef idx="2">
+            <a:schemeClr val="accent1"/>
+          </a:effectRef>
+          <a:fontRef idx="minor">
+            <a:schemeClr val="lt1"/>
+          </a:fontRef>
+        </p:style>
+        <p:txBody>
+          <a:bodyPr rtlCol="0" anchor="ctr">
+            <a:normAutofit/>
+          </a:bodyPr>
+          <a:lstStyle/>
+          <a:p>
+            <a:pPr algn="ctr">
+              <a:defRPr sz="1000" b="1">
+                <a:solidFill>
+                  <a:srgbClr val="FFFFFF"/>
+                </a:solidFill>
+              </a:defRPr>
+            </a:pPr>
+            <a:r>
+              <a:t>4</a:t>
+            </a:r>
+          </a:p>
+        </p:txBody>
+      </p:sp>
+      <p:sp>
+        <p:nvSpPr>
+          <p:cNvPr id="16" name="TextBox 15"/>
+          <p:cNvSpPr txBox="1"/>
+          <p:nvPr/>
+        </p:nvSpPr>
+        <p:spPr>
+          <a:xfrm>
+            <a:off x="7315200" y="2926080"/>
+            <a:ext cx="3657600" cy="256032"/>
+          </a:xfrm>
+          <a:prstGeom prst="rect">
+            <a:avLst/>
+          </a:prstGeom>
+          <a:noFill/>
+        </p:spPr>
+        <p:txBody>
+          <a:bodyPr wrap="square">
+            <a:normAutofit/>
+          </a:bodyPr>
+          <a:lstStyle/>
+          <a:p>
+            <a:pPr algn="l">
+              <a:spcAft>
+                <a:spcPts val="200"/>
+              </a:spcAft>
+              <a:defRPr sz="1300" b="0">
+                <a:solidFill>
+                  <a:srgbClr val="212121"/>
+                </a:solidFill>
+                <a:latin typeface="맑은 고딕"/>
+              </a:defRPr>
+            </a:pPr>
+            <a:r>
+              <a:t>SAR Table 자동 생성</a:t>
+            </a:r>
+          </a:p>
+        </p:txBody>
+      </p:sp>
+      <p:sp>
+        <p:nvSpPr>
+          <p:cNvPr id="17" name="Rounded Rectangle 16"/>
+          <p:cNvSpPr/>
+          <p:nvPr/>
+        </p:nvSpPr>
+        <p:spPr>
+          <a:xfrm>
+            <a:off x="6858000" y="3246120"/>
+            <a:ext cx="320040" cy="274320"/>
+          </a:xfrm>
+          <a:prstGeom prst="roundRect">
+            <a:avLst/>
+          </a:prstGeom>
+          <a:solidFill>
+            <a:srgbClr val="8E24AA"/>
+          </a:solidFill>
+          <a:ln>
+            <a:noFill/>
+          </a:ln>
+        </p:spPr>
+        <p:style>
+          <a:lnRef idx="1">
+            <a:schemeClr val="accent1"/>
+          </a:lnRef>
+          <a:fillRef idx="3">
+            <a:schemeClr val="accent1"/>
+          </a:fillRef>
+          <a:effectRef idx="2">
+            <a:schemeClr val="accent1"/>
+          </a:effectRef>
+          <a:fontRef idx="minor">
+            <a:schemeClr val="lt1"/>
+          </a:fontRef>
+        </p:style>
+        <p:txBody>
+          <a:bodyPr rtlCol="0" anchor="ctr">
+            <a:normAutofit/>
+          </a:bodyPr>
+          <a:lstStyle/>
+          <a:p>
+            <a:pPr algn="ctr">
+              <a:defRPr sz="1000" b="1">
+                <a:solidFill>
+                  <a:srgbClr val="FFFFFF"/>
+                </a:solidFill>
+              </a:defRPr>
+            </a:pPr>
+            <a:r>
+              <a:t>5</a:t>
+            </a:r>
+          </a:p>
+        </p:txBody>
+      </p:sp>
+      <p:sp>
+        <p:nvSpPr>
+          <p:cNvPr id="18" name="TextBox 17"/>
+          <p:cNvSpPr txBox="1"/>
+          <p:nvPr/>
+        </p:nvSpPr>
+        <p:spPr>
+          <a:xfrm>
+            <a:off x="7315200" y="3246120"/>
+            <a:ext cx="3657600" cy="256032"/>
+          </a:xfrm>
+          <a:prstGeom prst="rect">
+            <a:avLst/>
+          </a:prstGeom>
+          <a:noFill/>
+        </p:spPr>
+        <p:txBody>
+          <a:bodyPr wrap="square">
+            <a:normAutofit/>
+          </a:bodyPr>
+          <a:lstStyle/>
+          <a:p>
+            <a:pPr algn="l">
+              <a:spcAft>
+                <a:spcPts val="200"/>
+              </a:spcAft>
+              <a:defRPr sz="1300" b="0">
+                <a:solidFill>
+                  <a:srgbClr val="212121"/>
+                </a:solidFill>
+                <a:latin typeface="맑은 고딕"/>
+              </a:defRPr>
+            </a:pPr>
+            <a:r>
+              <a:t>SDF/CSV/PML 내보내기</a:t>
+            </a:r>
+          </a:p>
+        </p:txBody>
+      </p:sp>
+      <p:sp>
+        <p:nvSpPr>
+          <p:cNvPr id="19" name="Rounded Rectangle 18"/>
+          <p:cNvSpPr/>
+          <p:nvPr/>
+        </p:nvSpPr>
+        <p:spPr>
+          <a:xfrm>
+            <a:off x="6583680" y="3886200"/>
+            <a:ext cx="4846320" cy="2560320"/>
+          </a:xfrm>
+          <a:prstGeom prst="roundRect">
+            <a:avLst/>
+          </a:prstGeom>
+          <a:solidFill>
+            <a:srgbClr val="FFF8E1"/>
+          </a:solidFill>
+          <a:ln w="12700">
+            <a:solidFill>
+              <a:srgbClr val="FF8F00"/>
+            </a:solidFill>
+          </a:ln>
+        </p:spPr>
+        <p:style>
+          <a:lnRef idx="1">
+            <a:schemeClr val="accent1"/>
+          </a:lnRef>
+          <a:fillRef idx="3">
+            <a:schemeClr val="accent1"/>
+          </a:fillRef>
+          <a:effectRef idx="2">
+            <a:schemeClr val="accent1"/>
+          </a:effectRef>
+          <a:fontRef idx="minor">
+            <a:schemeClr val="lt1"/>
+          </a:fontRef>
+        </p:style>
+        <p:txBody>
+          <a:bodyPr rtlCol="0" anchor="ctr"/>
+          <a:lstStyle/>
+          <a:p>
+            <a:pPr algn="ctr"/>
+          </a:p>
+        </p:txBody>
+      </p:sp>
+      <p:sp>
+        <p:nvSpPr>
+          <p:cNvPr id="20" name="TextBox 19"/>
+          <p:cNvSpPr txBox="1"/>
+          <p:nvPr/>
+        </p:nvSpPr>
+        <p:spPr>
+          <a:xfrm>
+            <a:off x="6858000" y="4023360"/>
+            <a:ext cx="4389120" cy="320040"/>
+          </a:xfrm>
+          <a:prstGeom prst="rect">
+            <a:avLst/>
+          </a:prstGeom>
+          <a:noFill/>
+        </p:spPr>
+        <p:txBody>
+          <a:bodyPr wrap="square">
+            <a:normAutofit/>
+          </a:bodyPr>
+          <a:lstStyle/>
+          <a:p>
+            <a:pPr algn="l">
+              <a:spcAft>
+                <a:spcPts val="200"/>
+              </a:spcAft>
+              <a:defRPr sz="1600" b="1">
+                <a:solidFill>
+                  <a:srgbClr val="FF8F00"/>
+                </a:solidFill>
+                <a:latin typeface="맑은 고딕"/>
+              </a:defRPr>
+            </a:pPr>
+            <a:r>
+              <a:t>SMILES 입수 방법</a:t>
+            </a:r>
+          </a:p>
+        </p:txBody>
+      </p:sp>
+      <p:sp>
+        <p:nvSpPr>
+          <p:cNvPr id="21" name="TextBox 20"/>
+          <p:cNvSpPr txBox="1"/>
+          <p:nvPr/>
+        </p:nvSpPr>
+        <p:spPr>
+          <a:xfrm>
+            <a:off x="6858000" y="4389120"/>
+            <a:ext cx="4389120" cy="1828800"/>
+          </a:xfrm>
+          <a:prstGeom prst="rect">
+            <a:avLst/>
+          </a:prstGeom>
+          <a:noFill/>
+        </p:spPr>
+        <p:txBody>
+          <a:bodyPr wrap="square">
+            <a:normAutofit/>
+          </a:bodyPr>
+          <a:lstStyle/>
+          <a:p>
+            <a:pPr algn="l">
+              <a:spcAft>
+                <a:spcPts val="200"/>
+              </a:spcAft>
+              <a:defRPr sz="1200" b="0">
+                <a:solidFill>
+                  <a:srgbClr val="212121"/>
+                </a:solidFill>
+                <a:latin typeface="맑은 고딕"/>
+              </a:defRPr>
+            </a:pPr>
+            <a:r>
+              <a:t>• ChEMBL: 기존 활성 화합물 검색</a:t>
+            </a:r>
+          </a:p>
+          <a:p>
+            <a:pPr algn="l">
+              <a:spcAft>
+                <a:spcPts val="200"/>
+              </a:spcAft>
+              <a:defRPr sz="1200" b="0">
+                <a:solidFill>
+                  <a:srgbClr val="212121"/>
+                </a:solidFill>
+                <a:latin typeface="맑은 고딕"/>
+              </a:defRPr>
+            </a:pPr>
+            <a:r>
+              <a:t>• PubChem: 1억+ 공개 화합물</a:t>
+            </a:r>
+          </a:p>
+          <a:p>
+            <a:pPr algn="l">
+              <a:spcAft>
+                <a:spcPts val="200"/>
+              </a:spcAft>
+              <a:defRPr sz="1200" b="0">
+                <a:solidFill>
+                  <a:srgbClr val="212121"/>
+                </a:solidFill>
+                <a:latin typeface="맑은 고딕"/>
+              </a:defRPr>
+            </a:pPr>
+            <a:r>
+              <a:t>• ZINC: 구매 가능 화합물 (2.3억+)</a:t>
+            </a:r>
+          </a:p>
+          <a:p>
+            <a:pPr algn="l">
+              <a:spcAft>
+                <a:spcPts val="200"/>
+              </a:spcAft>
+              <a:defRPr sz="1200" b="0">
+                <a:solidFill>
+                  <a:srgbClr val="212121"/>
+                </a:solidFill>
+                <a:latin typeface="맑은 고딕"/>
+              </a:defRPr>
+            </a:pPr>
+            <a:r>
+              <a:t>• DataWarrior: 직접 그리기 → SMILES 복사</a:t>
+            </a:r>
+          </a:p>
+          <a:p>
+            <a:pPr algn="l">
+              <a:spcAft>
+                <a:spcPts val="200"/>
+              </a:spcAft>
+              <a:defRPr sz="1200" b="0">
+                <a:solidFill>
+                  <a:srgbClr val="212121"/>
+                </a:solidFill>
+                <a:latin typeface="맑은 고딕"/>
+              </a:defRPr>
+            </a:pPr>
+            <a:r>
+              <a:t>• CSV로 한꺼번에 로드 가능:</a:t>
+            </a:r>
+          </a:p>
+          <a:p>
+            <a:pPr algn="l">
+              <a:spcAft>
+                <a:spcPts val="200"/>
+              </a:spcAft>
+              <a:defRPr sz="1200" b="0">
+                <a:solidFill>
+                  <a:srgbClr val="212121"/>
+                </a:solidFill>
+                <a:latin typeface="맑은 고딕"/>
+              </a:defRPr>
+            </a:pPr>
+            <a:r>
+              <a:t>  df = pd.read_csv("my_ligands.csv")</a:t>
+            </a:r>
+          </a:p>
+        </p:txBody>
+      </p:sp>
+    </p:spTree>
+  </p:cSld>
+  <p:clrMapOvr>
+    <a:masterClrMapping/>
+  </p:clrMapOvr>
+</p:sld>
+</file>
+
+<file path=ppt/slides/slide17.xml><?xml version="1.0" encoding="utf-8"?>
+<p:sld xmlns:a="http://schemas.openxmlformats.org/drawingml/2006/main" xmlns:p="http://schemas.openxmlformats.org/presentationml/2006/main" xmlns:r="http://schemas.openxmlformats.org/officeDocument/2006/relationships">
+  <p:cSld>
+    <p:spTree>
+      <p:nvGrpSpPr>
+        <p:cNvPr id="1" name=""/>
+        <p:cNvGrpSpPr/>
+        <p:nvPr/>
+      </p:nvGrpSpPr>
+      <p:grpSpPr/>
+      <p:sp>
+        <p:nvSpPr>
+          <p:cNvPr id="2" name="Rectangle 1"/>
+          <p:cNvSpPr/>
+          <p:nvPr/>
+        </p:nvSpPr>
+        <p:spPr>
+          <a:xfrm>
+            <a:off x="0" y="0"/>
+            <a:ext cx="12191695" cy="6858000"/>
+          </a:xfrm>
+          <a:prstGeom prst="rect">
+            <a:avLst/>
+          </a:prstGeom>
+          <a:solidFill>
+            <a:srgbClr val="FAFAF8"/>
+          </a:solidFill>
+          <a:ln>
+            <a:noFill/>
+          </a:ln>
+        </p:spPr>
+        <p:style>
+          <a:lnRef idx="1">
+            <a:schemeClr val="accent1"/>
+          </a:lnRef>
+          <a:fillRef idx="3">
+            <a:schemeClr val="accent1"/>
+          </a:fillRef>
+          <a:effectRef idx="2">
+            <a:schemeClr val="accent1"/>
+          </a:effectRef>
+          <a:fontRef idx="minor">
+            <a:schemeClr val="lt1"/>
+          </a:fontRef>
+        </p:style>
+        <p:txBody>
+          <a:bodyPr rtlCol="0" anchor="ctr"/>
+          <a:lstStyle/>
+          <a:p>
+            <a:pPr algn="ctr"/>
+          </a:p>
+        </p:txBody>
+      </p:sp>
+      <p:sp>
+        <p:nvSpPr>
+          <p:cNvPr id="3" name="TextBox 2"/>
+          <p:cNvSpPr txBox="1"/>
+          <p:nvPr/>
+        </p:nvSpPr>
+        <p:spPr>
+          <a:xfrm>
+            <a:off x="731520" y="365760"/>
+            <a:ext cx="10058400" cy="640080"/>
+          </a:xfrm>
+          <a:prstGeom prst="rect">
+            <a:avLst/>
+          </a:prstGeom>
+          <a:noFill/>
+        </p:spPr>
+        <p:txBody>
+          <a:bodyPr wrap="square">
+            <a:normAutofit/>
+          </a:bodyPr>
+          <a:lstStyle/>
+          <a:p>
+            <a:pPr algn="l">
+              <a:spcAft>
+                <a:spcPts val="200"/>
+              </a:spcAft>
+              <a:defRPr sz="3200" b="1">
+                <a:solidFill>
+                  <a:srgbClr val="212121"/>
+                </a:solidFill>
+                <a:latin typeface="맑은 고딕"/>
+              </a:defRPr>
+            </a:pPr>
+            <a:r>
+              <a:t>Step 5 (계속): SAR Table 결과 &amp; 내보내기</a:t>
+            </a:r>
+          </a:p>
+        </p:txBody>
+      </p:sp>
+      <p:sp>
+        <p:nvSpPr>
+          <p:cNvPr id="4" name="TextBox 3"/>
+          <p:cNvSpPr txBox="1"/>
+          <p:nvPr/>
+        </p:nvSpPr>
+        <p:spPr>
+          <a:xfrm>
+            <a:off x="731520" y="914400"/>
+            <a:ext cx="10058400" cy="320040"/>
+          </a:xfrm>
+          <a:prstGeom prst="rect">
+            <a:avLst/>
+          </a:prstGeom>
+          <a:noFill/>
+        </p:spPr>
+        <p:txBody>
+          <a:bodyPr wrap="square">
+            <a:normAutofit/>
+          </a:bodyPr>
+          <a:lstStyle/>
+          <a:p>
+            <a:pPr algn="l">
+              <a:spcAft>
+                <a:spcPts val="200"/>
+              </a:spcAft>
+              <a:defRPr sz="1300" b="0">
+                <a:solidFill>
+                  <a:srgbClr val="00897B"/>
+                </a:solidFill>
+                <a:latin typeface="맑은 고딕"/>
+              </a:defRPr>
+            </a:pPr>
+            <a:r>
+              <a:t>R-group별 스코어 비교 → 구조-활성 관계 도출</a:t>
+            </a:r>
+          </a:p>
+        </p:txBody>
+      </p:sp>
+      <p:sp>
+        <p:nvSpPr>
+          <p:cNvPr id="5" name="TextBox 4"/>
+          <p:cNvSpPr txBox="1"/>
+          <p:nvPr/>
+        </p:nvSpPr>
+        <p:spPr>
+          <a:xfrm>
+            <a:off x="731520" y="1417320"/>
+            <a:ext cx="5486400" cy="320040"/>
+          </a:xfrm>
+          <a:prstGeom prst="rect">
+            <a:avLst/>
+          </a:prstGeom>
+          <a:noFill/>
+        </p:spPr>
+        <p:txBody>
+          <a:bodyPr wrap="square">
+            <a:normAutofit/>
+          </a:bodyPr>
+          <a:lstStyle/>
+          <a:p>
+            <a:pPr algn="l">
+              <a:spcAft>
+                <a:spcPts val="200"/>
+              </a:spcAft>
+              <a:defRPr sz="1800" b="1">
+                <a:solidFill>
+                  <a:srgbClr val="212121"/>
+                </a:solidFill>
+                <a:latin typeface="맑은 고딕"/>
+              </a:defRPr>
+            </a:pPr>
+            <a:r>
+              <a:t>SAR Table (자동 생성)</a:t>
+            </a:r>
+          </a:p>
+        </p:txBody>
+      </p:sp>
+      <p:sp>
+        <p:nvSpPr>
+          <p:cNvPr id="6" name="Rounded Rectangle 5"/>
+          <p:cNvSpPr/>
+          <p:nvPr/>
+        </p:nvSpPr>
+        <p:spPr>
+          <a:xfrm>
+            <a:off x="731520" y="1783080"/>
+            <a:ext cx="914400" cy="320040"/>
+          </a:xfrm>
+          <a:prstGeom prst="roundRect">
+            <a:avLst/>
+          </a:prstGeom>
+          <a:solidFill>
+            <a:srgbClr val="00897B"/>
+          </a:solidFill>
+          <a:ln>
+            <a:noFill/>
+          </a:ln>
+        </p:spPr>
+        <p:style>
+          <a:lnRef idx="1">
+            <a:schemeClr val="accent1"/>
+          </a:lnRef>
+          <a:fillRef idx="3">
+            <a:schemeClr val="accent1"/>
+          </a:fillRef>
+          <a:effectRef idx="2">
+            <a:schemeClr val="accent1"/>
+          </a:effectRef>
+          <a:fontRef idx="minor">
+            <a:schemeClr val="lt1"/>
+          </a:fontRef>
+        </p:style>
+        <p:txBody>
+          <a:bodyPr rtlCol="0" anchor="ctr">
+            <a:normAutofit/>
+          </a:bodyPr>
+          <a:lstStyle/>
+          <a:p>
+            <a:pPr algn="ctr">
+              <a:defRPr sz="900" b="1">
+                <a:solidFill>
+                  <a:srgbClr val="FFFFFF"/>
+                </a:solidFill>
+              </a:defRPr>
+            </a:pPr>
+            <a:r>
+              <a:t>Name</a:t>
+            </a:r>
+          </a:p>
+        </p:txBody>
+      </p:sp>
+      <p:sp>
+        <p:nvSpPr>
+          <p:cNvPr id="7" name="Rounded Rectangle 6"/>
+          <p:cNvSpPr/>
+          <p:nvPr/>
+        </p:nvSpPr>
+        <p:spPr>
+          <a:xfrm>
+            <a:off x="1645920" y="1783080"/>
+            <a:ext cx="731520" cy="320040"/>
+          </a:xfrm>
+          <a:prstGeom prst="roundRect">
+            <a:avLst/>
+          </a:prstGeom>
+          <a:solidFill>
+            <a:srgbClr val="00897B"/>
+          </a:solidFill>
+          <a:ln>
+            <a:noFill/>
+          </a:ln>
+        </p:spPr>
+        <p:style>
+          <a:lnRef idx="1">
+            <a:schemeClr val="accent1"/>
+          </a:lnRef>
+          <a:fillRef idx="3">
+            <a:schemeClr val="accent1"/>
+          </a:fillRef>
+          <a:effectRef idx="2">
+            <a:schemeClr val="accent1"/>
+          </a:effectRef>
+          <a:fontRef idx="minor">
+            <a:schemeClr val="lt1"/>
+          </a:fontRef>
+        </p:style>
+        <p:txBody>
+          <a:bodyPr rtlCol="0" anchor="ctr">
+            <a:normAutofit/>
+          </a:bodyPr>
+          <a:lstStyle/>
+          <a:p>
+            <a:pPr algn="ctr">
+              <a:defRPr sz="900" b="1">
+                <a:solidFill>
+                  <a:srgbClr val="FFFFFF"/>
+                </a:solidFill>
+              </a:defRPr>
+            </a:pPr>
+            <a:r>
+              <a:t>R1</a:t>
+            </a:r>
+          </a:p>
+        </p:txBody>
+      </p:sp>
+      <p:sp>
+        <p:nvSpPr>
+          <p:cNvPr id="8" name="Rounded Rectangle 7"/>
+          <p:cNvSpPr/>
+          <p:nvPr/>
+        </p:nvSpPr>
+        <p:spPr>
+          <a:xfrm>
+            <a:off x="2377440" y="1783080"/>
+            <a:ext cx="731520" cy="320040"/>
+          </a:xfrm>
+          <a:prstGeom prst="roundRect">
+            <a:avLst/>
+          </a:prstGeom>
+          <a:solidFill>
+            <a:srgbClr val="00897B"/>
+          </a:solidFill>
+          <a:ln>
+            <a:noFill/>
+          </a:ln>
+        </p:spPr>
+        <p:style>
+          <a:lnRef idx="1">
+            <a:schemeClr val="accent1"/>
+          </a:lnRef>
+          <a:fillRef idx="3">
+            <a:schemeClr val="accent1"/>
+          </a:fillRef>
+          <a:effectRef idx="2">
+            <a:schemeClr val="accent1"/>
+          </a:effectRef>
+          <a:fontRef idx="minor">
+            <a:schemeClr val="lt1"/>
+          </a:fontRef>
+        </p:style>
+        <p:txBody>
+          <a:bodyPr rtlCol="0" anchor="ctr">
+            <a:normAutofit/>
+          </a:bodyPr>
+          <a:lstStyle/>
+          <a:p>
+            <a:pPr algn="ctr">
+              <a:defRPr sz="900" b="1">
+                <a:solidFill>
+                  <a:srgbClr val="FFFFFF"/>
+                </a:solidFill>
+              </a:defRPr>
+            </a:pPr>
+            <a:r>
+              <a:t>Score</a:t>
+            </a:r>
+          </a:p>
+        </p:txBody>
+      </p:sp>
+      <p:sp>
+        <p:nvSpPr>
+          <p:cNvPr id="9" name="Rounded Rectangle 8"/>
+          <p:cNvSpPr/>
+          <p:nvPr/>
+        </p:nvSpPr>
+        <p:spPr>
+          <a:xfrm>
+            <a:off x="3108960" y="1783080"/>
+            <a:ext cx="640080" cy="320040"/>
+          </a:xfrm>
+          <a:prstGeom prst="roundRect">
+            <a:avLst/>
+          </a:prstGeom>
+          <a:solidFill>
+            <a:srgbClr val="00897B"/>
+          </a:solidFill>
+          <a:ln>
+            <a:noFill/>
+          </a:ln>
+        </p:spPr>
+        <p:style>
+          <a:lnRef idx="1">
+            <a:schemeClr val="accent1"/>
+          </a:lnRef>
+          <a:fillRef idx="3">
+            <a:schemeClr val="accent1"/>
+          </a:fillRef>
+          <a:effectRef idx="2">
+            <a:schemeClr val="accent1"/>
+          </a:effectRef>
+          <a:fontRef idx="minor">
+            <a:schemeClr val="lt1"/>
+          </a:fontRef>
+        </p:style>
+        <p:txBody>
+          <a:bodyPr rtlCol="0" anchor="ctr">
+            <a:normAutofit/>
+          </a:bodyPr>
+          <a:lstStyle/>
+          <a:p>
+            <a:pPr algn="ctr">
+              <a:defRPr sz="900" b="1">
+                <a:solidFill>
+                  <a:srgbClr val="FFFFFF"/>
+                </a:solidFill>
+              </a:defRPr>
+            </a:pPr>
+            <a:r>
+              <a:t>MW</a:t>
+            </a:r>
+          </a:p>
+        </p:txBody>
+      </p:sp>
+      <p:sp>
+        <p:nvSpPr>
+          <p:cNvPr id="10" name="Rounded Rectangle 9"/>
+          <p:cNvSpPr/>
+          <p:nvPr/>
+        </p:nvSpPr>
+        <p:spPr>
+          <a:xfrm>
+            <a:off x="3749040" y="1783080"/>
+            <a:ext cx="640080" cy="320040"/>
+          </a:xfrm>
+          <a:prstGeom prst="roundRect">
+            <a:avLst/>
+          </a:prstGeom>
+          <a:solidFill>
+            <a:srgbClr val="00897B"/>
+          </a:solidFill>
+          <a:ln>
+            <a:noFill/>
+          </a:ln>
+        </p:spPr>
+        <p:style>
+          <a:lnRef idx="1">
+            <a:schemeClr val="accent1"/>
+          </a:lnRef>
+          <a:fillRef idx="3">
+            <a:schemeClr val="accent1"/>
+          </a:fillRef>
+          <a:effectRef idx="2">
+            <a:schemeClr val="accent1"/>
+          </a:effectRef>
+          <a:fontRef idx="minor">
+            <a:schemeClr val="lt1"/>
+          </a:fontRef>
+        </p:style>
+        <p:txBody>
+          <a:bodyPr rtlCol="0" anchor="ctr">
+            <a:normAutofit/>
+          </a:bodyPr>
+          <a:lstStyle/>
+          <a:p>
+            <a:pPr algn="ctr">
+              <a:defRPr sz="900" b="1">
+                <a:solidFill>
+                  <a:srgbClr val="FFFFFF"/>
+                </a:solidFill>
+              </a:defRPr>
+            </a:pPr>
+            <a:r>
+              <a:t>cLogP</a:t>
+            </a:r>
+          </a:p>
+        </p:txBody>
+      </p:sp>
+      <p:sp>
+        <p:nvSpPr>
+          <p:cNvPr id="11" name="Rounded Rectangle 10"/>
+          <p:cNvSpPr/>
+          <p:nvPr/>
+        </p:nvSpPr>
+        <p:spPr>
+          <a:xfrm>
+            <a:off x="4389120" y="1783080"/>
+            <a:ext cx="548640" cy="320040"/>
+          </a:xfrm>
+          <a:prstGeom prst="roundRect">
+            <a:avLst/>
+          </a:prstGeom>
+          <a:solidFill>
+            <a:srgbClr val="00897B"/>
+          </a:solidFill>
+          <a:ln>
+            <a:noFill/>
+          </a:ln>
+        </p:spPr>
+        <p:style>
+          <a:lnRef idx="1">
+            <a:schemeClr val="accent1"/>
+          </a:lnRef>
+          <a:fillRef idx="3">
+            <a:schemeClr val="accent1"/>
+          </a:fillRef>
+          <a:effectRef idx="2">
+            <a:schemeClr val="accent1"/>
+          </a:effectRef>
+          <a:fontRef idx="minor">
+            <a:schemeClr val="lt1"/>
+          </a:fontRef>
+        </p:style>
+        <p:txBody>
+          <a:bodyPr rtlCol="0" anchor="ctr">
+            <a:normAutofit/>
+          </a:bodyPr>
+          <a:lstStyle/>
+          <a:p>
+            <a:pPr algn="ctr">
+              <a:defRPr sz="900" b="1">
+                <a:solidFill>
+                  <a:srgbClr val="FFFFFF"/>
+                </a:solidFill>
+              </a:defRPr>
+            </a:pPr>
+            <a:r>
+              <a:t>LE</a:t>
+            </a:r>
+          </a:p>
+        </p:txBody>
+      </p:sp>
+      <p:sp>
+        <p:nvSpPr>
+          <p:cNvPr id="12" name="Rounded Rectangle 11"/>
+          <p:cNvSpPr/>
+          <p:nvPr/>
+        </p:nvSpPr>
+        <p:spPr>
+          <a:xfrm>
+            <a:off x="4937760" y="1783080"/>
+            <a:ext cx="640080" cy="320040"/>
+          </a:xfrm>
+          <a:prstGeom prst="roundRect">
+            <a:avLst/>
+          </a:prstGeom>
+          <a:solidFill>
+            <a:srgbClr val="00897B"/>
+          </a:solidFill>
+          <a:ln>
+            <a:noFill/>
+          </a:ln>
+        </p:spPr>
+        <p:style>
+          <a:lnRef idx="1">
+            <a:schemeClr val="accent1"/>
+          </a:lnRef>
+          <a:fillRef idx="3">
+            <a:schemeClr val="accent1"/>
+          </a:fillRef>
+          <a:effectRef idx="2">
+            <a:schemeClr val="accent1"/>
+          </a:effectRef>
+          <a:fontRef idx="minor">
+            <a:schemeClr val="lt1"/>
+          </a:fontRef>
+        </p:style>
+        <p:txBody>
+          <a:bodyPr rtlCol="0" anchor="ctr">
+            <a:normAutofit/>
+          </a:bodyPr>
+          <a:lstStyle/>
+          <a:p>
+            <a:pPr algn="ctr">
+              <a:defRPr sz="900" b="1">
+                <a:solidFill>
+                  <a:srgbClr val="FFFFFF"/>
+                </a:solidFill>
+              </a:defRPr>
+            </a:pPr>
+            <a:r>
+              <a:t>Lipinski</a:t>
+            </a:r>
+          </a:p>
+        </p:txBody>
+      </p:sp>
+      <p:sp>
+        <p:nvSpPr>
+          <p:cNvPr id="13" name="Rounded Rectangle 12"/>
+          <p:cNvSpPr/>
+          <p:nvPr/>
+        </p:nvSpPr>
+        <p:spPr>
+          <a:xfrm>
+            <a:off x="731520" y="2130552"/>
+            <a:ext cx="914400" cy="274320"/>
+          </a:xfrm>
+          <a:prstGeom prst="roundRect">
+            <a:avLst/>
+          </a:prstGeom>
+          <a:solidFill>
+            <a:srgbClr val="E8F5E9"/>
+          </a:solidFill>
+          <a:ln w="12700">
+            <a:solidFill>
+              <a:srgbClr val="E0E0E0"/>
+            </a:solidFill>
+          </a:ln>
+        </p:spPr>
+        <p:style>
+          <a:lnRef idx="1">
+            <a:schemeClr val="accent1"/>
+          </a:lnRef>
+          <a:fillRef idx="3">
+            <a:schemeClr val="accent1"/>
+          </a:fillRef>
+          <a:effectRef idx="2">
+            <a:schemeClr val="accent1"/>
+          </a:effectRef>
+          <a:fontRef idx="minor">
+            <a:schemeClr val="lt1"/>
+          </a:fontRef>
+        </p:style>
+        <p:txBody>
+          <a:bodyPr rtlCol="0" anchor="ctr">
+            <a:normAutofit/>
+          </a:bodyPr>
+          <a:lstStyle/>
+          <a:p>
+            <a:pPr algn="ctr">
+              <a:defRPr sz="900"/>
+            </a:pPr>
+            <a:r>
+              <a:t>Cpd_02_F</a:t>
+            </a:r>
+          </a:p>
+        </p:txBody>
+      </p:sp>
+      <p:sp>
+        <p:nvSpPr>
+          <p:cNvPr id="14" name="Rounded Rectangle 13"/>
+          <p:cNvSpPr/>
+          <p:nvPr/>
+        </p:nvSpPr>
+        <p:spPr>
+          <a:xfrm>
+            <a:off x="1645920" y="2130552"/>
+            <a:ext cx="731520" cy="274320"/>
+          </a:xfrm>
+          <a:prstGeom prst="roundRect">
+            <a:avLst/>
+          </a:prstGeom>
+          <a:solidFill>
+            <a:srgbClr val="E8F5E9"/>
+          </a:solidFill>
+          <a:ln w="12700">
+            <a:solidFill>
+              <a:srgbClr val="E0E0E0"/>
+            </a:solidFill>
+          </a:ln>
+        </p:spPr>
+        <p:style>
+          <a:lnRef idx="1">
+            <a:schemeClr val="accent1"/>
+          </a:lnRef>
+          <a:fillRef idx="3">
+            <a:schemeClr val="accent1"/>
+          </a:fillRef>
+          <a:effectRef idx="2">
+            <a:schemeClr val="accent1"/>
+          </a:effectRef>
+          <a:fontRef idx="minor">
+            <a:schemeClr val="lt1"/>
+          </a:fontRef>
+        </p:style>
+        <p:txBody>
+          <a:bodyPr rtlCol="0" anchor="ctr">
+            <a:normAutofit/>
+          </a:bodyPr>
+          <a:lstStyle/>
+          <a:p>
+            <a:pPr algn="ctr">
+              <a:defRPr sz="900"/>
+            </a:pPr>
+            <a:r>
+              <a:t>—F</a:t>
+            </a:r>
+          </a:p>
+        </p:txBody>
+      </p:sp>
+      <p:sp>
+        <p:nvSpPr>
+          <p:cNvPr id="15" name="Rounded Rectangle 14"/>
+          <p:cNvSpPr/>
+          <p:nvPr/>
+        </p:nvSpPr>
+        <p:spPr>
+          <a:xfrm>
+            <a:off x="2377440" y="2130552"/>
+            <a:ext cx="731520" cy="274320"/>
+          </a:xfrm>
+          <a:prstGeom prst="roundRect">
+            <a:avLst/>
+          </a:prstGeom>
+          <a:solidFill>
+            <a:srgbClr val="E8F5E9"/>
+          </a:solidFill>
+          <a:ln w="12700">
+            <a:solidFill>
+              <a:srgbClr val="E0E0E0"/>
+            </a:solidFill>
+          </a:ln>
+        </p:spPr>
+        <p:style>
+          <a:lnRef idx="1">
+            <a:schemeClr val="accent1"/>
+          </a:lnRef>
+          <a:fillRef idx="3">
+            <a:schemeClr val="accent1"/>
+          </a:fillRef>
+          <a:effectRef idx="2">
+            <a:schemeClr val="accent1"/>
+          </a:effectRef>
+          <a:fontRef idx="minor">
+            <a:schemeClr val="lt1"/>
+          </a:fontRef>
+        </p:style>
+        <p:txBody>
+          <a:bodyPr rtlCol="0" anchor="ctr">
+            <a:normAutofit/>
+          </a:bodyPr>
+          <a:lstStyle/>
+          <a:p>
+            <a:pPr algn="ctr">
+              <a:defRPr sz="900" b="1"/>
+            </a:pPr>
+            <a:r>
+              <a:t>-8.5</a:t>
+            </a:r>
+          </a:p>
+        </p:txBody>
+      </p:sp>
+      <p:sp>
+        <p:nvSpPr>
+          <p:cNvPr id="16" name="Rounded Rectangle 15"/>
+          <p:cNvSpPr/>
+          <p:nvPr/>
+        </p:nvSpPr>
+        <p:spPr>
+          <a:xfrm>
+            <a:off x="3108960" y="2130552"/>
+            <a:ext cx="640080" cy="274320"/>
+          </a:xfrm>
+          <a:prstGeom prst="roundRect">
+            <a:avLst/>
+          </a:prstGeom>
+          <a:solidFill>
+            <a:srgbClr val="E8F5E9"/>
+          </a:solidFill>
+          <a:ln w="12700">
+            <a:solidFill>
+              <a:srgbClr val="E0E0E0"/>
+            </a:solidFill>
+          </a:ln>
+        </p:spPr>
+        <p:style>
+          <a:lnRef idx="1">
+            <a:schemeClr val="accent1"/>
+          </a:lnRef>
+          <a:fillRef idx="3">
+            <a:schemeClr val="accent1"/>
+          </a:fillRef>
+          <a:effectRef idx="2">
+            <a:schemeClr val="accent1"/>
+          </a:effectRef>
+          <a:fontRef idx="minor">
+            <a:schemeClr val="lt1"/>
+          </a:fontRef>
+        </p:style>
+        <p:txBody>
+          <a:bodyPr rtlCol="0" anchor="ctr">
+            <a:normAutofit/>
+          </a:bodyPr>
+          <a:lstStyle/>
+          <a:p>
+            <a:pPr algn="ctr">
+              <a:defRPr sz="900"/>
+            </a:pPr>
+            <a:r>
+              <a:t>236</a:t>
+            </a:r>
+          </a:p>
+        </p:txBody>
+      </p:sp>
+      <p:sp>
+        <p:nvSpPr>
+          <p:cNvPr id="17" name="Rounded Rectangle 16"/>
+          <p:cNvSpPr/>
+          <p:nvPr/>
+        </p:nvSpPr>
+        <p:spPr>
+          <a:xfrm>
+            <a:off x="3749040" y="2130552"/>
+            <a:ext cx="640080" cy="274320"/>
+          </a:xfrm>
+          <a:prstGeom prst="roundRect">
+            <a:avLst/>
+          </a:prstGeom>
+          <a:solidFill>
+            <a:srgbClr val="E8F5E9"/>
+          </a:solidFill>
+          <a:ln w="12700">
+            <a:solidFill>
+              <a:srgbClr val="E0E0E0"/>
+            </a:solidFill>
+          </a:ln>
+        </p:spPr>
+        <p:style>
+          <a:lnRef idx="1">
+            <a:schemeClr val="accent1"/>
+          </a:lnRef>
+          <a:fillRef idx="3">
+            <a:schemeClr val="accent1"/>
+          </a:fillRef>
+          <a:effectRef idx="2">
+            <a:schemeClr val="accent1"/>
+          </a:effectRef>
+          <a:fontRef idx="minor">
+            <a:schemeClr val="lt1"/>
+          </a:fontRef>
+        </p:style>
+        <p:txBody>
+          <a:bodyPr rtlCol="0" anchor="ctr">
+            <a:normAutofit/>
+          </a:bodyPr>
+          <a:lstStyle/>
+          <a:p>
+            <a:pPr algn="ctr">
+              <a:defRPr sz="900"/>
+            </a:pPr>
+            <a:r>
+              <a:t>2.1</a:t>
+            </a:r>
+          </a:p>
+        </p:txBody>
+      </p:sp>
+      <p:sp>
+        <p:nvSpPr>
+          <p:cNvPr id="18" name="Rounded Rectangle 17"/>
+          <p:cNvSpPr/>
+          <p:nvPr/>
+        </p:nvSpPr>
+        <p:spPr>
+          <a:xfrm>
+            <a:off x="4389120" y="2130552"/>
+            <a:ext cx="548640" cy="274320"/>
+          </a:xfrm>
+          <a:prstGeom prst="roundRect">
+            <a:avLst/>
+          </a:prstGeom>
+          <a:solidFill>
+            <a:srgbClr val="E8F5E9"/>
+          </a:solidFill>
+          <a:ln w="12700">
+            <a:solidFill>
+              <a:srgbClr val="E0E0E0"/>
+            </a:solidFill>
+          </a:ln>
+        </p:spPr>
+        <p:style>
+          <a:lnRef idx="1">
+            <a:schemeClr val="accent1"/>
+          </a:lnRef>
+          <a:fillRef idx="3">
+            <a:schemeClr val="accent1"/>
+          </a:fillRef>
+          <a:effectRef idx="2">
+            <a:schemeClr val="accent1"/>
+          </a:effectRef>
+          <a:fontRef idx="minor">
+            <a:schemeClr val="lt1"/>
+          </a:fontRef>
+        </p:style>
+        <p:txBody>
+          <a:bodyPr rtlCol="0" anchor="ctr">
+            <a:normAutofit/>
+          </a:bodyPr>
+          <a:lstStyle/>
+          <a:p>
+            <a:pPr algn="ctr">
+              <a:defRPr sz="900"/>
+            </a:pPr>
+            <a:r>
+              <a:t>0.39</a:t>
+            </a:r>
+          </a:p>
+        </p:txBody>
+      </p:sp>
+      <p:sp>
+        <p:nvSpPr>
+          <p:cNvPr id="19" name="Rounded Rectangle 18"/>
+          <p:cNvSpPr/>
+          <p:nvPr/>
+        </p:nvSpPr>
+        <p:spPr>
+          <a:xfrm>
+            <a:off x="4937760" y="2130552"/>
+            <a:ext cx="640080" cy="274320"/>
+          </a:xfrm>
+          <a:prstGeom prst="roundRect">
+            <a:avLst/>
+          </a:prstGeom>
+          <a:solidFill>
+            <a:srgbClr val="E8F5E9"/>
+          </a:solidFill>
+          <a:ln w="12700">
+            <a:solidFill>
+              <a:srgbClr val="E0E0E0"/>
+            </a:solidFill>
+          </a:ln>
+        </p:spPr>
+        <p:style>
+          <a:lnRef idx="1">
+            <a:schemeClr val="accent1"/>
+          </a:lnRef>
+          <a:fillRef idx="3">
+            <a:schemeClr val="accent1"/>
+          </a:fillRef>
+          <a:effectRef idx="2">
+            <a:schemeClr val="accent1"/>
+          </a:effectRef>
+          <a:fontRef idx="minor">
+            <a:schemeClr val="lt1"/>
+          </a:fontRef>
+        </p:style>
+        <p:txBody>
+          <a:bodyPr rtlCol="0" anchor="ctr">
+            <a:normAutofit/>
+          </a:bodyPr>
+          <a:lstStyle/>
+          <a:p>
+            <a:pPr algn="ctr">
+              <a:defRPr sz="900"/>
+            </a:pPr>
+            <a:r>
+              <a:t>PASS</a:t>
+            </a:r>
+          </a:p>
+        </p:txBody>
+      </p:sp>
+      <p:sp>
+        <p:nvSpPr>
+          <p:cNvPr id="20" name="Rounded Rectangle 19"/>
+          <p:cNvSpPr/>
+          <p:nvPr/>
+        </p:nvSpPr>
+        <p:spPr>
+          <a:xfrm>
+            <a:off x="731520" y="2432304"/>
+            <a:ext cx="914400" cy="274320"/>
+          </a:xfrm>
+          <a:prstGeom prst="roundRect">
+            <a:avLst/>
+          </a:prstGeom>
+          <a:solidFill>
+            <a:srgbClr val="F5F5F5"/>
+          </a:solidFill>
+          <a:ln w="12700">
+            <a:solidFill>
+              <a:srgbClr val="E0E0E0"/>
+            </a:solidFill>
+          </a:ln>
+        </p:spPr>
+        <p:style>
+          <a:lnRef idx="1">
+            <a:schemeClr val="accent1"/>
+          </a:lnRef>
+          <a:fillRef idx="3">
+            <a:schemeClr val="accent1"/>
+          </a:fillRef>
+          <a:effectRef idx="2">
+            <a:schemeClr val="accent1"/>
+          </a:effectRef>
+          <a:fontRef idx="minor">
+            <a:schemeClr val="lt1"/>
+          </a:fontRef>
+        </p:style>
+        <p:txBody>
+          <a:bodyPr rtlCol="0" anchor="ctr">
+            <a:normAutofit/>
+          </a:bodyPr>
+          <a:lstStyle/>
+          <a:p>
+            <a:pPr algn="ctr">
+              <a:defRPr sz="900"/>
+            </a:pPr>
+            <a:r>
+              <a:t>Cpd_06_CF3</a:t>
+            </a:r>
+          </a:p>
+        </p:txBody>
+      </p:sp>
+      <p:sp>
+        <p:nvSpPr>
+          <p:cNvPr id="21" name="Rounded Rectangle 20"/>
+          <p:cNvSpPr/>
+          <p:nvPr/>
+        </p:nvSpPr>
+        <p:spPr>
+          <a:xfrm>
+            <a:off x="1645920" y="2432304"/>
+            <a:ext cx="731520" cy="274320"/>
+          </a:xfrm>
+          <a:prstGeom prst="roundRect">
+            <a:avLst/>
+          </a:prstGeom>
+          <a:solidFill>
+            <a:srgbClr val="F5F5F5"/>
+          </a:solidFill>
+          <a:ln w="12700">
+            <a:solidFill>
+              <a:srgbClr val="E0E0E0"/>
+            </a:solidFill>
+          </a:ln>
+        </p:spPr>
+        <p:style>
+          <a:lnRef idx="1">
+            <a:schemeClr val="accent1"/>
+          </a:lnRef>
+          <a:fillRef idx="3">
+            <a:schemeClr val="accent1"/>
+          </a:fillRef>
+          <a:effectRef idx="2">
+            <a:schemeClr val="accent1"/>
+          </a:effectRef>
+          <a:fontRef idx="minor">
+            <a:schemeClr val="lt1"/>
+          </a:fontRef>
+        </p:style>
+        <p:txBody>
+          <a:bodyPr rtlCol="0" anchor="ctr">
+            <a:normAutofit/>
+          </a:bodyPr>
+          <a:lstStyle/>
+          <a:p>
+            <a:pPr algn="ctr">
+              <a:defRPr sz="900"/>
+            </a:pPr>
+            <a:r>
+              <a:t>—CF₃</a:t>
+            </a:r>
+          </a:p>
+        </p:txBody>
+      </p:sp>
+      <p:sp>
+        <p:nvSpPr>
+          <p:cNvPr id="22" name="Rounded Rectangle 21"/>
+          <p:cNvSpPr/>
+          <p:nvPr/>
+        </p:nvSpPr>
+        <p:spPr>
+          <a:xfrm>
+            <a:off x="2377440" y="2432304"/>
+            <a:ext cx="731520" cy="274320"/>
+          </a:xfrm>
+          <a:prstGeom prst="roundRect">
+            <a:avLst/>
+          </a:prstGeom>
+          <a:solidFill>
+            <a:srgbClr val="F5F5F5"/>
+          </a:solidFill>
+          <a:ln w="12700">
+            <a:solidFill>
+              <a:srgbClr val="E0E0E0"/>
+            </a:solidFill>
+          </a:ln>
+        </p:spPr>
+        <p:style>
+          <a:lnRef idx="1">
+            <a:schemeClr val="accent1"/>
+          </a:lnRef>
+          <a:fillRef idx="3">
+            <a:schemeClr val="accent1"/>
+          </a:fillRef>
+          <a:effectRef idx="2">
+            <a:schemeClr val="accent1"/>
+          </a:effectRef>
+          <a:fontRef idx="minor">
+            <a:schemeClr val="lt1"/>
+          </a:fontRef>
+        </p:style>
+        <p:txBody>
+          <a:bodyPr rtlCol="0" anchor="ctr">
+            <a:normAutofit/>
+          </a:bodyPr>
+          <a:lstStyle/>
+          <a:p>
+            <a:pPr algn="ctr">
+              <a:defRPr sz="900" b="1"/>
+            </a:pPr>
+            <a:r>
+              <a:t>-8.3</a:t>
+            </a:r>
+          </a:p>
+        </p:txBody>
+      </p:sp>
+      <p:sp>
+        <p:nvSpPr>
+          <p:cNvPr id="23" name="Rounded Rectangle 22"/>
+          <p:cNvSpPr/>
+          <p:nvPr/>
+        </p:nvSpPr>
+        <p:spPr>
+          <a:xfrm>
+            <a:off x="3108960" y="2432304"/>
+            <a:ext cx="640080" cy="274320"/>
+          </a:xfrm>
+          <a:prstGeom prst="roundRect">
+            <a:avLst/>
+          </a:prstGeom>
+          <a:solidFill>
+            <a:srgbClr val="F5F5F5"/>
+          </a:solidFill>
+          <a:ln w="12700">
+            <a:solidFill>
+              <a:srgbClr val="E0E0E0"/>
+            </a:solidFill>
+          </a:ln>
+        </p:spPr>
+        <p:style>
+          <a:lnRef idx="1">
+            <a:schemeClr val="accent1"/>
+          </a:lnRef>
+          <a:fillRef idx="3">
+            <a:schemeClr val="accent1"/>
+          </a:fillRef>
+          <a:effectRef idx="2">
+            <a:schemeClr val="accent1"/>
+          </a:effectRef>
+          <a:fontRef idx="minor">
+            <a:schemeClr val="lt1"/>
+          </a:fontRef>
+        </p:style>
+        <p:txBody>
+          <a:bodyPr rtlCol="0" anchor="ctr">
+            <a:normAutofit/>
+          </a:bodyPr>
+          <a:lstStyle/>
+          <a:p>
+            <a:pPr algn="ctr">
+              <a:defRPr sz="900"/>
+            </a:pPr>
+            <a:r>
+              <a:t>286</a:t>
+            </a:r>
+          </a:p>
+        </p:txBody>
+      </p:sp>
+      <p:sp>
+        <p:nvSpPr>
+          <p:cNvPr id="24" name="Rounded Rectangle 23"/>
+          <p:cNvSpPr/>
+          <p:nvPr/>
+        </p:nvSpPr>
+        <p:spPr>
+          <a:xfrm>
+            <a:off x="3749040" y="2432304"/>
+            <a:ext cx="640080" cy="274320"/>
+          </a:xfrm>
+          <a:prstGeom prst="roundRect">
+            <a:avLst/>
+          </a:prstGeom>
+          <a:solidFill>
+            <a:srgbClr val="F5F5F5"/>
+          </a:solidFill>
+          <a:ln w="12700">
+            <a:solidFill>
+              <a:srgbClr val="E0E0E0"/>
+            </a:solidFill>
+          </a:ln>
+        </p:spPr>
+        <p:style>
+          <a:lnRef idx="1">
+            <a:schemeClr val="accent1"/>
+          </a:lnRef>
+          <a:fillRef idx="3">
+            <a:schemeClr val="accent1"/>
+          </a:fillRef>
+          <a:effectRef idx="2">
+            <a:schemeClr val="accent1"/>
+          </a:effectRef>
+          <a:fontRef idx="minor">
+            <a:schemeClr val="lt1"/>
+          </a:fontRef>
+        </p:style>
+        <p:txBody>
+          <a:bodyPr rtlCol="0" anchor="ctr">
+            <a:normAutofit/>
+          </a:bodyPr>
+          <a:lstStyle/>
+          <a:p>
+            <a:pPr algn="ctr">
+              <a:defRPr sz="900"/>
+            </a:pPr>
+            <a:r>
+              <a:t>3.0</a:t>
+            </a:r>
+          </a:p>
+        </p:txBody>
+      </p:sp>
+      <p:sp>
+        <p:nvSpPr>
+          <p:cNvPr id="25" name="Rounded Rectangle 24"/>
+          <p:cNvSpPr/>
+          <p:nvPr/>
+        </p:nvSpPr>
+        <p:spPr>
+          <a:xfrm>
+            <a:off x="4389120" y="2432304"/>
+            <a:ext cx="548640" cy="274320"/>
+          </a:xfrm>
+          <a:prstGeom prst="roundRect">
+            <a:avLst/>
+          </a:prstGeom>
+          <a:solidFill>
+            <a:srgbClr val="F5F5F5"/>
+          </a:solidFill>
+          <a:ln w="12700">
+            <a:solidFill>
+              <a:srgbClr val="E0E0E0"/>
+            </a:solidFill>
+          </a:ln>
+        </p:spPr>
+        <p:style>
+          <a:lnRef idx="1">
+            <a:schemeClr val="accent1"/>
+          </a:lnRef>
+          <a:fillRef idx="3">
+            <a:schemeClr val="accent1"/>
+          </a:fillRef>
+          <a:effectRef idx="2">
+            <a:schemeClr val="accent1"/>
+          </a:effectRef>
+          <a:fontRef idx="minor">
+            <a:schemeClr val="lt1"/>
+          </a:fontRef>
+        </p:style>
+        <p:txBody>
+          <a:bodyPr rtlCol="0" anchor="ctr">
+            <a:normAutofit/>
+          </a:bodyPr>
+          <a:lstStyle/>
+          <a:p>
+            <a:pPr algn="ctr">
+              <a:defRPr sz="900"/>
+            </a:pPr>
+            <a:r>
+              <a:t>0.33</a:t>
+            </a:r>
+          </a:p>
+        </p:txBody>
+      </p:sp>
+      <p:sp>
+        <p:nvSpPr>
+          <p:cNvPr id="26" name="Rounded Rectangle 25"/>
+          <p:cNvSpPr/>
+          <p:nvPr/>
+        </p:nvSpPr>
+        <p:spPr>
+          <a:xfrm>
+            <a:off x="4937760" y="2432304"/>
+            <a:ext cx="640080" cy="274320"/>
+          </a:xfrm>
+          <a:prstGeom prst="roundRect">
+            <a:avLst/>
+          </a:prstGeom>
+          <a:solidFill>
+            <a:srgbClr val="F5F5F5"/>
+          </a:solidFill>
+          <a:ln w="12700">
+            <a:solidFill>
+              <a:srgbClr val="E0E0E0"/>
+            </a:solidFill>
+          </a:ln>
+        </p:spPr>
+        <p:style>
+          <a:lnRef idx="1">
+            <a:schemeClr val="accent1"/>
+          </a:lnRef>
+          <a:fillRef idx="3">
+            <a:schemeClr val="accent1"/>
+          </a:fillRef>
+          <a:effectRef idx="2">
+            <a:schemeClr val="accent1"/>
+          </a:effectRef>
+          <a:fontRef idx="minor">
+            <a:schemeClr val="lt1"/>
+          </a:fontRef>
+        </p:style>
+        <p:txBody>
+          <a:bodyPr rtlCol="0" anchor="ctr">
+            <a:normAutofit/>
+          </a:bodyPr>
+          <a:lstStyle/>
+          <a:p>
+            <a:pPr algn="ctr">
+              <a:defRPr sz="900"/>
+            </a:pPr>
+            <a:r>
+              <a:t>PASS</a:t>
+            </a:r>
+          </a:p>
+        </p:txBody>
+      </p:sp>
+      <p:sp>
+        <p:nvSpPr>
+          <p:cNvPr id="27" name="Rounded Rectangle 26"/>
+          <p:cNvSpPr/>
+          <p:nvPr/>
+        </p:nvSpPr>
+        <p:spPr>
+          <a:xfrm>
+            <a:off x="731520" y="2734056"/>
+            <a:ext cx="914400" cy="274320"/>
+          </a:xfrm>
+          <a:prstGeom prst="roundRect">
+            <a:avLst/>
+          </a:prstGeom>
+          <a:solidFill>
+            <a:srgbClr val="FFFFFF"/>
+          </a:solidFill>
+          <a:ln w="12700">
+            <a:solidFill>
+              <a:srgbClr val="E0E0E0"/>
+            </a:solidFill>
+          </a:ln>
+        </p:spPr>
+        <p:style>
+          <a:lnRef idx="1">
+            <a:schemeClr val="accent1"/>
+          </a:lnRef>
+          <a:fillRef idx="3">
+            <a:schemeClr val="accent1"/>
+          </a:fillRef>
+          <a:effectRef idx="2">
+            <a:schemeClr val="accent1"/>
+          </a:effectRef>
+          <a:fontRef idx="minor">
+            <a:schemeClr val="lt1"/>
+          </a:fontRef>
+        </p:style>
+        <p:txBody>
+          <a:bodyPr rtlCol="0" anchor="ctr">
+            <a:normAutofit/>
+          </a:bodyPr>
+          <a:lstStyle/>
+          <a:p>
+            <a:pPr algn="ctr">
+              <a:defRPr sz="900"/>
+            </a:pPr>
+            <a:r>
+              <a:t>Cpd_07_NH2</a:t>
+            </a:r>
+          </a:p>
+        </p:txBody>
+      </p:sp>
+      <p:sp>
+        <p:nvSpPr>
+          <p:cNvPr id="28" name="Rounded Rectangle 27"/>
+          <p:cNvSpPr/>
+          <p:nvPr/>
+        </p:nvSpPr>
+        <p:spPr>
+          <a:xfrm>
+            <a:off x="1645920" y="2734056"/>
+            <a:ext cx="731520" cy="274320"/>
+          </a:xfrm>
+          <a:prstGeom prst="roundRect">
+            <a:avLst/>
+          </a:prstGeom>
+          <a:solidFill>
+            <a:srgbClr val="FFFFFF"/>
+          </a:solidFill>
+          <a:ln w="12700">
+            <a:solidFill>
+              <a:srgbClr val="E0E0E0"/>
+            </a:solidFill>
+          </a:ln>
+        </p:spPr>
+        <p:style>
+          <a:lnRef idx="1">
+            <a:schemeClr val="accent1"/>
+          </a:lnRef>
+          <a:fillRef idx="3">
+            <a:schemeClr val="accent1"/>
+          </a:fillRef>
+          <a:effectRef idx="2">
+            <a:schemeClr val="accent1"/>
+          </a:effectRef>
+          <a:fontRef idx="minor">
+            <a:schemeClr val="lt1"/>
+          </a:fontRef>
+        </p:style>
+        <p:txBody>
+          <a:bodyPr rtlCol="0" anchor="ctr">
+            <a:normAutofit/>
+          </a:bodyPr>
+          <a:lstStyle/>
+          <a:p>
+            <a:pPr algn="ctr">
+              <a:defRPr sz="900"/>
+            </a:pPr>
+            <a:r>
+              <a:t>—NH₂</a:t>
+            </a:r>
+          </a:p>
+        </p:txBody>
+      </p:sp>
+      <p:sp>
+        <p:nvSpPr>
+          <p:cNvPr id="29" name="Rounded Rectangle 28"/>
+          <p:cNvSpPr/>
+          <p:nvPr/>
+        </p:nvSpPr>
+        <p:spPr>
+          <a:xfrm>
+            <a:off x="2377440" y="2734056"/>
+            <a:ext cx="731520" cy="274320"/>
+          </a:xfrm>
+          <a:prstGeom prst="roundRect">
+            <a:avLst/>
+          </a:prstGeom>
+          <a:solidFill>
+            <a:srgbClr val="FFFFFF"/>
+          </a:solidFill>
+          <a:ln w="12700">
+            <a:solidFill>
+              <a:srgbClr val="E0E0E0"/>
+            </a:solidFill>
+          </a:ln>
+        </p:spPr>
+        <p:style>
+          <a:lnRef idx="1">
+            <a:schemeClr val="accent1"/>
+          </a:lnRef>
+          <a:fillRef idx="3">
+            <a:schemeClr val="accent1"/>
+          </a:fillRef>
+          <a:effectRef idx="2">
+            <a:schemeClr val="accent1"/>
+          </a:effectRef>
+          <a:fontRef idx="minor">
+            <a:schemeClr val="lt1"/>
+          </a:fontRef>
+        </p:style>
+        <p:txBody>
+          <a:bodyPr rtlCol="0" anchor="ctr">
+            <a:normAutofit/>
+          </a:bodyPr>
+          <a:lstStyle/>
+          <a:p>
+            <a:pPr algn="ctr">
+              <a:defRPr sz="900" b="1"/>
+            </a:pPr>
+            <a:r>
+              <a:t>-8.1</a:t>
+            </a:r>
+          </a:p>
+        </p:txBody>
+      </p:sp>
+      <p:sp>
+        <p:nvSpPr>
+          <p:cNvPr id="30" name="Rounded Rectangle 29"/>
+          <p:cNvSpPr/>
+          <p:nvPr/>
+        </p:nvSpPr>
+        <p:spPr>
+          <a:xfrm>
+            <a:off x="3108960" y="2734056"/>
+            <a:ext cx="640080" cy="274320"/>
+          </a:xfrm>
+          <a:prstGeom prst="roundRect">
+            <a:avLst/>
+          </a:prstGeom>
+          <a:solidFill>
+            <a:srgbClr val="FFFFFF"/>
+          </a:solidFill>
+          <a:ln w="12700">
+            <a:solidFill>
+              <a:srgbClr val="E0E0E0"/>
+            </a:solidFill>
+          </a:ln>
+        </p:spPr>
+        <p:style>
+          <a:lnRef idx="1">
+            <a:schemeClr val="accent1"/>
+          </a:lnRef>
+          <a:fillRef idx="3">
+            <a:schemeClr val="accent1"/>
+          </a:fillRef>
+          <a:effectRef idx="2">
+            <a:schemeClr val="accent1"/>
+          </a:effectRef>
+          <a:fontRef idx="minor">
+            <a:schemeClr val="lt1"/>
+          </a:fontRef>
+        </p:style>
+        <p:txBody>
+          <a:bodyPr rtlCol="0" anchor="ctr">
+            <a:normAutofit/>
+          </a:bodyPr>
+          <a:lstStyle/>
+          <a:p>
+            <a:pPr algn="ctr">
+              <a:defRPr sz="900"/>
+            </a:pPr>
+            <a:r>
+              <a:t>235</a:t>
+            </a:r>
+          </a:p>
+        </p:txBody>
+      </p:sp>
+      <p:sp>
+        <p:nvSpPr>
+          <p:cNvPr id="31" name="Rounded Rectangle 30"/>
+          <p:cNvSpPr/>
+          <p:nvPr/>
+        </p:nvSpPr>
+        <p:spPr>
+          <a:xfrm>
+            <a:off x="3749040" y="2734056"/>
+            <a:ext cx="640080" cy="274320"/>
+          </a:xfrm>
+          <a:prstGeom prst="roundRect">
+            <a:avLst/>
+          </a:prstGeom>
+          <a:solidFill>
+            <a:srgbClr val="FFFFFF"/>
+          </a:solidFill>
+          <a:ln w="12700">
+            <a:solidFill>
+              <a:srgbClr val="E0E0E0"/>
+            </a:solidFill>
+          </a:ln>
+        </p:spPr>
+        <p:style>
+          <a:lnRef idx="1">
+            <a:schemeClr val="accent1"/>
+          </a:lnRef>
+          <a:fillRef idx="3">
+            <a:schemeClr val="accent1"/>
+          </a:fillRef>
+          <a:effectRef idx="2">
+            <a:schemeClr val="accent1"/>
+          </a:effectRef>
+          <a:fontRef idx="minor">
+            <a:schemeClr val="lt1"/>
+          </a:fontRef>
+        </p:style>
+        <p:txBody>
+          <a:bodyPr rtlCol="0" anchor="ctr">
+            <a:normAutofit/>
+          </a:bodyPr>
+          <a:lstStyle/>
+          <a:p>
+            <a:pPr algn="ctr">
+              <a:defRPr sz="900"/>
+            </a:pPr>
+            <a:r>
+              <a:t>1.3</a:t>
+            </a:r>
+          </a:p>
+        </p:txBody>
+      </p:sp>
+      <p:sp>
+        <p:nvSpPr>
+          <p:cNvPr id="32" name="Rounded Rectangle 31"/>
+          <p:cNvSpPr/>
+          <p:nvPr/>
+        </p:nvSpPr>
+        <p:spPr>
+          <a:xfrm>
+            <a:off x="4389120" y="2734056"/>
+            <a:ext cx="548640" cy="274320"/>
+          </a:xfrm>
+          <a:prstGeom prst="roundRect">
+            <a:avLst/>
+          </a:prstGeom>
+          <a:solidFill>
+            <a:srgbClr val="FFFFFF"/>
+          </a:solidFill>
+          <a:ln w="12700">
+            <a:solidFill>
+              <a:srgbClr val="E0E0E0"/>
+            </a:solidFill>
+          </a:ln>
+        </p:spPr>
+        <p:style>
+          <a:lnRef idx="1">
+            <a:schemeClr val="accent1"/>
+          </a:lnRef>
+          <a:fillRef idx="3">
+            <a:schemeClr val="accent1"/>
+          </a:fillRef>
+          <a:effectRef idx="2">
+            <a:schemeClr val="accent1"/>
+          </a:effectRef>
+          <a:fontRef idx="minor">
+            <a:schemeClr val="lt1"/>
+          </a:fontRef>
+        </p:style>
+        <p:txBody>
+          <a:bodyPr rtlCol="0" anchor="ctr">
+            <a:normAutofit/>
+          </a:bodyPr>
+          <a:lstStyle/>
+          <a:p>
+            <a:pPr algn="ctr">
+              <a:defRPr sz="900"/>
+            </a:pPr>
+            <a:r>
+              <a:t>0.37</a:t>
+            </a:r>
+          </a:p>
+        </p:txBody>
+      </p:sp>
+      <p:sp>
+        <p:nvSpPr>
+          <p:cNvPr id="33" name="Rounded Rectangle 32"/>
+          <p:cNvSpPr/>
+          <p:nvPr/>
+        </p:nvSpPr>
+        <p:spPr>
+          <a:xfrm>
+            <a:off x="4937760" y="2734056"/>
+            <a:ext cx="640080" cy="274320"/>
+          </a:xfrm>
+          <a:prstGeom prst="roundRect">
+            <a:avLst/>
+          </a:prstGeom>
+          <a:solidFill>
+            <a:srgbClr val="FFFFFF"/>
+          </a:solidFill>
+          <a:ln w="12700">
+            <a:solidFill>
+              <a:srgbClr val="E0E0E0"/>
+            </a:solidFill>
+          </a:ln>
+        </p:spPr>
+        <p:style>
+          <a:lnRef idx="1">
+            <a:schemeClr val="accent1"/>
+          </a:lnRef>
+          <a:fillRef idx="3">
+            <a:schemeClr val="accent1"/>
+          </a:fillRef>
+          <a:effectRef idx="2">
+            <a:schemeClr val="accent1"/>
+          </a:effectRef>
+          <a:fontRef idx="minor">
+            <a:schemeClr val="lt1"/>
+          </a:fontRef>
+        </p:style>
+        <p:txBody>
+          <a:bodyPr rtlCol="0" anchor="ctr">
+            <a:normAutofit/>
+          </a:bodyPr>
+          <a:lstStyle/>
+          <a:p>
+            <a:pPr algn="ctr">
+              <a:defRPr sz="900"/>
+            </a:pPr>
+            <a:r>
+              <a:t>PASS</a:t>
+            </a:r>
+          </a:p>
+        </p:txBody>
+      </p:sp>
+      <p:sp>
+        <p:nvSpPr>
+          <p:cNvPr id="34" name="Rounded Rectangle 33"/>
+          <p:cNvSpPr/>
+          <p:nvPr/>
+        </p:nvSpPr>
+        <p:spPr>
+          <a:xfrm>
+            <a:off x="731520" y="3035808"/>
+            <a:ext cx="914400" cy="274320"/>
+          </a:xfrm>
+          <a:prstGeom prst="roundRect">
+            <a:avLst/>
+          </a:prstGeom>
+          <a:solidFill>
+            <a:srgbClr val="F5F5F5"/>
+          </a:solidFill>
+          <a:ln w="12700">
+            <a:solidFill>
+              <a:srgbClr val="E0E0E0"/>
+            </a:solidFill>
+          </a:ln>
+        </p:spPr>
+        <p:style>
+          <a:lnRef idx="1">
+            <a:schemeClr val="accent1"/>
+          </a:lnRef>
+          <a:fillRef idx="3">
+            <a:schemeClr val="accent1"/>
+          </a:fillRef>
+          <a:effectRef idx="2">
+            <a:schemeClr val="accent1"/>
+          </a:effectRef>
+          <a:fontRef idx="minor">
+            <a:schemeClr val="lt1"/>
+          </a:fontRef>
+        </p:style>
+        <p:txBody>
+          <a:bodyPr rtlCol="0" anchor="ctr">
+            <a:normAutofit/>
+          </a:bodyPr>
+          <a:lstStyle/>
+          <a:p>
+            <a:pPr algn="ctr">
+              <a:defRPr sz="900"/>
+            </a:pPr>
+            <a:r>
+              <a:t>Cpd_03_Cl</a:t>
+            </a:r>
+          </a:p>
+        </p:txBody>
+      </p:sp>
+      <p:sp>
+        <p:nvSpPr>
+          <p:cNvPr id="35" name="Rounded Rectangle 34"/>
+          <p:cNvSpPr/>
+          <p:nvPr/>
+        </p:nvSpPr>
+        <p:spPr>
+          <a:xfrm>
+            <a:off x="1645920" y="3035808"/>
+            <a:ext cx="731520" cy="274320"/>
+          </a:xfrm>
+          <a:prstGeom prst="roundRect">
+            <a:avLst/>
+          </a:prstGeom>
+          <a:solidFill>
+            <a:srgbClr val="F5F5F5"/>
+          </a:solidFill>
+          <a:ln w="12700">
+            <a:solidFill>
+              <a:srgbClr val="E0E0E0"/>
+            </a:solidFill>
+          </a:ln>
+        </p:spPr>
+        <p:style>
+          <a:lnRef idx="1">
+            <a:schemeClr val="accent1"/>
+          </a:lnRef>
+          <a:fillRef idx="3">
+            <a:schemeClr val="accent1"/>
+          </a:fillRef>
+          <a:effectRef idx="2">
+            <a:schemeClr val="accent1"/>
+          </a:effectRef>
+          <a:fontRef idx="minor">
+            <a:schemeClr val="lt1"/>
+          </a:fontRef>
+        </p:style>
+        <p:txBody>
+          <a:bodyPr rtlCol="0" anchor="ctr">
+            <a:normAutofit/>
+          </a:bodyPr>
+          <a:lstStyle/>
+          <a:p>
+            <a:pPr algn="ctr">
+              <a:defRPr sz="900"/>
+            </a:pPr>
+            <a:r>
+              <a:t>—Cl</a:t>
+            </a:r>
+          </a:p>
+        </p:txBody>
+      </p:sp>
+      <p:sp>
+        <p:nvSpPr>
+          <p:cNvPr id="36" name="Rounded Rectangle 35"/>
+          <p:cNvSpPr/>
+          <p:nvPr/>
+        </p:nvSpPr>
+        <p:spPr>
+          <a:xfrm>
+            <a:off x="2377440" y="3035808"/>
+            <a:ext cx="731520" cy="274320"/>
+          </a:xfrm>
+          <a:prstGeom prst="roundRect">
+            <a:avLst/>
+          </a:prstGeom>
+          <a:solidFill>
+            <a:srgbClr val="F5F5F5"/>
+          </a:solidFill>
+          <a:ln w="12700">
+            <a:solidFill>
+              <a:srgbClr val="E0E0E0"/>
+            </a:solidFill>
+          </a:ln>
+        </p:spPr>
+        <p:style>
+          <a:lnRef idx="1">
+            <a:schemeClr val="accent1"/>
+          </a:lnRef>
+          <a:fillRef idx="3">
+            <a:schemeClr val="accent1"/>
+          </a:fillRef>
+          <a:effectRef idx="2">
+            <a:schemeClr val="accent1"/>
+          </a:effectRef>
+          <a:fontRef idx="minor">
+            <a:schemeClr val="lt1"/>
+          </a:fontRef>
+        </p:style>
+        <p:txBody>
+          <a:bodyPr rtlCol="0" anchor="ctr">
+            <a:normAutofit/>
+          </a:bodyPr>
+          <a:lstStyle/>
+          <a:p>
+            <a:pPr algn="ctr">
+              <a:defRPr sz="900" b="1"/>
+            </a:pPr>
+            <a:r>
+              <a:t>-7.9</a:t>
+            </a:r>
+          </a:p>
+        </p:txBody>
+      </p:sp>
+      <p:sp>
+        <p:nvSpPr>
+          <p:cNvPr id="37" name="Rounded Rectangle 36"/>
+          <p:cNvSpPr/>
+          <p:nvPr/>
+        </p:nvSpPr>
+        <p:spPr>
+          <a:xfrm>
+            <a:off x="3108960" y="3035808"/>
+            <a:ext cx="640080" cy="274320"/>
+          </a:xfrm>
+          <a:prstGeom prst="roundRect">
+            <a:avLst/>
+          </a:prstGeom>
+          <a:solidFill>
+            <a:srgbClr val="F5F5F5"/>
+          </a:solidFill>
+          <a:ln w="12700">
+            <a:solidFill>
+              <a:srgbClr val="E0E0E0"/>
+            </a:solidFill>
+          </a:ln>
+        </p:spPr>
+        <p:style>
+          <a:lnRef idx="1">
+            <a:schemeClr val="accent1"/>
+          </a:lnRef>
+          <a:fillRef idx="3">
+            <a:schemeClr val="accent1"/>
+          </a:fillRef>
+          <a:effectRef idx="2">
+            <a:schemeClr val="accent1"/>
+          </a:effectRef>
+          <a:fontRef idx="minor">
+            <a:schemeClr val="lt1"/>
+          </a:fontRef>
+        </p:style>
+        <p:txBody>
+          <a:bodyPr rtlCol="0" anchor="ctr">
+            <a:normAutofit/>
+          </a:bodyPr>
+          <a:lstStyle/>
+          <a:p>
+            <a:pPr algn="ctr">
+              <a:defRPr sz="900"/>
+            </a:pPr>
+            <a:r>
+              <a:t>253</a:t>
+            </a:r>
+          </a:p>
+        </p:txBody>
+      </p:sp>
+      <p:sp>
+        <p:nvSpPr>
+          <p:cNvPr id="38" name="Rounded Rectangle 37"/>
+          <p:cNvSpPr/>
+          <p:nvPr/>
+        </p:nvSpPr>
+        <p:spPr>
+          <a:xfrm>
+            <a:off x="3749040" y="3035808"/>
+            <a:ext cx="640080" cy="274320"/>
+          </a:xfrm>
+          <a:prstGeom prst="roundRect">
+            <a:avLst/>
+          </a:prstGeom>
+          <a:solidFill>
+            <a:srgbClr val="F5F5F5"/>
+          </a:solidFill>
+          <a:ln w="12700">
+            <a:solidFill>
+              <a:srgbClr val="E0E0E0"/>
+            </a:solidFill>
+          </a:ln>
+        </p:spPr>
+        <p:style>
+          <a:lnRef idx="1">
+            <a:schemeClr val="accent1"/>
+          </a:lnRef>
+          <a:fillRef idx="3">
+            <a:schemeClr val="accent1"/>
+          </a:fillRef>
+          <a:effectRef idx="2">
+            <a:schemeClr val="accent1"/>
+          </a:effectRef>
+          <a:fontRef idx="minor">
+            <a:schemeClr val="lt1"/>
+          </a:fontRef>
+        </p:style>
+        <p:txBody>
+          <a:bodyPr rtlCol="0" anchor="ctr">
+            <a:normAutofit/>
+          </a:bodyPr>
+          <a:lstStyle/>
+          <a:p>
+            <a:pPr algn="ctr">
+              <a:defRPr sz="900"/>
+            </a:pPr>
+            <a:r>
+              <a:t>2.5</a:t>
+            </a:r>
+          </a:p>
+        </p:txBody>
+      </p:sp>
+      <p:sp>
+        <p:nvSpPr>
+          <p:cNvPr id="39" name="Rounded Rectangle 38"/>
+          <p:cNvSpPr/>
+          <p:nvPr/>
+        </p:nvSpPr>
+        <p:spPr>
+          <a:xfrm>
+            <a:off x="4389120" y="3035808"/>
+            <a:ext cx="548640" cy="274320"/>
+          </a:xfrm>
+          <a:prstGeom prst="roundRect">
+            <a:avLst/>
+          </a:prstGeom>
+          <a:solidFill>
+            <a:srgbClr val="F5F5F5"/>
+          </a:solidFill>
+          <a:ln w="12700">
+            <a:solidFill>
+              <a:srgbClr val="E0E0E0"/>
+            </a:solidFill>
+          </a:ln>
+        </p:spPr>
+        <p:style>
+          <a:lnRef idx="1">
+            <a:schemeClr val="accent1"/>
+          </a:lnRef>
+          <a:fillRef idx="3">
+            <a:schemeClr val="accent1"/>
+          </a:fillRef>
+          <a:effectRef idx="2">
+            <a:schemeClr val="accent1"/>
+          </a:effectRef>
+          <a:fontRef idx="minor">
+            <a:schemeClr val="lt1"/>
+          </a:fontRef>
+        </p:style>
+        <p:txBody>
+          <a:bodyPr rtlCol="0" anchor="ctr">
+            <a:normAutofit/>
+          </a:bodyPr>
+          <a:lstStyle/>
+          <a:p>
+            <a:pPr algn="ctr">
+              <a:defRPr sz="900"/>
+            </a:pPr>
+            <a:r>
+              <a:t>0.34</a:t>
+            </a:r>
+          </a:p>
+        </p:txBody>
+      </p:sp>
+      <p:sp>
+        <p:nvSpPr>
+          <p:cNvPr id="40" name="Rounded Rectangle 39"/>
+          <p:cNvSpPr/>
+          <p:nvPr/>
+        </p:nvSpPr>
+        <p:spPr>
+          <a:xfrm>
+            <a:off x="4937760" y="3035808"/>
+            <a:ext cx="640080" cy="274320"/>
+          </a:xfrm>
+          <a:prstGeom prst="roundRect">
+            <a:avLst/>
+          </a:prstGeom>
+          <a:solidFill>
+            <a:srgbClr val="F5F5F5"/>
+          </a:solidFill>
+          <a:ln w="12700">
+            <a:solidFill>
+              <a:srgbClr val="E0E0E0"/>
+            </a:solidFill>
+          </a:ln>
+        </p:spPr>
+        <p:style>
+          <a:lnRef idx="1">
+            <a:schemeClr val="accent1"/>
+          </a:lnRef>
+          <a:fillRef idx="3">
+            <a:schemeClr val="accent1"/>
+          </a:fillRef>
+          <a:effectRef idx="2">
+            <a:schemeClr val="accent1"/>
+          </a:effectRef>
+          <a:fontRef idx="minor">
+            <a:schemeClr val="lt1"/>
+          </a:fontRef>
+        </p:style>
+        <p:txBody>
+          <a:bodyPr rtlCol="0" anchor="ctr">
+            <a:normAutofit/>
+          </a:bodyPr>
+          <a:lstStyle/>
+          <a:p>
+            <a:pPr algn="ctr">
+              <a:defRPr sz="900"/>
+            </a:pPr>
+            <a:r>
+              <a:t>PASS</a:t>
+            </a:r>
+          </a:p>
+        </p:txBody>
+      </p:sp>
+      <p:sp>
+        <p:nvSpPr>
+          <p:cNvPr id="41" name="Rounded Rectangle 40"/>
+          <p:cNvSpPr/>
+          <p:nvPr/>
+        </p:nvSpPr>
+        <p:spPr>
+          <a:xfrm>
+            <a:off x="731520" y="3337560"/>
+            <a:ext cx="914400" cy="274320"/>
+          </a:xfrm>
+          <a:prstGeom prst="roundRect">
+            <a:avLst/>
+          </a:prstGeom>
+          <a:solidFill>
+            <a:srgbClr val="FFFFFF"/>
+          </a:solidFill>
+          <a:ln w="12700">
+            <a:solidFill>
+              <a:srgbClr val="E0E0E0"/>
+            </a:solidFill>
+          </a:ln>
+        </p:spPr>
+        <p:style>
+          <a:lnRef idx="1">
+            <a:schemeClr val="accent1"/>
+          </a:lnRef>
+          <a:fillRef idx="3">
+            <a:schemeClr val="accent1"/>
+          </a:fillRef>
+          <a:effectRef idx="2">
+            <a:schemeClr val="accent1"/>
+          </a:effectRef>
+          <a:fontRef idx="minor">
+            <a:schemeClr val="lt1"/>
+          </a:fontRef>
+        </p:style>
+        <p:txBody>
+          <a:bodyPr rtlCol="0" anchor="ctr">
+            <a:normAutofit/>
+          </a:bodyPr>
+          <a:lstStyle/>
+          <a:p>
+            <a:pPr algn="ctr">
+              <a:defRPr sz="900"/>
+            </a:pPr>
+            <a:r>
+              <a:t>Cpd_04_CH3</a:t>
+            </a:r>
+          </a:p>
+        </p:txBody>
+      </p:sp>
+      <p:sp>
+        <p:nvSpPr>
+          <p:cNvPr id="42" name="Rounded Rectangle 41"/>
+          <p:cNvSpPr/>
+          <p:nvPr/>
+        </p:nvSpPr>
+        <p:spPr>
+          <a:xfrm>
+            <a:off x="1645920" y="3337560"/>
+            <a:ext cx="731520" cy="274320"/>
+          </a:xfrm>
+          <a:prstGeom prst="roundRect">
+            <a:avLst/>
+          </a:prstGeom>
+          <a:solidFill>
+            <a:srgbClr val="FFFFFF"/>
+          </a:solidFill>
+          <a:ln w="12700">
+            <a:solidFill>
+              <a:srgbClr val="E0E0E0"/>
+            </a:solidFill>
+          </a:ln>
+        </p:spPr>
+        <p:style>
+          <a:lnRef idx="1">
+            <a:schemeClr val="accent1"/>
+          </a:lnRef>
+          <a:fillRef idx="3">
+            <a:schemeClr val="accent1"/>
+          </a:fillRef>
+          <a:effectRef idx="2">
+            <a:schemeClr val="accent1"/>
+          </a:effectRef>
+          <a:fontRef idx="minor">
+            <a:schemeClr val="lt1"/>
+          </a:fontRef>
+        </p:style>
+        <p:txBody>
+          <a:bodyPr rtlCol="0" anchor="ctr">
+            <a:normAutofit/>
+          </a:bodyPr>
+          <a:lstStyle/>
+          <a:p>
+            <a:pPr algn="ctr">
+              <a:defRPr sz="900"/>
+            </a:pPr>
+            <a:r>
+              <a:t>—CH₃</a:t>
+            </a:r>
+          </a:p>
+        </p:txBody>
+      </p:sp>
+      <p:sp>
+        <p:nvSpPr>
+          <p:cNvPr id="43" name="Rounded Rectangle 42"/>
+          <p:cNvSpPr/>
+          <p:nvPr/>
+        </p:nvSpPr>
+        <p:spPr>
+          <a:xfrm>
+            <a:off x="2377440" y="3337560"/>
+            <a:ext cx="731520" cy="274320"/>
+          </a:xfrm>
+          <a:prstGeom prst="roundRect">
+            <a:avLst/>
+          </a:prstGeom>
+          <a:solidFill>
+            <a:srgbClr val="FFFFFF"/>
+          </a:solidFill>
+          <a:ln w="12700">
+            <a:solidFill>
+              <a:srgbClr val="E0E0E0"/>
+            </a:solidFill>
+          </a:ln>
+        </p:spPr>
+        <p:style>
+          <a:lnRef idx="1">
+            <a:schemeClr val="accent1"/>
+          </a:lnRef>
+          <a:fillRef idx="3">
+            <a:schemeClr val="accent1"/>
+          </a:fillRef>
+          <a:effectRef idx="2">
+            <a:schemeClr val="accent1"/>
+          </a:effectRef>
+          <a:fontRef idx="minor">
+            <a:schemeClr val="lt1"/>
+          </a:fontRef>
+        </p:style>
+        <p:txBody>
+          <a:bodyPr rtlCol="0" anchor="ctr">
+            <a:normAutofit/>
+          </a:bodyPr>
+          <a:lstStyle/>
+          <a:p>
+            <a:pPr algn="ctr">
+              <a:defRPr sz="900" b="1"/>
+            </a:pPr>
+            <a:r>
+              <a:t>-7.7</a:t>
+            </a:r>
+          </a:p>
+        </p:txBody>
+      </p:sp>
+      <p:sp>
+        <p:nvSpPr>
+          <p:cNvPr id="44" name="Rounded Rectangle 43"/>
+          <p:cNvSpPr/>
+          <p:nvPr/>
+        </p:nvSpPr>
+        <p:spPr>
+          <a:xfrm>
+            <a:off x="3108960" y="3337560"/>
+            <a:ext cx="640080" cy="274320"/>
+          </a:xfrm>
+          <a:prstGeom prst="roundRect">
+            <a:avLst/>
+          </a:prstGeom>
+          <a:solidFill>
+            <a:srgbClr val="FFFFFF"/>
+          </a:solidFill>
+          <a:ln w="12700">
+            <a:solidFill>
+              <a:srgbClr val="E0E0E0"/>
+            </a:solidFill>
+          </a:ln>
+        </p:spPr>
+        <p:style>
+          <a:lnRef idx="1">
+            <a:schemeClr val="accent1"/>
+          </a:lnRef>
+          <a:fillRef idx="3">
+            <a:schemeClr val="accent1"/>
+          </a:fillRef>
+          <a:effectRef idx="2">
+            <a:schemeClr val="accent1"/>
+          </a:effectRef>
+          <a:fontRef idx="minor">
+            <a:schemeClr val="lt1"/>
+          </a:fontRef>
+        </p:style>
+        <p:txBody>
+          <a:bodyPr rtlCol="0" anchor="ctr">
+            <a:normAutofit/>
+          </a:bodyPr>
+          <a:lstStyle/>
+          <a:p>
+            <a:pPr algn="ctr">
+              <a:defRPr sz="900"/>
+            </a:pPr>
+            <a:r>
+              <a:t>234</a:t>
+            </a:r>
+          </a:p>
+        </p:txBody>
+      </p:sp>
+      <p:sp>
+        <p:nvSpPr>
+          <p:cNvPr id="45" name="Rounded Rectangle 44"/>
+          <p:cNvSpPr/>
+          <p:nvPr/>
+        </p:nvSpPr>
+        <p:spPr>
+          <a:xfrm>
+            <a:off x="3749040" y="3337560"/>
+            <a:ext cx="640080" cy="274320"/>
+          </a:xfrm>
+          <a:prstGeom prst="roundRect">
+            <a:avLst/>
+          </a:prstGeom>
+          <a:solidFill>
+            <a:srgbClr val="FFFFFF"/>
+          </a:solidFill>
+          <a:ln w="12700">
+            <a:solidFill>
+              <a:srgbClr val="E0E0E0"/>
+            </a:solidFill>
+          </a:ln>
+        </p:spPr>
+        <p:style>
+          <a:lnRef idx="1">
+            <a:schemeClr val="accent1"/>
+          </a:lnRef>
+          <a:fillRef idx="3">
+            <a:schemeClr val="accent1"/>
+          </a:fillRef>
+          <a:effectRef idx="2">
+            <a:schemeClr val="accent1"/>
+          </a:effectRef>
+          <a:fontRef idx="minor">
+            <a:schemeClr val="lt1"/>
+          </a:fontRef>
+        </p:style>
+        <p:txBody>
+          <a:bodyPr rtlCol="0" anchor="ctr">
+            <a:normAutofit/>
+          </a:bodyPr>
+          <a:lstStyle/>
+          <a:p>
+            <a:pPr algn="ctr">
+              <a:defRPr sz="900"/>
+            </a:pPr>
+            <a:r>
+              <a:t>2.3</a:t>
+            </a:r>
+          </a:p>
+        </p:txBody>
+      </p:sp>
+      <p:sp>
+        <p:nvSpPr>
+          <p:cNvPr id="46" name="Rounded Rectangle 45"/>
+          <p:cNvSpPr/>
+          <p:nvPr/>
+        </p:nvSpPr>
+        <p:spPr>
+          <a:xfrm>
+            <a:off x="4389120" y="3337560"/>
+            <a:ext cx="548640" cy="274320"/>
+          </a:xfrm>
+          <a:prstGeom prst="roundRect">
+            <a:avLst/>
+          </a:prstGeom>
+          <a:solidFill>
+            <a:srgbClr val="FFFFFF"/>
+          </a:solidFill>
+          <a:ln w="12700">
+            <a:solidFill>
+              <a:srgbClr val="E0E0E0"/>
+            </a:solidFill>
+          </a:ln>
+        </p:spPr>
+        <p:style>
+          <a:lnRef idx="1">
+            <a:schemeClr val="accent1"/>
+          </a:lnRef>
+          <a:fillRef idx="3">
+            <a:schemeClr val="accent1"/>
+          </a:fillRef>
+          <a:effectRef idx="2">
+            <a:schemeClr val="accent1"/>
+          </a:effectRef>
+          <a:fontRef idx="minor">
+            <a:schemeClr val="lt1"/>
+          </a:fontRef>
+        </p:style>
+        <p:txBody>
+          <a:bodyPr rtlCol="0" anchor="ctr">
+            <a:normAutofit/>
+          </a:bodyPr>
+          <a:lstStyle/>
+          <a:p>
+            <a:pPr algn="ctr">
+              <a:defRPr sz="900"/>
+            </a:pPr>
+            <a:r>
+              <a:t>0.35</a:t>
+            </a:r>
+          </a:p>
+        </p:txBody>
+      </p:sp>
+      <p:sp>
+        <p:nvSpPr>
+          <p:cNvPr id="47" name="Rounded Rectangle 46"/>
+          <p:cNvSpPr/>
+          <p:nvPr/>
+        </p:nvSpPr>
+        <p:spPr>
+          <a:xfrm>
+            <a:off x="4937760" y="3337560"/>
+            <a:ext cx="640080" cy="274320"/>
+          </a:xfrm>
+          <a:prstGeom prst="roundRect">
+            <a:avLst/>
+          </a:prstGeom>
+          <a:solidFill>
+            <a:srgbClr val="FFFFFF"/>
+          </a:solidFill>
+          <a:ln w="12700">
+            <a:solidFill>
+              <a:srgbClr val="E0E0E0"/>
+            </a:solidFill>
+          </a:ln>
+        </p:spPr>
+        <p:style>
+          <a:lnRef idx="1">
+            <a:schemeClr val="accent1"/>
+          </a:lnRef>
+          <a:fillRef idx="3">
+            <a:schemeClr val="accent1"/>
+          </a:fillRef>
+          <a:effectRef idx="2">
+            <a:schemeClr val="accent1"/>
+          </a:effectRef>
+          <a:fontRef idx="minor">
+            <a:schemeClr val="lt1"/>
+          </a:fontRef>
+        </p:style>
+        <p:txBody>
+          <a:bodyPr rtlCol="0" anchor="ctr">
+            <a:normAutofit/>
+          </a:bodyPr>
+          <a:lstStyle/>
+          <a:p>
+            <a:pPr algn="ctr">
+              <a:defRPr sz="900"/>
+            </a:pPr>
+            <a:r>
+              <a:t>PASS</a:t>
+            </a:r>
+          </a:p>
+        </p:txBody>
+      </p:sp>
+      <p:sp>
+        <p:nvSpPr>
+          <p:cNvPr id="48" name="Rounded Rectangle 47"/>
+          <p:cNvSpPr/>
+          <p:nvPr/>
+        </p:nvSpPr>
+        <p:spPr>
+          <a:xfrm>
+            <a:off x="731520" y="3639312"/>
+            <a:ext cx="914400" cy="274320"/>
+          </a:xfrm>
+          <a:prstGeom prst="roundRect">
+            <a:avLst/>
+          </a:prstGeom>
+          <a:solidFill>
+            <a:srgbClr val="F5F5F5"/>
+          </a:solidFill>
+          <a:ln w="12700">
+            <a:solidFill>
+              <a:srgbClr val="E0E0E0"/>
+            </a:solidFill>
+          </a:ln>
+        </p:spPr>
+        <p:style>
+          <a:lnRef idx="1">
+            <a:schemeClr val="accent1"/>
+          </a:lnRef>
+          <a:fillRef idx="3">
+            <a:schemeClr val="accent1"/>
+          </a:fillRef>
+          <a:effectRef idx="2">
+            <a:schemeClr val="accent1"/>
+          </a:effectRef>
+          <a:fontRef idx="minor">
+            <a:schemeClr val="lt1"/>
+          </a:fontRef>
+        </p:style>
+        <p:txBody>
+          <a:bodyPr rtlCol="0" anchor="ctr">
+            <a:normAutofit/>
+          </a:bodyPr>
+          <a:lstStyle/>
+          <a:p>
+            <a:pPr algn="ctr">
+              <a:defRPr sz="900"/>
+            </a:pPr>
+            <a:r>
+              <a:t>Cpd_01_H</a:t>
+            </a:r>
+          </a:p>
+        </p:txBody>
+      </p:sp>
+      <p:sp>
+        <p:nvSpPr>
+          <p:cNvPr id="49" name="Rounded Rectangle 48"/>
+          <p:cNvSpPr/>
+          <p:nvPr/>
+        </p:nvSpPr>
+        <p:spPr>
+          <a:xfrm>
+            <a:off x="1645920" y="3639312"/>
+            <a:ext cx="731520" cy="274320"/>
+          </a:xfrm>
+          <a:prstGeom prst="roundRect">
+            <a:avLst/>
+          </a:prstGeom>
+          <a:solidFill>
+            <a:srgbClr val="F5F5F5"/>
+          </a:solidFill>
+          <a:ln w="12700">
+            <a:solidFill>
+              <a:srgbClr val="E0E0E0"/>
+            </a:solidFill>
+          </a:ln>
+        </p:spPr>
+        <p:style>
+          <a:lnRef idx="1">
+            <a:schemeClr val="accent1"/>
+          </a:lnRef>
+          <a:fillRef idx="3">
+            <a:schemeClr val="accent1"/>
+          </a:fillRef>
+          <a:effectRef idx="2">
+            <a:schemeClr val="accent1"/>
+          </a:effectRef>
+          <a:fontRef idx="minor">
+            <a:schemeClr val="lt1"/>
+          </a:fontRef>
+        </p:style>
+        <p:txBody>
+          <a:bodyPr rtlCol="0" anchor="ctr">
+            <a:normAutofit/>
+          </a:bodyPr>
+          <a:lstStyle/>
+          <a:p>
+            <a:pPr algn="ctr">
+              <a:defRPr sz="900"/>
+            </a:pPr>
+            <a:r>
+              <a:t>—H</a:t>
+            </a:r>
+          </a:p>
+        </p:txBody>
+      </p:sp>
+      <p:sp>
+        <p:nvSpPr>
+          <p:cNvPr id="50" name="Rounded Rectangle 49"/>
+          <p:cNvSpPr/>
+          <p:nvPr/>
+        </p:nvSpPr>
+        <p:spPr>
+          <a:xfrm>
+            <a:off x="2377440" y="3639312"/>
+            <a:ext cx="731520" cy="274320"/>
+          </a:xfrm>
+          <a:prstGeom prst="roundRect">
+            <a:avLst/>
+          </a:prstGeom>
+          <a:solidFill>
+            <a:srgbClr val="F5F5F5"/>
+          </a:solidFill>
+          <a:ln w="12700">
+            <a:solidFill>
+              <a:srgbClr val="E0E0E0"/>
+            </a:solidFill>
+          </a:ln>
+        </p:spPr>
+        <p:style>
+          <a:lnRef idx="1">
+            <a:schemeClr val="accent1"/>
+          </a:lnRef>
+          <a:fillRef idx="3">
+            <a:schemeClr val="accent1"/>
+          </a:fillRef>
+          <a:effectRef idx="2">
+            <a:schemeClr val="accent1"/>
+          </a:effectRef>
+          <a:fontRef idx="minor">
+            <a:schemeClr val="lt1"/>
+          </a:fontRef>
+        </p:style>
+        <p:txBody>
+          <a:bodyPr rtlCol="0" anchor="ctr">
+            <a:normAutofit/>
+          </a:bodyPr>
+          <a:lstStyle/>
+          <a:p>
+            <a:pPr algn="ctr">
+              <a:defRPr sz="900" b="1"/>
+            </a:pPr>
+            <a:r>
+              <a:t>-7.2</a:t>
+            </a:r>
+          </a:p>
+        </p:txBody>
+      </p:sp>
+      <p:sp>
+        <p:nvSpPr>
+          <p:cNvPr id="51" name="Rounded Rectangle 50"/>
+          <p:cNvSpPr/>
+          <p:nvPr/>
+        </p:nvSpPr>
+        <p:spPr>
+          <a:xfrm>
+            <a:off x="3108960" y="3639312"/>
+            <a:ext cx="640080" cy="274320"/>
+          </a:xfrm>
+          <a:prstGeom prst="roundRect">
+            <a:avLst/>
+          </a:prstGeom>
+          <a:solidFill>
+            <a:srgbClr val="F5F5F5"/>
+          </a:solidFill>
+          <a:ln w="12700">
+            <a:solidFill>
+              <a:srgbClr val="E0E0E0"/>
+            </a:solidFill>
+          </a:ln>
+        </p:spPr>
+        <p:style>
+          <a:lnRef idx="1">
+            <a:schemeClr val="accent1"/>
+          </a:lnRef>
+          <a:fillRef idx="3">
+            <a:schemeClr val="accent1"/>
+          </a:fillRef>
+          <a:effectRef idx="2">
+            <a:schemeClr val="accent1"/>
+          </a:effectRef>
+          <a:fontRef idx="minor">
+            <a:schemeClr val="lt1"/>
+          </a:fontRef>
+        </p:style>
+        <p:txBody>
+          <a:bodyPr rtlCol="0" anchor="ctr">
+            <a:normAutofit/>
+          </a:bodyPr>
+          <a:lstStyle/>
+          <a:p>
+            <a:pPr algn="ctr">
+              <a:defRPr sz="900"/>
+            </a:pPr>
+            <a:r>
+              <a:t>220</a:t>
+            </a:r>
+          </a:p>
+        </p:txBody>
+      </p:sp>
+      <p:sp>
+        <p:nvSpPr>
+          <p:cNvPr id="52" name="Rounded Rectangle 51"/>
+          <p:cNvSpPr/>
+          <p:nvPr/>
+        </p:nvSpPr>
+        <p:spPr>
+          <a:xfrm>
+            <a:off x="3749040" y="3639312"/>
+            <a:ext cx="640080" cy="274320"/>
+          </a:xfrm>
+          <a:prstGeom prst="roundRect">
+            <a:avLst/>
+          </a:prstGeom>
+          <a:solidFill>
+            <a:srgbClr val="F5F5F5"/>
+          </a:solidFill>
+          <a:ln w="12700">
+            <a:solidFill>
+              <a:srgbClr val="E0E0E0"/>
+            </a:solidFill>
+          </a:ln>
+        </p:spPr>
+        <p:style>
+          <a:lnRef idx="1">
+            <a:schemeClr val="accent1"/>
+          </a:lnRef>
+          <a:fillRef idx="3">
+            <a:schemeClr val="accent1"/>
+          </a:fillRef>
+          <a:effectRef idx="2">
+            <a:schemeClr val="accent1"/>
+          </a:effectRef>
+          <a:fontRef idx="minor">
+            <a:schemeClr val="lt1"/>
+          </a:fontRef>
+        </p:style>
+        <p:txBody>
+          <a:bodyPr rtlCol="0" anchor="ctr">
+            <a:normAutofit/>
+          </a:bodyPr>
+          <a:lstStyle/>
+          <a:p>
+            <a:pPr algn="ctr">
+              <a:defRPr sz="900"/>
+            </a:pPr>
+            <a:r>
+              <a:t>1.9</a:t>
+            </a:r>
+          </a:p>
+        </p:txBody>
+      </p:sp>
+      <p:sp>
+        <p:nvSpPr>
+          <p:cNvPr id="53" name="Rounded Rectangle 52"/>
+          <p:cNvSpPr/>
+          <p:nvPr/>
+        </p:nvSpPr>
+        <p:spPr>
+          <a:xfrm>
+            <a:off x="4389120" y="3639312"/>
+            <a:ext cx="548640" cy="274320"/>
+          </a:xfrm>
+          <a:prstGeom prst="roundRect">
+            <a:avLst/>
+          </a:prstGeom>
+          <a:solidFill>
+            <a:srgbClr val="F5F5F5"/>
+          </a:solidFill>
+          <a:ln w="12700">
+            <a:solidFill>
+              <a:srgbClr val="E0E0E0"/>
+            </a:solidFill>
+          </a:ln>
+        </p:spPr>
+        <p:style>
+          <a:lnRef idx="1">
+            <a:schemeClr val="accent1"/>
+          </a:lnRef>
+          <a:fillRef idx="3">
+            <a:schemeClr val="accent1"/>
+          </a:fillRef>
+          <a:effectRef idx="2">
+            <a:schemeClr val="accent1"/>
+          </a:effectRef>
+          <a:fontRef idx="minor">
+            <a:schemeClr val="lt1"/>
+          </a:fontRef>
+        </p:style>
+        <p:txBody>
+          <a:bodyPr rtlCol="0" anchor="ctr">
+            <a:normAutofit/>
+          </a:bodyPr>
+          <a:lstStyle/>
+          <a:p>
+            <a:pPr algn="ctr">
+              <a:defRPr sz="900"/>
+            </a:pPr>
+            <a:r>
+              <a:t>0.33</a:t>
+            </a:r>
+          </a:p>
+        </p:txBody>
+      </p:sp>
+      <p:sp>
+        <p:nvSpPr>
+          <p:cNvPr id="54" name="Rounded Rectangle 53"/>
+          <p:cNvSpPr/>
+          <p:nvPr/>
+        </p:nvSpPr>
+        <p:spPr>
+          <a:xfrm>
+            <a:off x="4937760" y="3639312"/>
+            <a:ext cx="640080" cy="274320"/>
+          </a:xfrm>
+          <a:prstGeom prst="roundRect">
+            <a:avLst/>
+          </a:prstGeom>
+          <a:solidFill>
+            <a:srgbClr val="F5F5F5"/>
+          </a:solidFill>
+          <a:ln w="12700">
+            <a:solidFill>
+              <a:srgbClr val="E0E0E0"/>
+            </a:solidFill>
+          </a:ln>
+        </p:spPr>
+        <p:style>
+          <a:lnRef idx="1">
+            <a:schemeClr val="accent1"/>
+          </a:lnRef>
+          <a:fillRef idx="3">
+            <a:schemeClr val="accent1"/>
+          </a:fillRef>
+          <a:effectRef idx="2">
+            <a:schemeClr val="accent1"/>
+          </a:effectRef>
+          <a:fontRef idx="minor">
+            <a:schemeClr val="lt1"/>
+          </a:fontRef>
+        </p:style>
+        <p:txBody>
+          <a:bodyPr rtlCol="0" anchor="ctr">
+            <a:normAutofit/>
+          </a:bodyPr>
+          <a:lstStyle/>
+          <a:p>
+            <a:pPr algn="ctr">
+              <a:defRPr sz="900"/>
+            </a:pPr>
+            <a:r>
+              <a:t>PASS</a:t>
+            </a:r>
+          </a:p>
+        </p:txBody>
+      </p:sp>
+      <p:sp>
+        <p:nvSpPr>
+          <p:cNvPr id="55" name="Rounded Rectangle 54"/>
+          <p:cNvSpPr/>
+          <p:nvPr/>
+        </p:nvSpPr>
+        <p:spPr>
+          <a:xfrm>
+            <a:off x="731520" y="3941064"/>
+            <a:ext cx="914400" cy="274320"/>
+          </a:xfrm>
+          <a:prstGeom prst="roundRect">
+            <a:avLst/>
+          </a:prstGeom>
+          <a:solidFill>
+            <a:srgbClr val="FFFFFF"/>
+          </a:solidFill>
+          <a:ln w="12700">
+            <a:solidFill>
+              <a:srgbClr val="E0E0E0"/>
+            </a:solidFill>
+          </a:ln>
+        </p:spPr>
+        <p:style>
+          <a:lnRef idx="1">
+            <a:schemeClr val="accent1"/>
+          </a:lnRef>
+          <a:fillRef idx="3">
+            <a:schemeClr val="accent1"/>
+          </a:fillRef>
+          <a:effectRef idx="2">
+            <a:schemeClr val="accent1"/>
+          </a:effectRef>
+          <a:fontRef idx="minor">
+            <a:schemeClr val="lt1"/>
+          </a:fontRef>
+        </p:style>
+        <p:txBody>
+          <a:bodyPr rtlCol="0" anchor="ctr">
+            <a:normAutofit/>
+          </a:bodyPr>
+          <a:lstStyle/>
+          <a:p>
+            <a:pPr algn="ctr">
+              <a:defRPr sz="900"/>
+            </a:pPr>
+            <a:r>
+              <a:t>Cpd_05_OCH3</a:t>
+            </a:r>
+          </a:p>
+        </p:txBody>
+      </p:sp>
+      <p:sp>
+        <p:nvSpPr>
+          <p:cNvPr id="56" name="Rounded Rectangle 55"/>
+          <p:cNvSpPr/>
+          <p:nvPr/>
+        </p:nvSpPr>
+        <p:spPr>
+          <a:xfrm>
+            <a:off x="1645920" y="3941064"/>
+            <a:ext cx="731520" cy="274320"/>
+          </a:xfrm>
+          <a:prstGeom prst="roundRect">
+            <a:avLst/>
+          </a:prstGeom>
+          <a:solidFill>
+            <a:srgbClr val="FFFFFF"/>
+          </a:solidFill>
+          <a:ln w="12700">
+            <a:solidFill>
+              <a:srgbClr val="E0E0E0"/>
+            </a:solidFill>
+          </a:ln>
+        </p:spPr>
+        <p:style>
+          <a:lnRef idx="1">
+            <a:schemeClr val="accent1"/>
+          </a:lnRef>
+          <a:fillRef idx="3">
+            <a:schemeClr val="accent1"/>
+          </a:fillRef>
+          <a:effectRef idx="2">
+            <a:schemeClr val="accent1"/>
+          </a:effectRef>
+          <a:fontRef idx="minor">
+            <a:schemeClr val="lt1"/>
+          </a:fontRef>
+        </p:style>
+        <p:txBody>
+          <a:bodyPr rtlCol="0" anchor="ctr">
+            <a:normAutofit/>
+          </a:bodyPr>
+          <a:lstStyle/>
+          <a:p>
+            <a:pPr algn="ctr">
+              <a:defRPr sz="900"/>
+            </a:pPr>
+            <a:r>
+              <a:t>—OCH₃</a:t>
+            </a:r>
+          </a:p>
+        </p:txBody>
+      </p:sp>
+      <p:sp>
+        <p:nvSpPr>
+          <p:cNvPr id="57" name="Rounded Rectangle 56"/>
+          <p:cNvSpPr/>
+          <p:nvPr/>
+        </p:nvSpPr>
+        <p:spPr>
+          <a:xfrm>
+            <a:off x="2377440" y="3941064"/>
+            <a:ext cx="731520" cy="274320"/>
+          </a:xfrm>
+          <a:prstGeom prst="roundRect">
+            <a:avLst/>
+          </a:prstGeom>
+          <a:solidFill>
+            <a:srgbClr val="FFFFFF"/>
+          </a:solidFill>
+          <a:ln w="12700">
+            <a:solidFill>
+              <a:srgbClr val="E0E0E0"/>
+            </a:solidFill>
+          </a:ln>
+        </p:spPr>
+        <p:style>
+          <a:lnRef idx="1">
+            <a:schemeClr val="accent1"/>
+          </a:lnRef>
+          <a:fillRef idx="3">
+            <a:schemeClr val="accent1"/>
+          </a:fillRef>
+          <a:effectRef idx="2">
+            <a:schemeClr val="accent1"/>
+          </a:effectRef>
+          <a:fontRef idx="minor">
+            <a:schemeClr val="lt1"/>
+          </a:fontRef>
+        </p:style>
+        <p:txBody>
+          <a:bodyPr rtlCol="0" anchor="ctr">
+            <a:normAutofit/>
+          </a:bodyPr>
+          <a:lstStyle/>
+          <a:p>
+            <a:pPr algn="ctr">
+              <a:defRPr sz="900" b="1"/>
+            </a:pPr>
+            <a:r>
+              <a:t>-6.9</a:t>
+            </a:r>
+          </a:p>
+        </p:txBody>
+      </p:sp>
+      <p:sp>
+        <p:nvSpPr>
+          <p:cNvPr id="58" name="Rounded Rectangle 57"/>
+          <p:cNvSpPr/>
+          <p:nvPr/>
+        </p:nvSpPr>
+        <p:spPr>
+          <a:xfrm>
+            <a:off x="3108960" y="3941064"/>
+            <a:ext cx="640080" cy="274320"/>
+          </a:xfrm>
+          <a:prstGeom prst="roundRect">
+            <a:avLst/>
+          </a:prstGeom>
+          <a:solidFill>
+            <a:srgbClr val="FFFFFF"/>
+          </a:solidFill>
+          <a:ln w="12700">
+            <a:solidFill>
+              <a:srgbClr val="E0E0E0"/>
+            </a:solidFill>
+          </a:ln>
+        </p:spPr>
+        <p:style>
+          <a:lnRef idx="1">
+            <a:schemeClr val="accent1"/>
+          </a:lnRef>
+          <a:fillRef idx="3">
+            <a:schemeClr val="accent1"/>
+          </a:fillRef>
+          <a:effectRef idx="2">
+            <a:schemeClr val="accent1"/>
+          </a:effectRef>
+          <a:fontRef idx="minor">
+            <a:schemeClr val="lt1"/>
+          </a:fontRef>
+        </p:style>
+        <p:txBody>
+          <a:bodyPr rtlCol="0" anchor="ctr">
+            <a:normAutofit/>
+          </a:bodyPr>
+          <a:lstStyle/>
+          <a:p>
+            <a:pPr algn="ctr">
+              <a:defRPr sz="900"/>
+            </a:pPr>
+            <a:r>
+              <a:t>250</a:t>
+            </a:r>
+          </a:p>
+        </p:txBody>
+      </p:sp>
+      <p:sp>
+        <p:nvSpPr>
+          <p:cNvPr id="59" name="Rounded Rectangle 58"/>
+          <p:cNvSpPr/>
+          <p:nvPr/>
+        </p:nvSpPr>
+        <p:spPr>
+          <a:xfrm>
+            <a:off x="3749040" y="3941064"/>
+            <a:ext cx="640080" cy="274320"/>
+          </a:xfrm>
+          <a:prstGeom prst="roundRect">
+            <a:avLst/>
+          </a:prstGeom>
+          <a:solidFill>
+            <a:srgbClr val="FFFFFF"/>
+          </a:solidFill>
+          <a:ln w="12700">
+            <a:solidFill>
+              <a:srgbClr val="E0E0E0"/>
+            </a:solidFill>
+          </a:ln>
+        </p:spPr>
+        <p:style>
+          <a:lnRef idx="1">
+            <a:schemeClr val="accent1"/>
+          </a:lnRef>
+          <a:fillRef idx="3">
+            <a:schemeClr val="accent1"/>
+          </a:fillRef>
+          <a:effectRef idx="2">
+            <a:schemeClr val="accent1"/>
+          </a:effectRef>
+          <a:fontRef idx="minor">
+            <a:schemeClr val="lt1"/>
+          </a:fontRef>
+        </p:style>
+        <p:txBody>
+          <a:bodyPr rtlCol="0" anchor="ctr">
+            <a:normAutofit/>
+          </a:bodyPr>
+          <a:lstStyle/>
+          <a:p>
+            <a:pPr algn="ctr">
+              <a:defRPr sz="900"/>
+            </a:pPr>
+            <a:r>
+              <a:t>1.8</a:t>
+            </a:r>
+          </a:p>
+        </p:txBody>
+      </p:sp>
+      <p:sp>
+        <p:nvSpPr>
+          <p:cNvPr id="60" name="Rounded Rectangle 59"/>
+          <p:cNvSpPr/>
+          <p:nvPr/>
+        </p:nvSpPr>
+        <p:spPr>
+          <a:xfrm>
+            <a:off x="4389120" y="3941064"/>
+            <a:ext cx="548640" cy="274320"/>
+          </a:xfrm>
+          <a:prstGeom prst="roundRect">
+            <a:avLst/>
+          </a:prstGeom>
+          <a:solidFill>
+            <a:srgbClr val="FFFFFF"/>
+          </a:solidFill>
+          <a:ln w="12700">
+            <a:solidFill>
+              <a:srgbClr val="E0E0E0"/>
+            </a:solidFill>
+          </a:ln>
+        </p:spPr>
+        <p:style>
+          <a:lnRef idx="1">
+            <a:schemeClr val="accent1"/>
+          </a:lnRef>
+          <a:fillRef idx="3">
+            <a:schemeClr val="accent1"/>
+          </a:fillRef>
+          <a:effectRef idx="2">
+            <a:schemeClr val="accent1"/>
+          </a:effectRef>
+          <a:fontRef idx="minor">
+            <a:schemeClr val="lt1"/>
+          </a:fontRef>
+        </p:style>
+        <p:txBody>
+          <a:bodyPr rtlCol="0" anchor="ctr">
+            <a:normAutofit/>
+          </a:bodyPr>
+          <a:lstStyle/>
+          <a:p>
+            <a:pPr algn="ctr">
+              <a:defRPr sz="900"/>
+            </a:pPr>
+            <a:r>
+              <a:t>0.28</a:t>
+            </a:r>
+          </a:p>
+        </p:txBody>
+      </p:sp>
+      <p:sp>
+        <p:nvSpPr>
+          <p:cNvPr id="61" name="Rounded Rectangle 60"/>
+          <p:cNvSpPr/>
+          <p:nvPr/>
+        </p:nvSpPr>
+        <p:spPr>
+          <a:xfrm>
+            <a:off x="4937760" y="3941064"/>
+            <a:ext cx="640080" cy="274320"/>
+          </a:xfrm>
+          <a:prstGeom prst="roundRect">
+            <a:avLst/>
+          </a:prstGeom>
+          <a:solidFill>
+            <a:srgbClr val="FFFFFF"/>
+          </a:solidFill>
+          <a:ln w="12700">
+            <a:solidFill>
+              <a:srgbClr val="E0E0E0"/>
+            </a:solidFill>
+          </a:ln>
+        </p:spPr>
+        <p:style>
+          <a:lnRef idx="1">
+            <a:schemeClr val="accent1"/>
+          </a:lnRef>
+          <a:fillRef idx="3">
+            <a:schemeClr val="accent1"/>
+          </a:fillRef>
+          <a:effectRef idx="2">
+            <a:schemeClr val="accent1"/>
+          </a:effectRef>
+          <a:fontRef idx="minor">
+            <a:schemeClr val="lt1"/>
+          </a:fontRef>
+        </p:style>
+        <p:txBody>
+          <a:bodyPr rtlCol="0" anchor="ctr">
+            <a:normAutofit/>
+          </a:bodyPr>
+          <a:lstStyle/>
+          <a:p>
+            <a:pPr algn="ctr">
+              <a:defRPr sz="900"/>
+            </a:pPr>
+            <a:r>
+              <a:t>PASS</a:t>
+            </a:r>
+          </a:p>
+        </p:txBody>
+      </p:sp>
+      <p:sp>
+        <p:nvSpPr>
+          <p:cNvPr id="62" name="Rounded Rectangle 61"/>
+          <p:cNvSpPr/>
+          <p:nvPr/>
+        </p:nvSpPr>
+        <p:spPr>
+          <a:xfrm>
+            <a:off x="731520" y="4343400"/>
+            <a:ext cx="5029200" cy="2103120"/>
+          </a:xfrm>
+          <a:prstGeom prst="roundRect">
+            <a:avLst/>
+          </a:prstGeom>
+          <a:solidFill>
+            <a:srgbClr val="E0F2F1"/>
+          </a:solidFill>
+          <a:ln w="12700">
+            <a:solidFill>
+              <a:srgbClr val="00897B"/>
+            </a:solidFill>
+          </a:ln>
+        </p:spPr>
+        <p:style>
+          <a:lnRef idx="1">
+            <a:schemeClr val="accent1"/>
+          </a:lnRef>
+          <a:fillRef idx="3">
+            <a:schemeClr val="accent1"/>
+          </a:fillRef>
+          <a:effectRef idx="2">
+            <a:schemeClr val="accent1"/>
+          </a:effectRef>
+          <a:fontRef idx="minor">
+            <a:schemeClr val="lt1"/>
+          </a:fontRef>
+        </p:style>
+        <p:txBody>
+          <a:bodyPr rtlCol="0" anchor="ctr"/>
+          <a:lstStyle/>
+          <a:p>
+            <a:pPr algn="ctr"/>
+          </a:p>
+        </p:txBody>
+      </p:sp>
+      <p:sp>
+        <p:nvSpPr>
+          <p:cNvPr id="63" name="TextBox 62"/>
+          <p:cNvSpPr txBox="1"/>
+          <p:nvPr/>
+        </p:nvSpPr>
+        <p:spPr>
+          <a:xfrm>
+            <a:off x="1005840" y="4480560"/>
+            <a:ext cx="4572000" cy="320040"/>
+          </a:xfrm>
+          <a:prstGeom prst="rect">
+            <a:avLst/>
+          </a:prstGeom>
+          <a:noFill/>
+        </p:spPr>
+        <p:txBody>
+          <a:bodyPr wrap="square">
+            <a:normAutofit/>
+          </a:bodyPr>
+          <a:lstStyle/>
+          <a:p>
+            <a:pPr algn="l">
+              <a:spcAft>
+                <a:spcPts val="200"/>
+              </a:spcAft>
+              <a:defRPr sz="1600" b="1">
+                <a:solidFill>
+                  <a:srgbClr val="00897B"/>
+                </a:solidFill>
+                <a:latin typeface="맑은 고딕"/>
+              </a:defRPr>
+            </a:pPr>
+            <a:r>
+              <a:t>SAR 인사이트</a:t>
+            </a:r>
+          </a:p>
+        </p:txBody>
+      </p:sp>
+      <p:sp>
+        <p:nvSpPr>
+          <p:cNvPr id="64" name="TextBox 63"/>
+          <p:cNvSpPr txBox="1"/>
+          <p:nvPr/>
+        </p:nvSpPr>
+        <p:spPr>
+          <a:xfrm>
+            <a:off x="1005840" y="4846320"/>
+            <a:ext cx="4572000" cy="1371600"/>
+          </a:xfrm>
+          <a:prstGeom prst="rect">
+            <a:avLst/>
+          </a:prstGeom>
+          <a:noFill/>
+        </p:spPr>
+        <p:txBody>
+          <a:bodyPr wrap="square">
+            <a:normAutofit/>
+          </a:bodyPr>
+          <a:lstStyle/>
+          <a:p>
+            <a:pPr algn="l">
+              <a:spcAft>
+                <a:spcPts val="200"/>
+              </a:spcAft>
+              <a:defRPr sz="1200" b="0">
+                <a:solidFill>
+                  <a:srgbClr val="212121"/>
+                </a:solidFill>
+                <a:latin typeface="맑은 고딕"/>
+              </a:defRPr>
+            </a:pPr>
+            <a:r>
+              <a:t>• —F: 최고 스코어 (-8.5) + 최고 LE (0.39)</a:t>
+            </a:r>
+          </a:p>
+          <a:p>
+            <a:pPr algn="l">
+              <a:spcAft>
+                <a:spcPts val="200"/>
+              </a:spcAft>
+              <a:defRPr sz="1200" b="0">
+                <a:solidFill>
+                  <a:srgbClr val="212121"/>
+                </a:solidFill>
+                <a:latin typeface="맑은 고딕"/>
+              </a:defRPr>
+            </a:pPr>
+            <a:r>
+              <a:t>• —CF₃: 스코어 좋지만 MW↑ → LE 하락</a:t>
+            </a:r>
+          </a:p>
+          <a:p>
+            <a:pPr algn="l">
+              <a:spcAft>
+                <a:spcPts val="200"/>
+              </a:spcAft>
+              <a:defRPr sz="1200" b="0">
+                <a:solidFill>
+                  <a:srgbClr val="212121"/>
+                </a:solidFill>
+                <a:latin typeface="맑은 고딕"/>
+              </a:defRPr>
+            </a:pPr>
+            <a:r>
+              <a:t>• —NH₂: 수소결합 공여로 향상</a:t>
+            </a:r>
+          </a:p>
+          <a:p>
+            <a:pPr algn="l">
+              <a:spcAft>
+                <a:spcPts val="200"/>
+              </a:spcAft>
+              <a:defRPr sz="1200" b="0">
+                <a:solidFill>
+                  <a:srgbClr val="212121"/>
+                </a:solidFill>
+                <a:latin typeface="맑은 고딕"/>
+              </a:defRPr>
+            </a:pPr>
+            <a:r>
+              <a:t>• —OCH₃: 입체 장애로 최하위, LE&lt;0.3</a:t>
+            </a:r>
+          </a:p>
+          <a:p>
+            <a:pPr algn="l">
+              <a:spcAft>
+                <a:spcPts val="200"/>
+              </a:spcAft>
+              <a:defRPr sz="1200" b="0">
+                <a:solidFill>
+                  <a:srgbClr val="212121"/>
+                </a:solidFill>
+                <a:latin typeface="맑은 고딕"/>
+              </a:defRPr>
+            </a:pPr>
+            <a:r>
+              <a:t>• 전기음성도 높은 치환체(F, CF₃)가 유리</a:t>
+            </a:r>
+          </a:p>
+        </p:txBody>
+      </p:sp>
+      <p:sp>
+        <p:nvSpPr>
+          <p:cNvPr id="65" name="TextBox 64"/>
+          <p:cNvSpPr txBox="1"/>
+          <p:nvPr/>
+        </p:nvSpPr>
+        <p:spPr>
+          <a:xfrm>
+            <a:off x="6583680" y="1417320"/>
+            <a:ext cx="4846320" cy="320040"/>
+          </a:xfrm>
+          <a:prstGeom prst="rect">
+            <a:avLst/>
+          </a:prstGeom>
+          <a:noFill/>
+        </p:spPr>
+        <p:txBody>
+          <a:bodyPr wrap="square">
+            <a:normAutofit/>
+          </a:bodyPr>
+          <a:lstStyle/>
+          <a:p>
+            <a:pPr algn="l">
+              <a:spcAft>
+                <a:spcPts val="200"/>
+              </a:spcAft>
+              <a:defRPr sz="1800" b="1">
+                <a:solidFill>
+                  <a:srgbClr val="212121"/>
+                </a:solidFill>
+                <a:latin typeface="맑은 고딕"/>
+              </a:defRPr>
+            </a:pPr>
+            <a:r>
+              <a:t>스코어 비교 차트 코드</a:t>
+            </a:r>
+          </a:p>
+        </p:txBody>
+      </p:sp>
+      <p:sp>
+        <p:nvSpPr>
+          <p:cNvPr id="66" name="Rounded Rectangle 65"/>
+          <p:cNvSpPr/>
+          <p:nvPr/>
+        </p:nvSpPr>
+        <p:spPr>
+          <a:xfrm>
+            <a:off x="6583680" y="1783080"/>
+            <a:ext cx="4846320" cy="2286000"/>
+          </a:xfrm>
+          <a:prstGeom prst="roundRect">
+            <a:avLst/>
+          </a:prstGeom>
+          <a:solidFill>
+            <a:srgbClr val="282C34"/>
+          </a:solidFill>
+          <a:ln>
+            <a:noFill/>
+          </a:ln>
+        </p:spPr>
+        <p:style>
+          <a:lnRef idx="1">
+            <a:schemeClr val="accent1"/>
+          </a:lnRef>
+          <a:fillRef idx="3">
+            <a:schemeClr val="accent1"/>
+          </a:fillRef>
+          <a:effectRef idx="2">
+            <a:schemeClr val="accent1"/>
+          </a:effectRef>
+          <a:fontRef idx="minor">
+            <a:schemeClr val="lt1"/>
+          </a:fontRef>
+        </p:style>
+        <p:txBody>
+          <a:bodyPr rtlCol="0" anchor="ctr" wrap="square" lIns="152400" tIns="101600" rIns="152400" bIns="101600">
+            <a:normAutofit/>
+          </a:bodyPr>
+          <a:lstStyle/>
+          <a:p>
+            <a:pPr algn="ctr">
+              <a:spcAft>
+                <a:spcPts val="0"/>
+              </a:spcAft>
+              <a:defRPr sz="1100">
+                <a:solidFill>
+                  <a:srgbClr val="6A9955"/>
+                </a:solidFill>
+                <a:latin typeface="Consolas"/>
+              </a:defRPr>
+            </a:pPr>
+            <a:r>
+              <a:t># R1 scan 바 차트 (자동 생성됨)</a:t>
+            </a:r>
+          </a:p>
+          <a:p>
+            <a:pPr>
+              <a:spcAft>
+                <a:spcPts val="0"/>
+              </a:spcAft>
+              <a:defRPr sz="1100">
+                <a:solidFill>
+                  <a:srgbClr val="ABB2BF"/>
+                </a:solidFill>
+                <a:latin typeface="Consolas"/>
+              </a:defRPr>
+            </a:pPr>
+            <a:r>
+              <a:t>r1 = df[df['Series'] == 'R1_scan']</a:t>
+            </a:r>
+          </a:p>
+          <a:p>
+            <a:pPr>
+              <a:spcAft>
+                <a:spcPts val="0"/>
+              </a:spcAft>
+              <a:defRPr sz="1100">
+                <a:solidFill>
+                  <a:srgbClr val="ABB2BF"/>
+                </a:solidFill>
+                <a:latin typeface="Consolas"/>
+              </a:defRPr>
+            </a:pPr>
+            <a:r>
+              <a:t>ax.barh(r1['R1'], r1['Score'])</a:t>
+            </a:r>
+          </a:p>
+          <a:p>
+            <a:pPr>
+              <a:spcAft>
+                <a:spcPts val="0"/>
+              </a:spcAft>
+              <a:defRPr sz="1100">
+                <a:solidFill>
+                  <a:srgbClr val="ABB2BF"/>
+                </a:solidFill>
+                <a:latin typeface="Consolas"/>
+              </a:defRPr>
+            </a:pPr>
+            <a:r>
+              <a:t>ax.axvline(x=-7.0, linestyle='--')</a:t>
+            </a:r>
+          </a:p>
+          <a:p>
+            <a:pPr>
+              <a:spcAft>
+                <a:spcPts val="0"/>
+              </a:spcAft>
+              <a:defRPr sz="1100">
+                <a:solidFill>
+                  <a:srgbClr val="ABB2BF"/>
+                </a:solidFill>
+                <a:latin typeface="Consolas"/>
+              </a:defRPr>
+            </a:pPr>
+          </a:p>
+          <a:p>
+            <a:pPr>
+              <a:spcAft>
+                <a:spcPts val="0"/>
+              </a:spcAft>
+              <a:defRPr sz="1100">
+                <a:solidFill>
+                  <a:srgbClr val="6A9955"/>
+                </a:solidFill>
+                <a:latin typeface="Consolas"/>
+              </a:defRPr>
+            </a:pPr>
+            <a:r>
+              <a:t># Score vs LE 산점도</a:t>
+            </a:r>
+          </a:p>
+          <a:p>
+            <a:pPr>
+              <a:spcAft>
+                <a:spcPts val="0"/>
+              </a:spcAft>
+              <a:defRPr sz="1100">
+                <a:solidFill>
+                  <a:srgbClr val="ABB2BF"/>
+                </a:solidFill>
+                <a:latin typeface="Consolas"/>
+              </a:defRPr>
+            </a:pPr>
+            <a:r>
+              <a:t>ax.scatter(df['Score'], df['LE'], s=80)</a:t>
+            </a:r>
+          </a:p>
+          <a:p>
+            <a:pPr>
+              <a:spcAft>
+                <a:spcPts val="0"/>
+              </a:spcAft>
+              <a:defRPr sz="1100">
+                <a:solidFill>
+                  <a:srgbClr val="ABB2BF"/>
+                </a:solidFill>
+                <a:latin typeface="Consolas"/>
+              </a:defRPr>
+            </a:pPr>
+            <a:r>
+              <a:t>ax.axhline(y=0.3, color='green',</a:t>
+            </a:r>
+          </a:p>
+          <a:p>
+            <a:pPr>
+              <a:spcAft>
+                <a:spcPts val="0"/>
+              </a:spcAft>
+              <a:defRPr sz="1100">
+                <a:solidFill>
+                  <a:srgbClr val="ABB2BF"/>
+                </a:solidFill>
+                <a:latin typeface="Consolas"/>
+              </a:defRPr>
+            </a:pPr>
+            <a:r>
+              <a:t>           linestyle='--', label='LE=0.3')</a:t>
+            </a:r>
+          </a:p>
+          <a:p>
+            <a:pPr>
+              <a:spcAft>
+                <a:spcPts val="0"/>
+              </a:spcAft>
+              <a:defRPr sz="1100">
+                <a:solidFill>
+                  <a:srgbClr val="ABB2BF"/>
+                </a:solidFill>
+                <a:latin typeface="Consolas"/>
+              </a:defRPr>
+            </a:pPr>
+          </a:p>
+          <a:p>
+            <a:pPr>
+              <a:spcAft>
+                <a:spcPts val="0"/>
+              </a:spcAft>
+              <a:defRPr sz="1100">
+                <a:solidFill>
+                  <a:srgbClr val="6A9955"/>
+                </a:solidFill>
+                <a:latin typeface="Consolas"/>
+              </a:defRPr>
+            </a:pPr>
+            <a:r>
+              <a:t># Lipinski Rule of Five 자동 체크</a:t>
+            </a:r>
+          </a:p>
+          <a:p>
+            <a:pPr>
+              <a:spcAft>
+                <a:spcPts val="0"/>
+              </a:spcAft>
+              <a:defRPr sz="1100">
+                <a:solidFill>
+                  <a:srgbClr val="ABB2BF"/>
+                </a:solidFill>
+                <a:latin typeface="Consolas"/>
+              </a:defRPr>
+            </a:pPr>
+            <a:r>
+              <a:t>df['violations'] = 0</a:t>
+            </a:r>
+          </a:p>
+          <a:p>
+            <a:pPr>
+              <a:spcAft>
+                <a:spcPts val="0"/>
+              </a:spcAft>
+              <a:defRPr sz="1100">
+                <a:solidFill>
+                  <a:srgbClr val="ABB2BF"/>
+                </a:solidFill>
+                <a:latin typeface="Consolas"/>
+              </a:defRPr>
+            </a:pPr>
+            <a:r>
+              <a:t>df.loc[df['MW'] &gt; 500, 'violations'] += 1</a:t>
+            </a:r>
+          </a:p>
+          <a:p>
+            <a:pPr>
+              <a:spcAft>
+                <a:spcPts val="0"/>
+              </a:spcAft>
+              <a:defRPr sz="1100">
+                <a:solidFill>
+                  <a:srgbClr val="ABB2BF"/>
+                </a:solidFill>
+                <a:latin typeface="Consolas"/>
+              </a:defRPr>
+            </a:pPr>
+            <a:r>
+              <a:t>df.loc[df['cLogP'] &gt; 5, 'violations'] += 1</a:t>
+            </a:r>
+          </a:p>
+        </p:txBody>
+      </p:sp>
+      <p:sp>
+        <p:nvSpPr>
+          <p:cNvPr id="67" name="TextBox 66"/>
+          <p:cNvSpPr txBox="1"/>
+          <p:nvPr/>
+        </p:nvSpPr>
+        <p:spPr>
+          <a:xfrm>
+            <a:off x="6583680" y="4251960"/>
+            <a:ext cx="4846320" cy="320040"/>
+          </a:xfrm>
+          <a:prstGeom prst="rect">
+            <a:avLst/>
+          </a:prstGeom>
+          <a:noFill/>
+        </p:spPr>
+        <p:txBody>
+          <a:bodyPr wrap="square">
+            <a:normAutofit/>
+          </a:bodyPr>
+          <a:lstStyle/>
+          <a:p>
+            <a:pPr algn="l">
+              <a:spcAft>
+                <a:spcPts val="200"/>
+              </a:spcAft>
+              <a:defRPr sz="1800" b="1">
+                <a:solidFill>
+                  <a:srgbClr val="212121"/>
+                </a:solidFill>
+                <a:latin typeface="맑은 고딕"/>
+              </a:defRPr>
+            </a:pPr>
+            <a:r>
+              <a:t>결과 내보내기</a:t>
+            </a:r>
+          </a:p>
+        </p:txBody>
+      </p:sp>
+      <p:sp>
+        <p:nvSpPr>
+          <p:cNvPr id="68" name="Rounded Rectangle 67"/>
+          <p:cNvSpPr/>
+          <p:nvPr/>
+        </p:nvSpPr>
+        <p:spPr>
+          <a:xfrm>
+            <a:off x="6583680" y="4617720"/>
+            <a:ext cx="4846320" cy="1828800"/>
+          </a:xfrm>
+          <a:prstGeom prst="roundRect">
+            <a:avLst/>
+          </a:prstGeom>
+          <a:solidFill>
+            <a:srgbClr val="282C34"/>
+          </a:solidFill>
+          <a:ln>
+            <a:noFill/>
+          </a:ln>
+        </p:spPr>
+        <p:style>
+          <a:lnRef idx="1">
+            <a:schemeClr val="accent1"/>
+          </a:lnRef>
+          <a:fillRef idx="3">
+            <a:schemeClr val="accent1"/>
+          </a:fillRef>
+          <a:effectRef idx="2">
+            <a:schemeClr val="accent1"/>
+          </a:effectRef>
+          <a:fontRef idx="minor">
+            <a:schemeClr val="lt1"/>
+          </a:fontRef>
+        </p:style>
+        <p:txBody>
+          <a:bodyPr rtlCol="0" anchor="ctr" wrap="square" lIns="152400" tIns="101600" rIns="152400" bIns="101600">
+            <a:normAutofit/>
+          </a:bodyPr>
+          <a:lstStyle/>
+          <a:p>
+            <a:pPr algn="ctr">
+              <a:spcAft>
+                <a:spcPts val="0"/>
+              </a:spcAft>
+              <a:defRPr sz="1100">
+                <a:solidFill>
+                  <a:srgbClr val="6A9955"/>
+                </a:solidFill>
+                <a:latin typeface="Consolas"/>
+              </a:defRPr>
+            </a:pPr>
+            <a:r>
+              <a:t># DataWarrior용 SDF (구조+속성 통합)</a:t>
+            </a:r>
+          </a:p>
+          <a:p>
+            <a:pPr>
+              <a:spcAft>
+                <a:spcPts val="0"/>
+              </a:spcAft>
+              <a:defRPr sz="1100">
+                <a:solidFill>
+                  <a:srgbClr val="ABB2BF"/>
+                </a:solidFill>
+                <a:latin typeface="Consolas"/>
+              </a:defRPr>
+            </a:pPr>
+            <a:r>
+              <a:t>writer = Chem.SDWriter('sar_results.sdf')</a:t>
+            </a:r>
+          </a:p>
+          <a:p>
+            <a:pPr>
+              <a:spcAft>
+                <a:spcPts val="0"/>
+              </a:spcAft>
+              <a:defRPr sz="1100">
+                <a:solidFill>
+                  <a:srgbClr val="ABB2BF"/>
+                </a:solidFill>
+                <a:latin typeface="Consolas"/>
+              </a:defRPr>
+            </a:pPr>
+            <a:r>
+              <a:t>for mol in results:</a:t>
+            </a:r>
+          </a:p>
+          <a:p>
+            <a:pPr>
+              <a:spcAft>
+                <a:spcPts val="0"/>
+              </a:spcAft>
+              <a:defRPr sz="1100">
+                <a:solidFill>
+                  <a:srgbClr val="ABB2BF"/>
+                </a:solidFill>
+                <a:latin typeface="Consolas"/>
+              </a:defRPr>
+            </a:pPr>
+            <a:r>
+              <a:t>    mol.SetProp('Score', str(score))</a:t>
+            </a:r>
+          </a:p>
+          <a:p>
+            <a:pPr>
+              <a:spcAft>
+                <a:spcPts val="0"/>
+              </a:spcAft>
+              <a:defRPr sz="1100">
+                <a:solidFill>
+                  <a:srgbClr val="ABB2BF"/>
+                </a:solidFill>
+                <a:latin typeface="Consolas"/>
+              </a:defRPr>
+            </a:pPr>
+            <a:r>
+              <a:t>    mol.SetProp('LE', str(le))</a:t>
+            </a:r>
+          </a:p>
+          <a:p>
+            <a:pPr>
+              <a:spcAft>
+                <a:spcPts val="0"/>
+              </a:spcAft>
+              <a:defRPr sz="1100">
+                <a:solidFill>
+                  <a:srgbClr val="ABB2BF"/>
+                </a:solidFill>
+                <a:latin typeface="Consolas"/>
+              </a:defRPr>
+            </a:pPr>
+            <a:r>
+              <a:t>    writer.write(mol)</a:t>
+            </a:r>
+          </a:p>
+          <a:p>
+            <a:pPr>
+              <a:spcAft>
+                <a:spcPts val="0"/>
+              </a:spcAft>
+              <a:defRPr sz="1100">
+                <a:solidFill>
+                  <a:srgbClr val="ABB2BF"/>
+                </a:solidFill>
+                <a:latin typeface="Consolas"/>
+              </a:defRPr>
+            </a:pPr>
+          </a:p>
+          <a:p>
+            <a:pPr>
+              <a:spcAft>
+                <a:spcPts val="0"/>
+              </a:spcAft>
+              <a:defRPr sz="1100">
+                <a:solidFill>
+                  <a:srgbClr val="6A9955"/>
+                </a:solidFill>
+                <a:latin typeface="Consolas"/>
+              </a:defRPr>
+            </a:pPr>
+            <a:r>
+              <a:t># CSV → 스프레드시트</a:t>
+            </a:r>
+          </a:p>
+          <a:p>
+            <a:pPr>
+              <a:spcAft>
+                <a:spcPts val="0"/>
+              </a:spcAft>
+              <a:defRPr sz="1100">
+                <a:solidFill>
+                  <a:srgbClr val="ABB2BF"/>
+                </a:solidFill>
+                <a:latin typeface="Consolas"/>
+              </a:defRPr>
+            </a:pPr>
+            <a:r>
+              <a:t>df.to_csv('sar_table.csv', index=False)</a:t>
+            </a:r>
+          </a:p>
+          <a:p>
+            <a:pPr>
+              <a:spcAft>
+                <a:spcPts val="0"/>
+              </a:spcAft>
+              <a:defRPr sz="1100">
+                <a:solidFill>
+                  <a:srgbClr val="ABB2BF"/>
+                </a:solidFill>
+                <a:latin typeface="Consolas"/>
+              </a:defRPr>
+            </a:pPr>
+          </a:p>
+          <a:p>
+            <a:pPr>
+              <a:spcAft>
+                <a:spcPts val="0"/>
+              </a:spcAft>
+              <a:defRPr sz="1100">
+                <a:solidFill>
+                  <a:srgbClr val="6A9955"/>
+                </a:solidFill>
+                <a:latin typeface="Consolas"/>
+              </a:defRPr>
+            </a:pPr>
+            <a:r>
+              <a:t># PyMOL 스크립트 (자동 생성)</a:t>
+            </a:r>
+          </a:p>
+          <a:p>
+            <a:pPr>
+              <a:spcAft>
+                <a:spcPts val="0"/>
+              </a:spcAft>
+              <a:defRPr sz="1100">
+                <a:solidFill>
+                  <a:srgbClr val="6A9955"/>
+                </a:solidFill>
+                <a:latin typeface="Consolas"/>
+              </a:defRPr>
+            </a:pPr>
+            <a:r>
+              <a:t># → File &gt; Run Script &gt; sar_pymol.pml</a:t>
+            </a:r>
+          </a:p>
+        </p:txBody>
+      </p:sp>
+    </p:spTree>
+  </p:cSld>
+  <p:clrMapOvr>
+    <a:masterClrMapping/>
+  </p:clrMapOvr>
+</p:sld>
+</file>
+
+<file path=ppt/slides/slide18.xml><?xml version="1.0" encoding="utf-8"?>
+<p:sld xmlns:a="http://schemas.openxmlformats.org/drawingml/2006/main" xmlns:p="http://schemas.openxmlformats.org/presentationml/2006/main" xmlns:r="http://schemas.openxmlformats.org/officeDocument/2006/relationships">
+  <p:cSld>
+    <p:spTree>
+      <p:nvGrpSpPr>
+        <p:cNvPr id="1" name=""/>
+        <p:cNvGrpSpPr/>
+        <p:nvPr/>
+      </p:nvGrpSpPr>
+      <p:grpSpPr/>
+      <p:sp>
+        <p:nvSpPr>
+          <p:cNvPr id="2" name="Rectangle 1"/>
+          <p:cNvSpPr/>
+          <p:nvPr/>
+        </p:nvSpPr>
+        <p:spPr>
+          <a:xfrm>
+            <a:off x="0" y="0"/>
+            <a:ext cx="12191695" cy="6858000"/>
+          </a:xfrm>
+          <a:prstGeom prst="rect">
+            <a:avLst/>
+          </a:prstGeom>
+          <a:solidFill>
+            <a:srgbClr val="FAFAF8"/>
+          </a:solidFill>
+          <a:ln>
+            <a:noFill/>
+          </a:ln>
+        </p:spPr>
+        <p:style>
+          <a:lnRef idx="1">
+            <a:schemeClr val="accent1"/>
+          </a:lnRef>
+          <a:fillRef idx="3">
+            <a:schemeClr val="accent1"/>
+          </a:fillRef>
+          <a:effectRef idx="2">
+            <a:schemeClr val="accent1"/>
+          </a:effectRef>
+          <a:fontRef idx="minor">
+            <a:schemeClr val="lt1"/>
+          </a:fontRef>
+        </p:style>
+        <p:txBody>
+          <a:bodyPr rtlCol="0" anchor="ctr"/>
+          <a:lstStyle/>
+          <a:p>
+            <a:pPr algn="ctr"/>
+          </a:p>
+        </p:txBody>
+      </p:sp>
+      <p:sp>
+        <p:nvSpPr>
+          <p:cNvPr id="3" name="TextBox 2"/>
+          <p:cNvSpPr txBox="1"/>
+          <p:nvPr/>
+        </p:nvSpPr>
+        <p:spPr>
+          <a:xfrm>
+            <a:off x="731520" y="365760"/>
+            <a:ext cx="10058400" cy="640080"/>
+          </a:xfrm>
+          <a:prstGeom prst="rect">
+            <a:avLst/>
+          </a:prstGeom>
+          <a:noFill/>
+        </p:spPr>
+        <p:txBody>
+          <a:bodyPr wrap="square">
+            <a:normAutofit/>
+          </a:bodyPr>
+          <a:lstStyle/>
+          <a:p>
+            <a:pPr algn="l">
+              <a:spcAft>
+                <a:spcPts val="200"/>
+              </a:spcAft>
+              <a:defRPr sz="3200" b="1">
+                <a:solidFill>
+                  <a:srgbClr val="212121"/>
+                </a:solidFill>
+                <a:latin typeface="맑은 고딕"/>
+              </a:defRPr>
+            </a:pPr>
+            <a:r>
+              <a:t>SAR 해석 가이드: 무엇을 봐야 하는가</a:t>
+            </a:r>
+          </a:p>
+        </p:txBody>
+      </p:sp>
+      <p:sp>
+        <p:nvSpPr>
+          <p:cNvPr id="4" name="TextBox 3"/>
+          <p:cNvSpPr txBox="1"/>
+          <p:nvPr/>
+        </p:nvSpPr>
+        <p:spPr>
+          <a:xfrm>
+            <a:off x="731520" y="1188720"/>
+            <a:ext cx="5029200" cy="320040"/>
+          </a:xfrm>
+          <a:prstGeom prst="rect">
+            <a:avLst/>
+          </a:prstGeom>
+          <a:noFill/>
+        </p:spPr>
+        <p:txBody>
+          <a:bodyPr wrap="square">
+            <a:normAutofit/>
+          </a:bodyPr>
+          <a:lstStyle/>
+          <a:p>
+            <a:pPr algn="l">
+              <a:spcAft>
+                <a:spcPts val="200"/>
+              </a:spcAft>
+              <a:defRPr sz="1800" b="1">
+                <a:solidFill>
+                  <a:srgbClr val="212121"/>
+                </a:solidFill>
+                <a:latin typeface="맑은 고딕"/>
+              </a:defRPr>
+            </a:pPr>
+            <a:r>
+              <a:t>스코어 해석</a:t>
+            </a:r>
+          </a:p>
+        </p:txBody>
+      </p:sp>
+      <p:sp>
+        <p:nvSpPr>
+          <p:cNvPr id="5" name="Rectangle 4"/>
+          <p:cNvSpPr/>
+          <p:nvPr/>
+        </p:nvSpPr>
+        <p:spPr>
+          <a:xfrm>
+            <a:off x="731520" y="1554480"/>
+            <a:ext cx="109728" cy="365760"/>
+          </a:xfrm>
+          <a:prstGeom prst="rect">
+            <a:avLst/>
+          </a:prstGeom>
+          <a:solidFill>
+            <a:srgbClr val="43A047"/>
+          </a:solidFill>
+          <a:ln>
+            <a:noFill/>
+          </a:ln>
+        </p:spPr>
+        <p:style>
+          <a:lnRef idx="1">
+            <a:schemeClr val="accent1"/>
+          </a:lnRef>
+          <a:fillRef idx="3">
+            <a:schemeClr val="accent1"/>
+          </a:fillRef>
+          <a:effectRef idx="2">
+            <a:schemeClr val="accent1"/>
+          </a:effectRef>
+          <a:fontRef idx="minor">
+            <a:schemeClr val="lt1"/>
+          </a:fontRef>
+        </p:style>
+        <p:txBody>
+          <a:bodyPr rtlCol="0" anchor="ctr"/>
+          <a:lstStyle/>
+          <a:p>
+            <a:pPr algn="ctr"/>
+          </a:p>
+        </p:txBody>
+      </p:sp>
+      <p:sp>
+        <p:nvSpPr>
+          <p:cNvPr id="6" name="TextBox 5"/>
+          <p:cNvSpPr txBox="1"/>
+          <p:nvPr/>
+        </p:nvSpPr>
+        <p:spPr>
+          <a:xfrm>
+            <a:off x="1005840" y="1554480"/>
+            <a:ext cx="1645920" cy="274320"/>
+          </a:xfrm>
+          <a:prstGeom prst="rect">
+            <a:avLst/>
+          </a:prstGeom>
+          <a:noFill/>
+        </p:spPr>
+        <p:txBody>
+          <a:bodyPr wrap="square">
+            <a:normAutofit/>
+          </a:bodyPr>
+          <a:lstStyle/>
+          <a:p>
+            <a:pPr algn="l">
+              <a:spcAft>
+                <a:spcPts val="200"/>
+              </a:spcAft>
+              <a:defRPr sz="1200" b="1">
+                <a:solidFill>
+                  <a:srgbClr val="212121"/>
+                </a:solidFill>
+                <a:latin typeface="맑은 고딕"/>
+              </a:defRPr>
+            </a:pPr>
+            <a:r>
+              <a:t>&lt; -10 kcal/mol</a:t>
+            </a:r>
+          </a:p>
+        </p:txBody>
+      </p:sp>
+      <p:sp>
+        <p:nvSpPr>
+          <p:cNvPr id="7" name="TextBox 6"/>
+          <p:cNvSpPr txBox="1"/>
+          <p:nvPr/>
+        </p:nvSpPr>
+        <p:spPr>
+          <a:xfrm>
+            <a:off x="2743200" y="1554480"/>
+            <a:ext cx="3017520" cy="274320"/>
+          </a:xfrm>
+          <a:prstGeom prst="rect">
+            <a:avLst/>
+          </a:prstGeom>
+          <a:noFill/>
+        </p:spPr>
+        <p:txBody>
+          <a:bodyPr wrap="square">
+            <a:normAutofit/>
+          </a:bodyPr>
+          <a:lstStyle/>
+          <a:p>
+            <a:pPr algn="l">
+              <a:spcAft>
+                <a:spcPts val="200"/>
+              </a:spcAft>
+              <a:defRPr sz="1200" b="0">
+                <a:solidFill>
+                  <a:srgbClr val="757575"/>
+                </a:solidFill>
+                <a:latin typeface="맑은 고딕"/>
+              </a:defRPr>
+            </a:pPr>
+            <a:r>
+              <a:t>매우 강한 결합 (실제 약물 수준)</a:t>
+            </a:r>
+          </a:p>
+        </p:txBody>
+      </p:sp>
+      <p:sp>
+        <p:nvSpPr>
+          <p:cNvPr id="8" name="Rectangle 7"/>
+          <p:cNvSpPr/>
+          <p:nvPr/>
+        </p:nvSpPr>
+        <p:spPr>
+          <a:xfrm>
+            <a:off x="731520" y="2011680"/>
+            <a:ext cx="109728" cy="365760"/>
+          </a:xfrm>
+          <a:prstGeom prst="rect">
+            <a:avLst/>
+          </a:prstGeom>
+          <a:solidFill>
+            <a:srgbClr val="1E88E5"/>
+          </a:solidFill>
+          <a:ln>
+            <a:noFill/>
+          </a:ln>
+        </p:spPr>
+        <p:style>
+          <a:lnRef idx="1">
+            <a:schemeClr val="accent1"/>
+          </a:lnRef>
+          <a:fillRef idx="3">
+            <a:schemeClr val="accent1"/>
+          </a:fillRef>
+          <a:effectRef idx="2">
+            <a:schemeClr val="accent1"/>
+          </a:effectRef>
+          <a:fontRef idx="minor">
+            <a:schemeClr val="lt1"/>
+          </a:fontRef>
+        </p:style>
+        <p:txBody>
+          <a:bodyPr rtlCol="0" anchor="ctr"/>
+          <a:lstStyle/>
+          <a:p>
+            <a:pPr algn="ctr"/>
+          </a:p>
+        </p:txBody>
+      </p:sp>
+      <p:sp>
+        <p:nvSpPr>
+          <p:cNvPr id="9" name="TextBox 8"/>
+          <p:cNvSpPr txBox="1"/>
+          <p:nvPr/>
+        </p:nvSpPr>
+        <p:spPr>
+          <a:xfrm>
+            <a:off x="1005840" y="2011680"/>
+            <a:ext cx="1645920" cy="274320"/>
+          </a:xfrm>
+          <a:prstGeom prst="rect">
+            <a:avLst/>
+          </a:prstGeom>
+          <a:noFill/>
+        </p:spPr>
+        <p:txBody>
+          <a:bodyPr wrap="square">
+            <a:normAutofit/>
+          </a:bodyPr>
+          <a:lstStyle/>
+          <a:p>
+            <a:pPr algn="l">
+              <a:spcAft>
+                <a:spcPts val="200"/>
+              </a:spcAft>
+              <a:defRPr sz="1200" b="1">
+                <a:solidFill>
+                  <a:srgbClr val="212121"/>
+                </a:solidFill>
+                <a:latin typeface="맑은 고딕"/>
+              </a:defRPr>
+            </a:pPr>
+            <a:r>
+              <a:t>-8 ~ -10</a:t>
+            </a:r>
+          </a:p>
+        </p:txBody>
+      </p:sp>
+      <p:sp>
+        <p:nvSpPr>
+          <p:cNvPr id="10" name="TextBox 9"/>
+          <p:cNvSpPr txBox="1"/>
+          <p:nvPr/>
+        </p:nvSpPr>
+        <p:spPr>
+          <a:xfrm>
+            <a:off x="2743200" y="2011680"/>
+            <a:ext cx="3017520" cy="274320"/>
+          </a:xfrm>
+          <a:prstGeom prst="rect">
+            <a:avLst/>
+          </a:prstGeom>
+          <a:noFill/>
+        </p:spPr>
+        <p:txBody>
+          <a:bodyPr wrap="square">
+            <a:normAutofit/>
+          </a:bodyPr>
+          <a:lstStyle/>
+          <a:p>
+            <a:pPr algn="l">
+              <a:spcAft>
+                <a:spcPts val="200"/>
+              </a:spcAft>
+              <a:defRPr sz="1200" b="0">
+                <a:solidFill>
+                  <a:srgbClr val="757575"/>
+                </a:solidFill>
+                <a:latin typeface="맑은 고딕"/>
+              </a:defRPr>
+            </a:pPr>
+            <a:r>
+              <a:t>좋은 결합 (리드 후보)</a:t>
+            </a:r>
+          </a:p>
+        </p:txBody>
+      </p:sp>
+      <p:sp>
+        <p:nvSpPr>
+          <p:cNvPr id="11" name="Rectangle 10"/>
+          <p:cNvSpPr/>
+          <p:nvPr/>
+        </p:nvSpPr>
+        <p:spPr>
+          <a:xfrm>
+            <a:off x="731520" y="2468880"/>
+            <a:ext cx="109728" cy="365760"/>
+          </a:xfrm>
+          <a:prstGeom prst="rect">
+            <a:avLst/>
+          </a:prstGeom>
+          <a:solidFill>
+            <a:srgbClr val="FF8F00"/>
+          </a:solidFill>
+          <a:ln>
+            <a:noFill/>
+          </a:ln>
+        </p:spPr>
+        <p:style>
+          <a:lnRef idx="1">
+            <a:schemeClr val="accent1"/>
+          </a:lnRef>
+          <a:fillRef idx="3">
+            <a:schemeClr val="accent1"/>
+          </a:fillRef>
+          <a:effectRef idx="2">
+            <a:schemeClr val="accent1"/>
+          </a:effectRef>
+          <a:fontRef idx="minor">
+            <a:schemeClr val="lt1"/>
+          </a:fontRef>
+        </p:style>
+        <p:txBody>
+          <a:bodyPr rtlCol="0" anchor="ctr"/>
+          <a:lstStyle/>
+          <a:p>
+            <a:pPr algn="ctr"/>
+          </a:p>
+        </p:txBody>
+      </p:sp>
+      <p:sp>
+        <p:nvSpPr>
+          <p:cNvPr id="12" name="TextBox 11"/>
+          <p:cNvSpPr txBox="1"/>
+          <p:nvPr/>
+        </p:nvSpPr>
+        <p:spPr>
+          <a:xfrm>
+            <a:off x="1005840" y="2468880"/>
+            <a:ext cx="1645920" cy="274320"/>
+          </a:xfrm>
+          <a:prstGeom prst="rect">
+            <a:avLst/>
+          </a:prstGeom>
+          <a:noFill/>
+        </p:spPr>
+        <p:txBody>
+          <a:bodyPr wrap="square">
+            <a:normAutofit/>
+          </a:bodyPr>
+          <a:lstStyle/>
+          <a:p>
+            <a:pPr algn="l">
+              <a:spcAft>
+                <a:spcPts val="200"/>
+              </a:spcAft>
+              <a:defRPr sz="1200" b="1">
+                <a:solidFill>
+                  <a:srgbClr val="212121"/>
+                </a:solidFill>
+                <a:latin typeface="맑은 고딕"/>
+              </a:defRPr>
+            </a:pPr>
+            <a:r>
+              <a:t>-7 ~ -8</a:t>
+            </a:r>
+          </a:p>
+        </p:txBody>
+      </p:sp>
+      <p:sp>
+        <p:nvSpPr>
+          <p:cNvPr id="13" name="TextBox 12"/>
+          <p:cNvSpPr txBox="1"/>
+          <p:nvPr/>
+        </p:nvSpPr>
+        <p:spPr>
+          <a:xfrm>
+            <a:off x="2743200" y="2468880"/>
+            <a:ext cx="3017520" cy="274320"/>
+          </a:xfrm>
+          <a:prstGeom prst="rect">
+            <a:avLst/>
+          </a:prstGeom>
+          <a:noFill/>
+        </p:spPr>
+        <p:txBody>
+          <a:bodyPr wrap="square">
+            <a:normAutofit/>
+          </a:bodyPr>
+          <a:lstStyle/>
+          <a:p>
+            <a:pPr algn="l">
+              <a:spcAft>
+                <a:spcPts val="200"/>
+              </a:spcAft>
+              <a:defRPr sz="1200" b="0">
+                <a:solidFill>
+                  <a:srgbClr val="757575"/>
+                </a:solidFill>
+                <a:latin typeface="맑은 고딕"/>
+              </a:defRPr>
+            </a:pPr>
+            <a:r>
+              <a:t>보통 (최적화로 개선 가능)</a:t>
+            </a:r>
+          </a:p>
+        </p:txBody>
+      </p:sp>
+      <p:sp>
+        <p:nvSpPr>
+          <p:cNvPr id="14" name="Rectangle 13"/>
+          <p:cNvSpPr/>
+          <p:nvPr/>
+        </p:nvSpPr>
+        <p:spPr>
+          <a:xfrm>
+            <a:off x="731520" y="2926080"/>
+            <a:ext cx="109728" cy="365760"/>
+          </a:xfrm>
+          <a:prstGeom prst="rect">
+            <a:avLst/>
+          </a:prstGeom>
+          <a:solidFill>
+            <a:srgbClr val="E53935"/>
+          </a:solidFill>
+          <a:ln>
+            <a:noFill/>
+          </a:ln>
+        </p:spPr>
+        <p:style>
+          <a:lnRef idx="1">
+            <a:schemeClr val="accent1"/>
+          </a:lnRef>
+          <a:fillRef idx="3">
+            <a:schemeClr val="accent1"/>
+          </a:fillRef>
+          <a:effectRef idx="2">
+            <a:schemeClr val="accent1"/>
+          </a:effectRef>
+          <a:fontRef idx="minor">
+            <a:schemeClr val="lt1"/>
+          </a:fontRef>
+        </p:style>
+        <p:txBody>
+          <a:bodyPr rtlCol="0" anchor="ctr"/>
+          <a:lstStyle/>
+          <a:p>
+            <a:pPr algn="ctr"/>
+          </a:p>
+        </p:txBody>
+      </p:sp>
+      <p:sp>
+        <p:nvSpPr>
+          <p:cNvPr id="15" name="TextBox 14"/>
+          <p:cNvSpPr txBox="1"/>
+          <p:nvPr/>
+        </p:nvSpPr>
+        <p:spPr>
+          <a:xfrm>
+            <a:off x="1005840" y="2926080"/>
+            <a:ext cx="1645920" cy="274320"/>
+          </a:xfrm>
+          <a:prstGeom prst="rect">
+            <a:avLst/>
+          </a:prstGeom>
+          <a:noFill/>
+        </p:spPr>
+        <p:txBody>
+          <a:bodyPr wrap="square">
+            <a:normAutofit/>
+          </a:bodyPr>
+          <a:lstStyle/>
+          <a:p>
+            <a:pPr algn="l">
+              <a:spcAft>
+                <a:spcPts val="200"/>
+              </a:spcAft>
+              <a:defRPr sz="1200" b="1">
+                <a:solidFill>
+                  <a:srgbClr val="212121"/>
+                </a:solidFill>
+                <a:latin typeface="맑은 고딕"/>
+              </a:defRPr>
+            </a:pPr>
+            <a:r>
+              <a:t>-5 ~ -7</a:t>
+            </a:r>
+          </a:p>
+        </p:txBody>
+      </p:sp>
+      <p:sp>
+        <p:nvSpPr>
+          <p:cNvPr id="16" name="TextBox 15"/>
+          <p:cNvSpPr txBox="1"/>
+          <p:nvPr/>
+        </p:nvSpPr>
+        <p:spPr>
+          <a:xfrm>
+            <a:off x="2743200" y="2926080"/>
+            <a:ext cx="3017520" cy="274320"/>
+          </a:xfrm>
+          <a:prstGeom prst="rect">
+            <a:avLst/>
+          </a:prstGeom>
+          <a:noFill/>
+        </p:spPr>
+        <p:txBody>
+          <a:bodyPr wrap="square">
+            <a:normAutofit/>
+          </a:bodyPr>
+          <a:lstStyle/>
+          <a:p>
+            <a:pPr algn="l">
+              <a:spcAft>
+                <a:spcPts val="200"/>
+              </a:spcAft>
+              <a:defRPr sz="1200" b="0">
+                <a:solidFill>
+                  <a:srgbClr val="757575"/>
+                </a:solidFill>
+                <a:latin typeface="맑은 고딕"/>
+              </a:defRPr>
+            </a:pPr>
+            <a:r>
+              <a:t>약한 결합 (대폭 수정 필요)</a:t>
+            </a:r>
+          </a:p>
+        </p:txBody>
+      </p:sp>
+      <p:sp>
+        <p:nvSpPr>
+          <p:cNvPr id="17" name="TextBox 16"/>
+          <p:cNvSpPr txBox="1"/>
+          <p:nvPr/>
+        </p:nvSpPr>
+        <p:spPr>
+          <a:xfrm>
+            <a:off x="731520" y="3474720"/>
+            <a:ext cx="5029200" cy="320040"/>
+          </a:xfrm>
+          <a:prstGeom prst="rect">
+            <a:avLst/>
+          </a:prstGeom>
+          <a:noFill/>
+        </p:spPr>
+        <p:txBody>
+          <a:bodyPr wrap="square">
+            <a:normAutofit/>
+          </a:bodyPr>
+          <a:lstStyle/>
+          <a:p>
+            <a:pPr algn="l">
+              <a:spcAft>
+                <a:spcPts val="200"/>
+              </a:spcAft>
+              <a:defRPr sz="1800" b="1">
+                <a:solidFill>
+                  <a:srgbClr val="212121"/>
+                </a:solidFill>
+                <a:latin typeface="맑은 고딕"/>
+              </a:defRPr>
+            </a:pPr>
+            <a:r>
+              <a:t>Ligand Efficiency (LE)</a:t>
+            </a:r>
+          </a:p>
+        </p:txBody>
+      </p:sp>
+      <p:sp>
+        <p:nvSpPr>
+          <p:cNvPr id="18" name="Rectangle 17"/>
+          <p:cNvSpPr/>
+          <p:nvPr/>
+        </p:nvSpPr>
+        <p:spPr>
+          <a:xfrm>
+            <a:off x="731520" y="3840480"/>
+            <a:ext cx="109728" cy="365760"/>
+          </a:xfrm>
+          <a:prstGeom prst="rect">
+            <a:avLst/>
+          </a:prstGeom>
+          <a:solidFill>
+            <a:srgbClr val="43A047"/>
+          </a:solidFill>
+          <a:ln>
+            <a:noFill/>
+          </a:ln>
+        </p:spPr>
+        <p:style>
+          <a:lnRef idx="1">
+            <a:schemeClr val="accent1"/>
+          </a:lnRef>
+          <a:fillRef idx="3">
+            <a:schemeClr val="accent1"/>
+          </a:fillRef>
+          <a:effectRef idx="2">
+            <a:schemeClr val="accent1"/>
+          </a:effectRef>
+          <a:fontRef idx="minor">
+            <a:schemeClr val="lt1"/>
+          </a:fontRef>
+        </p:style>
+        <p:txBody>
+          <a:bodyPr rtlCol="0" anchor="ctr"/>
+          <a:lstStyle/>
+          <a:p>
+            <a:pPr algn="ctr"/>
+          </a:p>
+        </p:txBody>
+      </p:sp>
+      <p:sp>
+        <p:nvSpPr>
+          <p:cNvPr id="19" name="TextBox 18"/>
+          <p:cNvSpPr txBox="1"/>
+          <p:nvPr/>
+        </p:nvSpPr>
+        <p:spPr>
+          <a:xfrm>
+            <a:off x="1005840" y="3840480"/>
+            <a:ext cx="1371600" cy="274320"/>
+          </a:xfrm>
+          <a:prstGeom prst="rect">
+            <a:avLst/>
+          </a:prstGeom>
+          <a:noFill/>
+        </p:spPr>
+        <p:txBody>
+          <a:bodyPr wrap="square">
+            <a:normAutofit/>
+          </a:bodyPr>
+          <a:lstStyle/>
+          <a:p>
+            <a:pPr algn="l">
+              <a:spcAft>
+                <a:spcPts val="200"/>
+              </a:spcAft>
+              <a:defRPr sz="1200" b="1">
+                <a:solidFill>
+                  <a:srgbClr val="212121"/>
+                </a:solidFill>
+                <a:latin typeface="맑은 고딕"/>
+              </a:defRPr>
+            </a:pPr>
+            <a:r>
+              <a:t>LE &gt; 0.4</a:t>
+            </a:r>
+          </a:p>
+        </p:txBody>
+      </p:sp>
+      <p:sp>
+        <p:nvSpPr>
+          <p:cNvPr id="20" name="TextBox 19"/>
+          <p:cNvSpPr txBox="1"/>
+          <p:nvPr/>
+        </p:nvSpPr>
+        <p:spPr>
+          <a:xfrm>
+            <a:off x="2468880" y="3840480"/>
+            <a:ext cx="3200400" cy="274320"/>
+          </a:xfrm>
+          <a:prstGeom prst="rect">
+            <a:avLst/>
+          </a:prstGeom>
+          <a:noFill/>
+        </p:spPr>
+        <p:txBody>
+          <a:bodyPr wrap="square">
+            <a:normAutofit/>
+          </a:bodyPr>
+          <a:lstStyle/>
+          <a:p>
+            <a:pPr algn="l">
+              <a:spcAft>
+                <a:spcPts val="200"/>
+              </a:spcAft>
+              <a:defRPr sz="1200" b="0">
+                <a:solidFill>
+                  <a:srgbClr val="757575"/>
+                </a:solidFill>
+                <a:latin typeface="맑은 고딕"/>
+              </a:defRPr>
+            </a:pPr>
+            <a:r>
+              <a:t>우수 (fragment-like 효율)</a:t>
+            </a:r>
+          </a:p>
+        </p:txBody>
+      </p:sp>
+      <p:sp>
+        <p:nvSpPr>
+          <p:cNvPr id="21" name="Rectangle 20"/>
+          <p:cNvSpPr/>
+          <p:nvPr/>
+        </p:nvSpPr>
+        <p:spPr>
+          <a:xfrm>
+            <a:off x="731520" y="4297680"/>
+            <a:ext cx="109728" cy="365760"/>
+          </a:xfrm>
+          <a:prstGeom prst="rect">
+            <a:avLst/>
+          </a:prstGeom>
+          <a:solidFill>
+            <a:srgbClr val="1E88E5"/>
+          </a:solidFill>
+          <a:ln>
+            <a:noFill/>
+          </a:ln>
+        </p:spPr>
+        <p:style>
+          <a:lnRef idx="1">
+            <a:schemeClr val="accent1"/>
+          </a:lnRef>
+          <a:fillRef idx="3">
+            <a:schemeClr val="accent1"/>
+          </a:fillRef>
+          <a:effectRef idx="2">
+            <a:schemeClr val="accent1"/>
+          </a:effectRef>
+          <a:fontRef idx="minor">
+            <a:schemeClr val="lt1"/>
+          </a:fontRef>
+        </p:style>
+        <p:txBody>
+          <a:bodyPr rtlCol="0" anchor="ctr"/>
+          <a:lstStyle/>
+          <a:p>
+            <a:pPr algn="ctr"/>
+          </a:p>
+        </p:txBody>
+      </p:sp>
+      <p:sp>
+        <p:nvSpPr>
+          <p:cNvPr id="22" name="TextBox 21"/>
+          <p:cNvSpPr txBox="1"/>
+          <p:nvPr/>
+        </p:nvSpPr>
+        <p:spPr>
+          <a:xfrm>
+            <a:off x="1005840" y="4297680"/>
+            <a:ext cx="1371600" cy="274320"/>
+          </a:xfrm>
+          <a:prstGeom prst="rect">
+            <a:avLst/>
+          </a:prstGeom>
+          <a:noFill/>
+        </p:spPr>
+        <p:txBody>
+          <a:bodyPr wrap="square">
+            <a:normAutofit/>
+          </a:bodyPr>
+          <a:lstStyle/>
+          <a:p>
+            <a:pPr algn="l">
+              <a:spcAft>
+                <a:spcPts val="200"/>
+              </a:spcAft>
+              <a:defRPr sz="1200" b="1">
+                <a:solidFill>
+                  <a:srgbClr val="212121"/>
+                </a:solidFill>
+                <a:latin typeface="맑은 고딕"/>
+              </a:defRPr>
+            </a:pPr>
+            <a:r>
+              <a:t>0.3 ~ 0.4</a:t>
+            </a:r>
+          </a:p>
+        </p:txBody>
+      </p:sp>
+      <p:sp>
+        <p:nvSpPr>
+          <p:cNvPr id="23" name="TextBox 22"/>
+          <p:cNvSpPr txBox="1"/>
+          <p:nvPr/>
+        </p:nvSpPr>
+        <p:spPr>
+          <a:xfrm>
+            <a:off x="2468880" y="4297680"/>
+            <a:ext cx="3200400" cy="274320"/>
+          </a:xfrm>
+          <a:prstGeom prst="rect">
+            <a:avLst/>
+          </a:prstGeom>
+          <a:noFill/>
+        </p:spPr>
+        <p:txBody>
+          <a:bodyPr wrap="square">
+            <a:normAutofit/>
+          </a:bodyPr>
+          <a:lstStyle/>
+          <a:p>
+            <a:pPr algn="l">
+              <a:spcAft>
+                <a:spcPts val="200"/>
+              </a:spcAft>
+              <a:defRPr sz="1200" b="0">
+                <a:solidFill>
+                  <a:srgbClr val="757575"/>
+                </a:solidFill>
+                <a:latin typeface="맑은 고딕"/>
+              </a:defRPr>
+            </a:pPr>
+            <a:r>
+              <a:t>좋음 (drug-like)</a:t>
+            </a:r>
+          </a:p>
+        </p:txBody>
+      </p:sp>
+      <p:sp>
+        <p:nvSpPr>
+          <p:cNvPr id="24" name="Rectangle 23"/>
+          <p:cNvSpPr/>
+          <p:nvPr/>
+        </p:nvSpPr>
+        <p:spPr>
+          <a:xfrm>
+            <a:off x="731520" y="4754880"/>
+            <a:ext cx="109728" cy="365760"/>
+          </a:xfrm>
+          <a:prstGeom prst="rect">
+            <a:avLst/>
+          </a:prstGeom>
+          <a:solidFill>
+            <a:srgbClr val="E53935"/>
+          </a:solidFill>
+          <a:ln>
+            <a:noFill/>
+          </a:ln>
+        </p:spPr>
+        <p:style>
+          <a:lnRef idx="1">
+            <a:schemeClr val="accent1"/>
+          </a:lnRef>
+          <a:fillRef idx="3">
+            <a:schemeClr val="accent1"/>
+          </a:fillRef>
+          <a:effectRef idx="2">
+            <a:schemeClr val="accent1"/>
+          </a:effectRef>
+          <a:fontRef idx="minor">
+            <a:schemeClr val="lt1"/>
+          </a:fontRef>
+        </p:style>
+        <p:txBody>
+          <a:bodyPr rtlCol="0" anchor="ctr"/>
+          <a:lstStyle/>
+          <a:p>
+            <a:pPr algn="ctr"/>
+          </a:p>
+        </p:txBody>
+      </p:sp>
+      <p:sp>
+        <p:nvSpPr>
+          <p:cNvPr id="25" name="TextBox 24"/>
+          <p:cNvSpPr txBox="1"/>
+          <p:nvPr/>
+        </p:nvSpPr>
+        <p:spPr>
+          <a:xfrm>
+            <a:off x="1005840" y="4754880"/>
+            <a:ext cx="1371600" cy="274320"/>
+          </a:xfrm>
+          <a:prstGeom prst="rect">
+            <a:avLst/>
+          </a:prstGeom>
+          <a:noFill/>
+        </p:spPr>
+        <p:txBody>
+          <a:bodyPr wrap="square">
+            <a:normAutofit/>
+          </a:bodyPr>
+          <a:lstStyle/>
+          <a:p>
+            <a:pPr algn="l">
+              <a:spcAft>
+                <a:spcPts val="200"/>
+              </a:spcAft>
+              <a:defRPr sz="1200" b="1">
+                <a:solidFill>
+                  <a:srgbClr val="212121"/>
+                </a:solidFill>
+                <a:latin typeface="맑은 고딕"/>
+              </a:defRPr>
+            </a:pPr>
+            <a:r>
+              <a:t>LE &lt; 0.3</a:t>
+            </a:r>
+          </a:p>
+        </p:txBody>
+      </p:sp>
+      <p:sp>
+        <p:nvSpPr>
+          <p:cNvPr id="26" name="TextBox 25"/>
+          <p:cNvSpPr txBox="1"/>
+          <p:nvPr/>
+        </p:nvSpPr>
+        <p:spPr>
+          <a:xfrm>
+            <a:off x="2468880" y="4754880"/>
+            <a:ext cx="3200400" cy="274320"/>
+          </a:xfrm>
+          <a:prstGeom prst="rect">
+            <a:avLst/>
+          </a:prstGeom>
+          <a:noFill/>
+        </p:spPr>
+        <p:txBody>
+          <a:bodyPr wrap="square">
+            <a:normAutofit/>
+          </a:bodyPr>
+          <a:lstStyle/>
+          <a:p>
+            <a:pPr algn="l">
+              <a:spcAft>
+                <a:spcPts val="200"/>
+              </a:spcAft>
+              <a:defRPr sz="1200" b="0">
+                <a:solidFill>
+                  <a:srgbClr val="757575"/>
+                </a:solidFill>
+                <a:latin typeface="맑은 고딕"/>
+              </a:defRPr>
+            </a:pPr>
+            <a:r>
+              <a:t>낮음 (분자 크기 대비 결합 부족)</a:t>
+            </a:r>
+          </a:p>
+        </p:txBody>
+      </p:sp>
+      <p:sp>
+        <p:nvSpPr>
+          <p:cNvPr id="27" name="TextBox 26"/>
+          <p:cNvSpPr txBox="1"/>
+          <p:nvPr/>
+        </p:nvSpPr>
+        <p:spPr>
+          <a:xfrm>
+            <a:off x="731520" y="5303520"/>
+            <a:ext cx="5029200" cy="914400"/>
+          </a:xfrm>
+          <a:prstGeom prst="rect">
+            <a:avLst/>
+          </a:prstGeom>
+          <a:noFill/>
+        </p:spPr>
+        <p:txBody>
+          <a:bodyPr wrap="square">
+            <a:normAutofit/>
+          </a:bodyPr>
+          <a:lstStyle/>
+          <a:p>
+            <a:pPr algn="l">
+              <a:spcAft>
+                <a:spcPts val="200"/>
+              </a:spcAft>
+              <a:defRPr sz="1300" b="0">
+                <a:solidFill>
+                  <a:srgbClr val="E53935"/>
+                </a:solidFill>
+                <a:latin typeface="맑은 고딕"/>
+              </a:defRPr>
+            </a:pPr>
+            <a:r>
+              <a:t>주의: 도킹 스코어는 절대적 결합력이 아닌</a:t>
+            </a:r>
+          </a:p>
+          <a:p>
+            <a:pPr algn="l">
+              <a:spcAft>
+                <a:spcPts val="200"/>
+              </a:spcAft>
+              <a:defRPr sz="1300" b="0">
+                <a:solidFill>
+                  <a:srgbClr val="E53935"/>
+                </a:solidFill>
+                <a:latin typeface="맑은 고딕"/>
+              </a:defRPr>
+            </a:pPr>
+            <a:r>
+              <a:t>상대적 순위(rank-ordering) 지표입니다.</a:t>
+            </a:r>
+          </a:p>
+          <a:p>
+            <a:pPr algn="l">
+              <a:spcAft>
+                <a:spcPts val="200"/>
+              </a:spcAft>
+              <a:defRPr sz="1300" b="0">
+                <a:solidFill>
+                  <a:srgbClr val="E53935"/>
+                </a:solidFill>
+                <a:latin typeface="맑은 고딕"/>
+              </a:defRPr>
+            </a:pPr>
+            <a:r>
+              <a:t>여러 화합물 중 비교하는 데 사용하세요.</a:t>
+            </a:r>
+          </a:p>
+        </p:txBody>
+      </p:sp>
+      <p:sp>
+        <p:nvSpPr>
+          <p:cNvPr id="28" name="Rounded Rectangle 27"/>
+          <p:cNvSpPr/>
+          <p:nvPr/>
+        </p:nvSpPr>
+        <p:spPr>
+          <a:xfrm>
+            <a:off x="6583680" y="1188720"/>
+            <a:ext cx="4846320" cy="5029200"/>
+          </a:xfrm>
+          <a:prstGeom prst="roundRect">
+            <a:avLst/>
+          </a:prstGeom>
+          <a:solidFill>
+            <a:srgbClr val="FFF8E1"/>
+          </a:solidFill>
+          <a:ln w="12700">
+            <a:solidFill>
+              <a:srgbClr val="FF8F00"/>
+            </a:solidFill>
+          </a:ln>
+        </p:spPr>
+        <p:style>
+          <a:lnRef idx="1">
+            <a:schemeClr val="accent1"/>
+          </a:lnRef>
+          <a:fillRef idx="3">
+            <a:schemeClr val="accent1"/>
+          </a:fillRef>
+          <a:effectRef idx="2">
+            <a:schemeClr val="accent1"/>
+          </a:effectRef>
+          <a:fontRef idx="minor">
+            <a:schemeClr val="lt1"/>
+          </a:fontRef>
+        </p:style>
+        <p:txBody>
+          <a:bodyPr rtlCol="0" anchor="ctr"/>
+          <a:lstStyle/>
+          <a:p>
+            <a:pPr algn="ctr"/>
+          </a:p>
+        </p:txBody>
+      </p:sp>
+      <p:sp>
+        <p:nvSpPr>
+          <p:cNvPr id="29" name="TextBox 28"/>
+          <p:cNvSpPr txBox="1"/>
+          <p:nvPr/>
+        </p:nvSpPr>
+        <p:spPr>
+          <a:xfrm>
+            <a:off x="6858000" y="1325880"/>
+            <a:ext cx="4389120" cy="320040"/>
+          </a:xfrm>
+          <a:prstGeom prst="rect">
+            <a:avLst/>
+          </a:prstGeom>
+          <a:noFill/>
+        </p:spPr>
+        <p:txBody>
+          <a:bodyPr wrap="square">
+            <a:normAutofit/>
+          </a:bodyPr>
+          <a:lstStyle/>
+          <a:p>
+            <a:pPr algn="l">
+              <a:spcAft>
+                <a:spcPts val="200"/>
+              </a:spcAft>
+              <a:defRPr sz="1800" b="1">
+                <a:solidFill>
+                  <a:srgbClr val="FF8F00"/>
+                </a:solidFill>
+                <a:latin typeface="맑은 고딕"/>
+              </a:defRPr>
+            </a:pPr>
+            <a:r>
+              <a:t>R-group 효과 해석 패턴</a:t>
+            </a:r>
+          </a:p>
+        </p:txBody>
+      </p:sp>
+      <p:sp>
+        <p:nvSpPr>
+          <p:cNvPr id="30" name="TextBox 29"/>
+          <p:cNvSpPr txBox="1"/>
+          <p:nvPr/>
+        </p:nvSpPr>
+        <p:spPr>
+          <a:xfrm>
+            <a:off x="6858000" y="1737360"/>
+            <a:ext cx="4389120" cy="274320"/>
+          </a:xfrm>
+          <a:prstGeom prst="rect">
+            <a:avLst/>
+          </a:prstGeom>
+          <a:noFill/>
+        </p:spPr>
+        <p:txBody>
+          <a:bodyPr wrap="square">
+            <a:normAutofit/>
+          </a:bodyPr>
+          <a:lstStyle/>
+          <a:p>
+            <a:pPr algn="l">
+              <a:spcAft>
+                <a:spcPts val="200"/>
+              </a:spcAft>
+              <a:defRPr sz="1300" b="1">
+                <a:solidFill>
+                  <a:srgbClr val="FF8F00"/>
+                </a:solidFill>
+                <a:latin typeface="맑은 고딕"/>
+              </a:defRPr>
+            </a:pPr>
+            <a:r>
+              <a:t>할로겐 (F, Cl) → 스코어 향상</a:t>
+            </a:r>
+          </a:p>
+        </p:txBody>
+      </p:sp>
+      <p:sp>
+        <p:nvSpPr>
+          <p:cNvPr id="31" name="TextBox 30"/>
+          <p:cNvSpPr txBox="1"/>
+          <p:nvPr/>
+        </p:nvSpPr>
+        <p:spPr>
+          <a:xfrm>
+            <a:off x="6858000" y="2011680"/>
+            <a:ext cx="4389120" cy="640080"/>
+          </a:xfrm>
+          <a:prstGeom prst="rect">
+            <a:avLst/>
+          </a:prstGeom>
+          <a:noFill/>
+        </p:spPr>
+        <p:txBody>
+          <a:bodyPr wrap="square">
+            <a:normAutofit/>
+          </a:bodyPr>
+          <a:lstStyle/>
+          <a:p>
+            <a:pPr algn="l">
+              <a:spcAft>
+                <a:spcPts val="200"/>
+              </a:spcAft>
+              <a:defRPr sz="1200" b="0">
+                <a:solidFill>
+                  <a:srgbClr val="212121"/>
+                </a:solidFill>
+                <a:latin typeface="맑은 고딕"/>
+              </a:defRPr>
+            </a:pPr>
+            <a:r>
+              <a:t>전기음성도 + 소수성 증가</a:t>
+            </a:r>
+          </a:p>
+          <a:p>
+            <a:pPr algn="l">
+              <a:spcAft>
+                <a:spcPts val="200"/>
+              </a:spcAft>
+              <a:defRPr sz="1200" b="0">
+                <a:solidFill>
+                  <a:srgbClr val="212121"/>
+                </a:solidFill>
+                <a:latin typeface="맑은 고딕"/>
+              </a:defRPr>
+            </a:pPr>
+            <a:r>
+              <a:t>포켓 내 소수성 잔기와 상호작용</a:t>
+            </a:r>
+          </a:p>
+        </p:txBody>
+      </p:sp>
+      <p:sp>
+        <p:nvSpPr>
+          <p:cNvPr id="32" name="TextBox 31"/>
+          <p:cNvSpPr txBox="1"/>
+          <p:nvPr/>
+        </p:nvSpPr>
+        <p:spPr>
+          <a:xfrm>
+            <a:off x="6858000" y="2834639"/>
+            <a:ext cx="4389120" cy="274320"/>
+          </a:xfrm>
+          <a:prstGeom prst="rect">
+            <a:avLst/>
+          </a:prstGeom>
+          <a:noFill/>
+        </p:spPr>
+        <p:txBody>
+          <a:bodyPr wrap="square">
+            <a:normAutofit/>
+          </a:bodyPr>
+          <a:lstStyle/>
+          <a:p>
+            <a:pPr algn="l">
+              <a:spcAft>
+                <a:spcPts val="200"/>
+              </a:spcAft>
+              <a:defRPr sz="1300" b="1">
+                <a:solidFill>
+                  <a:srgbClr val="FF8F00"/>
+                </a:solidFill>
+                <a:latin typeface="맑은 고딕"/>
+              </a:defRPr>
+            </a:pPr>
+            <a:r>
+              <a:t>—OH, —NH₂ → 스코어 향상</a:t>
+            </a:r>
+          </a:p>
+        </p:txBody>
+      </p:sp>
+      <p:sp>
+        <p:nvSpPr>
+          <p:cNvPr id="33" name="TextBox 32"/>
+          <p:cNvSpPr txBox="1"/>
+          <p:nvPr/>
+        </p:nvSpPr>
+        <p:spPr>
+          <a:xfrm>
+            <a:off x="6858000" y="3108959"/>
+            <a:ext cx="4389120" cy="640080"/>
+          </a:xfrm>
+          <a:prstGeom prst="rect">
+            <a:avLst/>
+          </a:prstGeom>
+          <a:noFill/>
+        </p:spPr>
+        <p:txBody>
+          <a:bodyPr wrap="square">
+            <a:normAutofit/>
+          </a:bodyPr>
+          <a:lstStyle/>
+          <a:p>
+            <a:pPr algn="l">
+              <a:spcAft>
+                <a:spcPts val="200"/>
+              </a:spcAft>
+              <a:defRPr sz="1200" b="0">
+                <a:solidFill>
+                  <a:srgbClr val="212121"/>
+                </a:solidFill>
+                <a:latin typeface="맑은 고딕"/>
+              </a:defRPr>
+            </a:pPr>
+            <a:r>
+              <a:t>추가 수소 결합 형성</a:t>
+            </a:r>
+          </a:p>
+          <a:p>
+            <a:pPr algn="l">
+              <a:spcAft>
+                <a:spcPts val="200"/>
+              </a:spcAft>
+              <a:defRPr sz="1200" b="0">
+                <a:solidFill>
+                  <a:srgbClr val="212121"/>
+                </a:solidFill>
+                <a:latin typeface="맑은 고딕"/>
+              </a:defRPr>
+            </a:pPr>
+            <a:r>
+              <a:t>포켓 내 극성 잔기(Asp, Glu)와 상호작용</a:t>
+            </a:r>
+          </a:p>
+        </p:txBody>
+      </p:sp>
+      <p:sp>
+        <p:nvSpPr>
+          <p:cNvPr id="34" name="TextBox 33"/>
+          <p:cNvSpPr txBox="1"/>
+          <p:nvPr/>
+        </p:nvSpPr>
+        <p:spPr>
+          <a:xfrm>
+            <a:off x="6858000" y="3931920"/>
+            <a:ext cx="4389120" cy="274320"/>
+          </a:xfrm>
+          <a:prstGeom prst="rect">
+            <a:avLst/>
+          </a:prstGeom>
+          <a:noFill/>
+        </p:spPr>
+        <p:txBody>
+          <a:bodyPr wrap="square">
+            <a:normAutofit/>
+          </a:bodyPr>
+          <a:lstStyle/>
+          <a:p>
+            <a:pPr algn="l">
+              <a:spcAft>
+                <a:spcPts val="200"/>
+              </a:spcAft>
+              <a:defRPr sz="1300" b="1">
+                <a:solidFill>
+                  <a:srgbClr val="FF8F00"/>
+                </a:solidFill>
+                <a:latin typeface="맑은 고딕"/>
+              </a:defRPr>
+            </a:pPr>
+            <a:r>
+              <a:t>—OCH₃, 큰 치환체 → 하락</a:t>
+            </a:r>
+          </a:p>
+        </p:txBody>
+      </p:sp>
+      <p:sp>
+        <p:nvSpPr>
+          <p:cNvPr id="35" name="TextBox 34"/>
+          <p:cNvSpPr txBox="1"/>
+          <p:nvPr/>
+        </p:nvSpPr>
+        <p:spPr>
+          <a:xfrm>
+            <a:off x="6858000" y="4206240"/>
+            <a:ext cx="4389120" cy="640080"/>
+          </a:xfrm>
+          <a:prstGeom prst="rect">
+            <a:avLst/>
+          </a:prstGeom>
+          <a:noFill/>
+        </p:spPr>
+        <p:txBody>
+          <a:bodyPr wrap="square">
+            <a:normAutofit/>
+          </a:bodyPr>
+          <a:lstStyle/>
+          <a:p>
+            <a:pPr algn="l">
+              <a:spcAft>
+                <a:spcPts val="200"/>
+              </a:spcAft>
+              <a:defRPr sz="1200" b="0">
+                <a:solidFill>
+                  <a:srgbClr val="212121"/>
+                </a:solidFill>
+                <a:latin typeface="맑은 고딕"/>
+              </a:defRPr>
+            </a:pPr>
+            <a:r>
+              <a:t>입체 장애 (steric clash)</a:t>
+            </a:r>
+          </a:p>
+          <a:p>
+            <a:pPr algn="l">
+              <a:spcAft>
+                <a:spcPts val="200"/>
+              </a:spcAft>
+              <a:defRPr sz="1200" b="0">
+                <a:solidFill>
+                  <a:srgbClr val="212121"/>
+                </a:solidFill>
+                <a:latin typeface="맑은 고딕"/>
+              </a:defRPr>
+            </a:pPr>
+            <a:r>
+              <a:t>포켓 입구가 좁은 경우 특히 불리</a:t>
+            </a:r>
+          </a:p>
+        </p:txBody>
+      </p:sp>
+      <p:sp>
+        <p:nvSpPr>
+          <p:cNvPr id="36" name="TextBox 35"/>
+          <p:cNvSpPr txBox="1"/>
+          <p:nvPr/>
+        </p:nvSpPr>
+        <p:spPr>
+          <a:xfrm>
+            <a:off x="6858000" y="5029199"/>
+            <a:ext cx="4389120" cy="274320"/>
+          </a:xfrm>
+          <a:prstGeom prst="rect">
+            <a:avLst/>
+          </a:prstGeom>
+          <a:noFill/>
+        </p:spPr>
+        <p:txBody>
+          <a:bodyPr wrap="square">
+            <a:normAutofit/>
+          </a:bodyPr>
+          <a:lstStyle/>
+          <a:p>
+            <a:pPr algn="l">
+              <a:spcAft>
+                <a:spcPts val="200"/>
+              </a:spcAft>
+              <a:defRPr sz="1300" b="1">
+                <a:solidFill>
+                  <a:srgbClr val="FF8F00"/>
+                </a:solidFill>
+                <a:latin typeface="맑은 고딕"/>
+              </a:defRPr>
+            </a:pPr>
+            <a:r>
+              <a:t>Activity Cliff (핵심!)</a:t>
+            </a:r>
+          </a:p>
+        </p:txBody>
+      </p:sp>
+      <p:sp>
+        <p:nvSpPr>
+          <p:cNvPr id="37" name="TextBox 36"/>
+          <p:cNvSpPr txBox="1"/>
+          <p:nvPr/>
+        </p:nvSpPr>
+        <p:spPr>
+          <a:xfrm>
+            <a:off x="6858000" y="5303519"/>
+            <a:ext cx="4389120" cy="640080"/>
+          </a:xfrm>
+          <a:prstGeom prst="rect">
+            <a:avLst/>
+          </a:prstGeom>
+          <a:noFill/>
+        </p:spPr>
+        <p:txBody>
+          <a:bodyPr wrap="square">
+            <a:normAutofit/>
+          </a:bodyPr>
+          <a:lstStyle/>
+          <a:p>
+            <a:pPr algn="l">
+              <a:spcAft>
+                <a:spcPts val="200"/>
+              </a:spcAft>
+              <a:defRPr sz="1200" b="0">
+                <a:solidFill>
+                  <a:srgbClr val="212121"/>
+                </a:solidFill>
+                <a:latin typeface="맑은 고딕"/>
+              </a:defRPr>
+            </a:pPr>
+            <a:r>
+              <a:t>구조 비슷 + 스코어 크게 다른 쌍</a:t>
+            </a:r>
+          </a:p>
+          <a:p>
+            <a:pPr algn="l">
+              <a:spcAft>
+                <a:spcPts val="200"/>
+              </a:spcAft>
+              <a:defRPr sz="1200" b="0">
+                <a:solidFill>
+                  <a:srgbClr val="212121"/>
+                </a:solidFill>
+                <a:latin typeface="맑은 고딕"/>
+              </a:defRPr>
+            </a:pPr>
+            <a:r>
+              <a:t>= SAR의 핵심 발견</a:t>
+            </a:r>
+          </a:p>
+          <a:p>
+            <a:pPr algn="l">
+              <a:spcAft>
+                <a:spcPts val="200"/>
+              </a:spcAft>
+              <a:defRPr sz="1200" b="0">
+                <a:solidFill>
+                  <a:srgbClr val="212121"/>
+                </a:solidFill>
+                <a:latin typeface="맑은 고딕"/>
+              </a:defRPr>
+            </a:pPr>
+            <a:r>
+              <a:t>→ PyMOL에서 두 포즈를 겹쳐서 비교!</a:t>
             </a:r>
           </a:p>
         </p:txBody>
